--- a/docs/ecostats_lectures/lecture_09/09_01_lecture_powerpoint.pptx
+++ b/docs/ecostats_lectures/lecture_09/09_01_lecture_powerpoint.pptx
@@ -5148,8 +5148,8 @@
                               <m:d>
                                 <m:dPr>
                                   <m:begChr m:val="("/>
+                                  <m:sepChr m:val=""/>
                                   <m:endChr m:val=")"/>
-                                  <m:sepChr m:val=""/>
                                   <m:grow/>
                                 </m:dPr>
                                 <m:e>
@@ -5188,8 +5188,8 @@
                           <m:d>
                             <m:dPr>
                               <m:begChr m:val="("/>
+                              <m:sepChr m:val=""/>
                               <m:endChr m:val=")"/>
-                              <m:sepChr m:val=""/>
                               <m:grow/>
                             </m:dPr>
                             <m:e>
@@ -5248,8 +5248,8 @@
                                   <m:d>
                                     <m:dPr>
                                       <m:begChr m:val="("/>
+                                      <m:sepChr m:val=""/>
                                       <m:endChr m:val=")"/>
-                                      <m:sepChr m:val=""/>
                                       <m:grow/>
                                     </m:dPr>
                                     <m:e>
@@ -5385,8 +5385,8 @@
                             <m:d>
                               <m:dPr>
                                 <m:begChr m:val="("/>
+                                <m:sepChr m:val=""/>
                                 <m:endChr m:val=")"/>
-                                <m:sepChr m:val=""/>
                                 <m:grow/>
                               </m:dPr>
                               <m:e>
@@ -5467,8 +5467,8 @@
                         <m:d>
                           <m:dPr>
                             <m:begChr m:val="("/>
+                            <m:sepChr m:val=""/>
                             <m:endChr m:val=")"/>
-                            <m:sepChr m:val=""/>
                             <m:grow/>
                           </m:dPr>
                           <m:e>
@@ -5507,8 +5507,8 @@
                     <m:d>
                       <m:dPr>
                         <m:begChr m:val="("/>
+                        <m:sepChr m:val=""/>
                         <m:endChr m:val=")"/>
-                        <m:sepChr m:val=""/>
                         <m:grow/>
                       </m:dPr>
                       <m:e>
@@ -5632,8 +5632,8 @@
                     <m:d>
                       <m:dPr>
                         <m:begChr m:val="("/>
+                        <m:sepChr m:val=""/>
                         <m:endChr m:val=")"/>
-                        <m:sepChr m:val=""/>
                         <m:grow/>
                       </m:dPr>
                       <m:e>
@@ -5713,8 +5713,8 @@
                       <m:d>
                         <m:dPr>
                           <m:begChr m:val="("/>
+                          <m:sepChr m:val=""/>
                           <m:endChr m:val=")"/>
-                          <m:sepChr m:val=""/>
                           <m:grow/>
                         </m:dPr>
                         <m:e>
@@ -7007,8 +7007,8 @@
                         <m:d>
                           <m:dPr>
                             <m:begChr m:val="("/>
+                            <m:sepChr m:val=""/>
                             <m:endChr m:val=")"/>
-                            <m:sepChr m:val=""/>
                             <m:grow/>
                           </m:dPr>
                           <m:e>
@@ -10365,8 +10365,8 @@
                               <m:d>
                                 <m:dPr>
                                   <m:begChr m:val="("/>
+                                  <m:sepChr m:val=""/>
                                   <m:endChr m:val=")"/>
-                                  <m:sepChr m:val=""/>
                                   <m:grow/>
                                 </m:dPr>
                                 <m:e>
@@ -10405,8 +10405,8 @@
                           <m:d>
                             <m:dPr>
                               <m:begChr m:val="("/>
+                              <m:sepChr m:val=""/>
                               <m:endChr m:val=")"/>
-                              <m:sepChr m:val=""/>
                               <m:grow/>
                             </m:dPr>
                             <m:e>
@@ -10471,8 +10471,8 @@
                                       <m:d>
                                         <m:dPr>
                                           <m:begChr m:val="("/>
+                                          <m:sepChr m:val=""/>
                                           <m:endChr m:val=")"/>
-                                          <m:sepChr m:val=""/>
                                           <m:grow/>
                                         </m:dPr>
                                         <m:e>
@@ -10538,8 +10538,8 @@
                                       <m:d>
                                         <m:dPr>
                                           <m:begChr m:val="("/>
+                                          <m:sepChr m:val=""/>
                                           <m:endChr m:val=")"/>
-                                          <m:sepChr m:val=""/>
                                           <m:grow/>
                                         </m:dPr>
                                         <m:e>
@@ -10633,8 +10633,8 @@
                           <m:d>
                             <m:dPr>
                               <m:begChr m:val="("/>
+                              <m:sepChr m:val=""/>
                               <m:endChr m:val=")"/>
-                              <m:sepChr m:val=""/>
                               <m:grow/>
                             </m:dPr>
                             <m:e>

--- a/docs/ecostats_lectures/lecture_09/09_01_lecture_powerpoint.pptx
+++ b/docs/ecostats_lectures/lecture_09/09_01_lecture_powerpoint.pptx
@@ -38,6 +38,7 @@
     <p:sldId id="286" r:id="rId32"/>
     <p:sldId id="287" r:id="rId33"/>
     <p:sldId id="288" r:id="rId34"/>
+    <p:sldId id="289" r:id="rId35"/>
   </p:sldIdLst>
   <p:sldSz cx="9144000" cy="5143500" type="screen16x9"/>
   <p:notesSz cx="6858000" cy="9144000"/>
@@ -3501,7 +3502,7 @@
             </a:pPr>
             <a:r>
               <a:rPr/>
-              <a:t>Let’s check these assumptions using the lion data from Example 17.1 Lion Noses:</a:t>
+              <a:t>Let’s check these assumptions using the booby data</a:t>
             </a:r>
           </a:p>
         </p:txBody>
@@ -3571,7 +3572,7 @@
         <p:spPr>
           <a:xfrm>
             <a:off x="0" y="0"/>
-            <a:ext cx="9144000" cy="582780"/>
+            <a:ext cx="9144000" cy="871538"/>
           </a:xfrm>
         </p:spPr>
         <p:txBody>
@@ -3594,12 +3595,12 @@
       </p:sp>
       <p:sp>
         <p:nvSpPr>
-          <p:cNvPr id="3" name="Content Placeholder 2"/>
+          <p:cNvPr id="4" name="Text Placeholder 3"/>
           <p:cNvSpPr>
             <a:spLocks noGrp="1"/>
           </p:cNvSpPr>
           <p:nvPr>
-            <p:ph idx="1"/>
+            <p:ph idx="2" sz="half" type="body"/>
           </p:nvPr>
         </p:nvSpPr>
         <p:spPr/>
@@ -3654,61 +3655,1792 @@
             </a:r>
           </a:p>
           <a:p>
-            <a:pPr lvl="0" indent="0" marL="0">
+            <a:pPr lvl="0" indent="0">
               <a:buNone/>
             </a:pPr>
             <a:r>
-              <a:rPr/>
-              <a:t>To understand the amount of variation explained, you can square the Spearman’s rho value.</a:t>
-            </a:r>
-          </a:p>
-          <a:p>
-            <a:pPr lvl="0" indent="0" marL="0">
-              <a:buNone/>
-            </a:pPr>
-            <a:r>
-              <a:rPr/>
-              <a:t>For your value of 0.74485:</a:t>
-            </a:r>
-          </a:p>
-          <a:p>
-            <a:pPr lvl="0" indent="0" marL="0">
-              <a:buNone/>
-            </a:pPr>
-            <a:r>
-              <a:rPr/>
-              <a:t>ρ² = 0.74485² = 0.5548</a:t>
-            </a:r>
-          </a:p>
-          <a:p>
-            <a:pPr lvl="0" indent="0" marL="0">
-              <a:buNone/>
-            </a:pPr>
-            <a:r>
-              <a:rPr/>
-              <a:t>This means approximately 55.48% of the variance in ranks of one variable can be explained by the ranks of the other variable. This is similar to how R² works in linear regression, but specifically for ranked data.</a:t>
-            </a:r>
-          </a:p>
-          <a:p>
-            <a:pPr lvl="0" indent="0">
-              <a:buNone/>
-            </a:pPr>
-            <a:r>
-              <a:rPr>
-                <a:latin typeface="Courier"/>
-              </a:rPr>
-              <a:t>
-    Spearman's rank correlation rho
-data:  lion_data$proportion_black and lion_data$age_years
-S = 1392.1, p-value = 1.013e-06
-alternative hypothesis: true rho is not equal to 0
-sample estimates:
-      rho 
-0.7448561 </a:t>
+              <a:rPr>
+                <a:solidFill>
+                  <a:srgbClr val="5E5E5E"/>
+                </a:solidFill>
+                <a:latin typeface="Courier"/>
+              </a:rPr>
+              <a:t>#| echo: false</a:t>
+            </a:r>
+            <a:br/>
+            <a:r>
+              <a:rPr>
+                <a:solidFill>
+                  <a:srgbClr val="5E5E5E"/>
+                </a:solidFill>
+                <a:latin typeface="Courier"/>
+              </a:rPr>
+              <a:t>#| fig-height: 5</a:t>
+            </a:r>
+            <a:br/>
+            <a:r>
+              <a:rPr>
+                <a:solidFill>
+                  <a:srgbClr val="5E5E5E"/>
+                </a:solidFill>
+                <a:latin typeface="Courier"/>
+              </a:rPr>
+              <a:t>#| fig-width: 5</a:t>
+            </a:r>
+            <a:br/>
+            <a:r>
+              <a:rPr>
+                <a:solidFill>
+                  <a:srgbClr val="5E5E5E"/>
+                </a:solidFill>
+                <a:latin typeface="Courier"/>
+              </a:rPr>
+              <a:t>#| message: false</a:t>
+            </a:r>
+            <a:br/>
+            <a:r>
+              <a:rPr>
+                <a:solidFill>
+                  <a:srgbClr val="5E5E5E"/>
+                </a:solidFill>
+                <a:latin typeface="Courier"/>
+              </a:rPr>
+              <a:t>#| warning: false</a:t>
+            </a:r>
+            <a:br/>
+            <a:br/>
+            <a:br/>
+            <a:r>
+              <a:rPr>
+                <a:solidFill>
+                  <a:srgbClr val="003B4F"/>
+                </a:solidFill>
+                <a:latin typeface="Courier"/>
+              </a:rPr>
+              <a:t>p1_lion &lt;- </a:t>
+            </a:r>
+            <a:r>
+              <a:rPr>
+                <a:solidFill>
+                  <a:srgbClr val="4758AB"/>
+                </a:solidFill>
+                <a:latin typeface="Courier"/>
+              </a:rPr>
+              <a:t>ggplot</a:t>
+            </a:r>
+            <a:r>
+              <a:rPr>
+                <a:solidFill>
+                  <a:srgbClr val="003B4F"/>
+                </a:solidFill>
+                <a:latin typeface="Courier"/>
+              </a:rPr>
+              <a:t>(lion_data, </a:t>
+            </a:r>
+            <a:r>
+              <a:rPr>
+                <a:solidFill>
+                  <a:srgbClr val="4758AB"/>
+                </a:solidFill>
+                <a:latin typeface="Courier"/>
+              </a:rPr>
+              <a:t>aes</a:t>
+            </a:r>
+            <a:r>
+              <a:rPr>
+                <a:solidFill>
+                  <a:srgbClr val="003B4F"/>
+                </a:solidFill>
+                <a:latin typeface="Courier"/>
+              </a:rPr>
+              <a:t>(</a:t>
+            </a:r>
+            <a:r>
+              <a:rPr>
+                <a:solidFill>
+                  <a:srgbClr val="657422"/>
+                </a:solidFill>
+                <a:latin typeface="Courier"/>
+              </a:rPr>
+              <a:t>x =</a:t>
+            </a:r>
+            <a:r>
+              <a:rPr>
+                <a:solidFill>
+                  <a:srgbClr val="003B4F"/>
+                </a:solidFill>
+                <a:latin typeface="Courier"/>
+              </a:rPr>
+              <a:t> proportion_black)) </a:t>
+            </a:r>
+            <a:r>
+              <a:rPr>
+                <a:solidFill>
+                  <a:srgbClr val="5E5E5E"/>
+                </a:solidFill>
+                <a:latin typeface="Courier"/>
+              </a:rPr>
+              <a:t>+</a:t>
+            </a:r>
+            <a:br/>
+            <a:r>
+              <a:rPr>
+                <a:solidFill>
+                  <a:srgbClr val="003B4F"/>
+                </a:solidFill>
+                <a:latin typeface="Courier"/>
+              </a:rPr>
+              <a:t>  </a:t>
+            </a:r>
+            <a:r>
+              <a:rPr>
+                <a:solidFill>
+                  <a:srgbClr val="4758AB"/>
+                </a:solidFill>
+                <a:latin typeface="Courier"/>
+              </a:rPr>
+              <a:t>geom_histogram</a:t>
+            </a:r>
+            <a:r>
+              <a:rPr>
+                <a:solidFill>
+                  <a:srgbClr val="003B4F"/>
+                </a:solidFill>
+                <a:latin typeface="Courier"/>
+              </a:rPr>
+              <a:t>(</a:t>
+            </a:r>
+            <a:r>
+              <a:rPr>
+                <a:solidFill>
+                  <a:srgbClr val="657422"/>
+                </a:solidFill>
+                <a:latin typeface="Courier"/>
+              </a:rPr>
+              <a:t>bins =</a:t>
+            </a:r>
+            <a:r>
+              <a:rPr>
+                <a:solidFill>
+                  <a:srgbClr val="003B4F"/>
+                </a:solidFill>
+                <a:latin typeface="Courier"/>
+              </a:rPr>
+              <a:t> </a:t>
+            </a:r>
+            <a:r>
+              <a:rPr>
+                <a:solidFill>
+                  <a:srgbClr val="AD0000"/>
+                </a:solidFill>
+                <a:latin typeface="Courier"/>
+              </a:rPr>
+              <a:t>10</a:t>
+            </a:r>
+            <a:r>
+              <a:rPr>
+                <a:solidFill>
+                  <a:srgbClr val="003B4F"/>
+                </a:solidFill>
+                <a:latin typeface="Courier"/>
+              </a:rPr>
+              <a:t>, </a:t>
+            </a:r>
+            <a:r>
+              <a:rPr>
+                <a:solidFill>
+                  <a:srgbClr val="657422"/>
+                </a:solidFill>
+                <a:latin typeface="Courier"/>
+              </a:rPr>
+              <a:t>fill =</a:t>
+            </a:r>
+            <a:r>
+              <a:rPr>
+                <a:solidFill>
+                  <a:srgbClr val="003B4F"/>
+                </a:solidFill>
+                <a:latin typeface="Courier"/>
+              </a:rPr>
+              <a:t> </a:t>
+            </a:r>
+            <a:r>
+              <a:rPr>
+                <a:solidFill>
+                  <a:srgbClr val="20794D"/>
+                </a:solidFill>
+                <a:latin typeface="Courier"/>
+              </a:rPr>
+              <a:t>"lightblue"</a:t>
+            </a:r>
+            <a:r>
+              <a:rPr>
+                <a:solidFill>
+                  <a:srgbClr val="003B4F"/>
+                </a:solidFill>
+                <a:latin typeface="Courier"/>
+              </a:rPr>
+              <a:t>, </a:t>
+            </a:r>
+            <a:r>
+              <a:rPr>
+                <a:solidFill>
+                  <a:srgbClr val="657422"/>
+                </a:solidFill>
+                <a:latin typeface="Courier"/>
+              </a:rPr>
+              <a:t>color =</a:t>
+            </a:r>
+            <a:r>
+              <a:rPr>
+                <a:solidFill>
+                  <a:srgbClr val="003B4F"/>
+                </a:solidFill>
+                <a:latin typeface="Courier"/>
+              </a:rPr>
+              <a:t> </a:t>
+            </a:r>
+            <a:r>
+              <a:rPr>
+                <a:solidFill>
+                  <a:srgbClr val="20794D"/>
+                </a:solidFill>
+                <a:latin typeface="Courier"/>
+              </a:rPr>
+              <a:t>"black"</a:t>
+            </a:r>
+            <a:r>
+              <a:rPr>
+                <a:solidFill>
+                  <a:srgbClr val="003B4F"/>
+                </a:solidFill>
+                <a:latin typeface="Courier"/>
+              </a:rPr>
+              <a:t>) </a:t>
+            </a:r>
+            <a:r>
+              <a:rPr>
+                <a:solidFill>
+                  <a:srgbClr val="5E5E5E"/>
+                </a:solidFill>
+                <a:latin typeface="Courier"/>
+              </a:rPr>
+              <a:t>+</a:t>
+            </a:r>
+            <a:br/>
+            <a:r>
+              <a:rPr>
+                <a:solidFill>
+                  <a:srgbClr val="003B4F"/>
+                </a:solidFill>
+                <a:latin typeface="Courier"/>
+              </a:rPr>
+              <a:t>  </a:t>
+            </a:r>
+            <a:r>
+              <a:rPr>
+                <a:solidFill>
+                  <a:srgbClr val="4758AB"/>
+                </a:solidFill>
+                <a:latin typeface="Courier"/>
+              </a:rPr>
+              <a:t>labs</a:t>
+            </a:r>
+            <a:r>
+              <a:rPr>
+                <a:solidFill>
+                  <a:srgbClr val="003B4F"/>
+                </a:solidFill>
+                <a:latin typeface="Courier"/>
+              </a:rPr>
+              <a:t>(</a:t>
+            </a:r>
+            <a:r>
+              <a:rPr>
+                <a:solidFill>
+                  <a:srgbClr val="657422"/>
+                </a:solidFill>
+                <a:latin typeface="Courier"/>
+              </a:rPr>
+              <a:t>title =</a:t>
+            </a:r>
+            <a:r>
+              <a:rPr>
+                <a:solidFill>
+                  <a:srgbClr val="003B4F"/>
+                </a:solidFill>
+                <a:latin typeface="Courier"/>
+              </a:rPr>
+              <a:t> </a:t>
+            </a:r>
+            <a:r>
+              <a:rPr>
+                <a:solidFill>
+                  <a:srgbClr val="20794D"/>
+                </a:solidFill>
+                <a:latin typeface="Courier"/>
+              </a:rPr>
+              <a:t>"Prop black"</a:t>
+            </a:r>
+            <a:r>
+              <a:rPr>
+                <a:solidFill>
+                  <a:srgbClr val="003B4F"/>
+                </a:solidFill>
+                <a:latin typeface="Courier"/>
+              </a:rPr>
+              <a:t>,</a:t>
+            </a:r>
+            <a:br/>
+            <a:r>
+              <a:rPr>
+                <a:solidFill>
+                  <a:srgbClr val="003B4F"/>
+                </a:solidFill>
+                <a:latin typeface="Courier"/>
+              </a:rPr>
+              <a:t>       </a:t>
+            </a:r>
+            <a:r>
+              <a:rPr>
+                <a:solidFill>
+                  <a:srgbClr val="657422"/>
+                </a:solidFill>
+                <a:latin typeface="Courier"/>
+              </a:rPr>
+              <a:t>x =</a:t>
+            </a:r>
+            <a:r>
+              <a:rPr>
+                <a:solidFill>
+                  <a:srgbClr val="003B4F"/>
+                </a:solidFill>
+                <a:latin typeface="Courier"/>
+              </a:rPr>
+              <a:t> </a:t>
+            </a:r>
+            <a:r>
+              <a:rPr>
+                <a:solidFill>
+                  <a:srgbClr val="20794D"/>
+                </a:solidFill>
+                <a:latin typeface="Courier"/>
+              </a:rPr>
+              <a:t>"Visits"</a:t>
+            </a:r>
+            <a:r>
+              <a:rPr>
+                <a:solidFill>
+                  <a:srgbClr val="003B4F"/>
+                </a:solidFill>
+                <a:latin typeface="Courier"/>
+              </a:rPr>
+              <a:t>,</a:t>
+            </a:r>
+            <a:br/>
+            <a:r>
+              <a:rPr>
+                <a:solidFill>
+                  <a:srgbClr val="003B4F"/>
+                </a:solidFill>
+                <a:latin typeface="Courier"/>
+              </a:rPr>
+              <a:t>       </a:t>
+            </a:r>
+            <a:r>
+              <a:rPr>
+                <a:solidFill>
+                  <a:srgbClr val="657422"/>
+                </a:solidFill>
+                <a:latin typeface="Courier"/>
+              </a:rPr>
+              <a:t>y =</a:t>
+            </a:r>
+            <a:r>
+              <a:rPr>
+                <a:solidFill>
+                  <a:srgbClr val="003B4F"/>
+                </a:solidFill>
+                <a:latin typeface="Courier"/>
+              </a:rPr>
+              <a:t> </a:t>
+            </a:r>
+            <a:r>
+              <a:rPr>
+                <a:solidFill>
+                  <a:srgbClr val="20794D"/>
+                </a:solidFill>
+                <a:latin typeface="Courier"/>
+              </a:rPr>
+              <a:t>"Frequency"</a:t>
+            </a:r>
+            <a:r>
+              <a:rPr>
+                <a:solidFill>
+                  <a:srgbClr val="003B4F"/>
+                </a:solidFill>
+                <a:latin typeface="Courier"/>
+              </a:rPr>
+              <a:t>) </a:t>
+            </a:r>
+            <a:r>
+              <a:rPr>
+                <a:solidFill>
+                  <a:srgbClr val="5E5E5E"/>
+                </a:solidFill>
+                <a:latin typeface="Courier"/>
+              </a:rPr>
+              <a:t>+</a:t>
+            </a:r>
+            <a:br/>
+            <a:r>
+              <a:rPr>
+                <a:solidFill>
+                  <a:srgbClr val="003B4F"/>
+                </a:solidFill>
+                <a:latin typeface="Courier"/>
+              </a:rPr>
+              <a:t>  </a:t>
+            </a:r>
+            <a:r>
+              <a:rPr>
+                <a:solidFill>
+                  <a:srgbClr val="4758AB"/>
+                </a:solidFill>
+                <a:latin typeface="Courier"/>
+              </a:rPr>
+              <a:t>theme_minimal</a:t>
+            </a:r>
+            <a:r>
+              <a:rPr>
+                <a:solidFill>
+                  <a:srgbClr val="003B4F"/>
+                </a:solidFill>
+                <a:latin typeface="Courier"/>
+              </a:rPr>
+              <a:t>()</a:t>
+            </a:r>
+            <a:br/>
+            <a:br/>
+            <a:r>
+              <a:rPr>
+                <a:solidFill>
+                  <a:srgbClr val="003B4F"/>
+                </a:solidFill>
+                <a:latin typeface="Courier"/>
+              </a:rPr>
+              <a:t>p2_lion &lt;- </a:t>
+            </a:r>
+            <a:r>
+              <a:rPr>
+                <a:solidFill>
+                  <a:srgbClr val="4758AB"/>
+                </a:solidFill>
+                <a:latin typeface="Courier"/>
+              </a:rPr>
+              <a:t>ggplot</a:t>
+            </a:r>
+            <a:r>
+              <a:rPr>
+                <a:solidFill>
+                  <a:srgbClr val="003B4F"/>
+                </a:solidFill>
+                <a:latin typeface="Courier"/>
+              </a:rPr>
+              <a:t>(lion_data, </a:t>
+            </a:r>
+            <a:r>
+              <a:rPr>
+                <a:solidFill>
+                  <a:srgbClr val="4758AB"/>
+                </a:solidFill>
+                <a:latin typeface="Courier"/>
+              </a:rPr>
+              <a:t>aes</a:t>
+            </a:r>
+            <a:r>
+              <a:rPr>
+                <a:solidFill>
+                  <a:srgbClr val="003B4F"/>
+                </a:solidFill>
+                <a:latin typeface="Courier"/>
+              </a:rPr>
+              <a:t>(</a:t>
+            </a:r>
+            <a:r>
+              <a:rPr>
+                <a:solidFill>
+                  <a:srgbClr val="657422"/>
+                </a:solidFill>
+                <a:latin typeface="Courier"/>
+              </a:rPr>
+              <a:t>x =</a:t>
+            </a:r>
+            <a:r>
+              <a:rPr>
+                <a:solidFill>
+                  <a:srgbClr val="003B4F"/>
+                </a:solidFill>
+                <a:latin typeface="Courier"/>
+              </a:rPr>
+              <a:t> age_years)) </a:t>
+            </a:r>
+            <a:r>
+              <a:rPr>
+                <a:solidFill>
+                  <a:srgbClr val="5E5E5E"/>
+                </a:solidFill>
+                <a:latin typeface="Courier"/>
+              </a:rPr>
+              <a:t>+</a:t>
+            </a:r>
+            <a:br/>
+            <a:r>
+              <a:rPr>
+                <a:solidFill>
+                  <a:srgbClr val="003B4F"/>
+                </a:solidFill>
+                <a:latin typeface="Courier"/>
+              </a:rPr>
+              <a:t>  </a:t>
+            </a:r>
+            <a:r>
+              <a:rPr>
+                <a:solidFill>
+                  <a:srgbClr val="4758AB"/>
+                </a:solidFill>
+                <a:latin typeface="Courier"/>
+              </a:rPr>
+              <a:t>geom_histogram</a:t>
+            </a:r>
+            <a:r>
+              <a:rPr>
+                <a:solidFill>
+                  <a:srgbClr val="003B4F"/>
+                </a:solidFill>
+                <a:latin typeface="Courier"/>
+              </a:rPr>
+              <a:t>(</a:t>
+            </a:r>
+            <a:r>
+              <a:rPr>
+                <a:solidFill>
+                  <a:srgbClr val="657422"/>
+                </a:solidFill>
+                <a:latin typeface="Courier"/>
+              </a:rPr>
+              <a:t>bins =</a:t>
+            </a:r>
+            <a:r>
+              <a:rPr>
+                <a:solidFill>
+                  <a:srgbClr val="003B4F"/>
+                </a:solidFill>
+                <a:latin typeface="Courier"/>
+              </a:rPr>
+              <a:t> </a:t>
+            </a:r>
+            <a:r>
+              <a:rPr>
+                <a:solidFill>
+                  <a:srgbClr val="AD0000"/>
+                </a:solidFill>
+                <a:latin typeface="Courier"/>
+              </a:rPr>
+              <a:t>10</a:t>
+            </a:r>
+            <a:r>
+              <a:rPr>
+                <a:solidFill>
+                  <a:srgbClr val="003B4F"/>
+                </a:solidFill>
+                <a:latin typeface="Courier"/>
+              </a:rPr>
+              <a:t>, </a:t>
+            </a:r>
+            <a:r>
+              <a:rPr>
+                <a:solidFill>
+                  <a:srgbClr val="657422"/>
+                </a:solidFill>
+                <a:latin typeface="Courier"/>
+              </a:rPr>
+              <a:t>fill =</a:t>
+            </a:r>
+            <a:r>
+              <a:rPr>
+                <a:solidFill>
+                  <a:srgbClr val="003B4F"/>
+                </a:solidFill>
+                <a:latin typeface="Courier"/>
+              </a:rPr>
+              <a:t> </a:t>
+            </a:r>
+            <a:r>
+              <a:rPr>
+                <a:solidFill>
+                  <a:srgbClr val="20794D"/>
+                </a:solidFill>
+                <a:latin typeface="Courier"/>
+              </a:rPr>
+              <a:t>"lightgreen"</a:t>
+            </a:r>
+            <a:r>
+              <a:rPr>
+                <a:solidFill>
+                  <a:srgbClr val="003B4F"/>
+                </a:solidFill>
+                <a:latin typeface="Courier"/>
+              </a:rPr>
+              <a:t>, </a:t>
+            </a:r>
+            <a:r>
+              <a:rPr>
+                <a:solidFill>
+                  <a:srgbClr val="657422"/>
+                </a:solidFill>
+                <a:latin typeface="Courier"/>
+              </a:rPr>
+              <a:t>color =</a:t>
+            </a:r>
+            <a:r>
+              <a:rPr>
+                <a:solidFill>
+                  <a:srgbClr val="003B4F"/>
+                </a:solidFill>
+                <a:latin typeface="Courier"/>
+              </a:rPr>
+              <a:t> </a:t>
+            </a:r>
+            <a:r>
+              <a:rPr>
+                <a:solidFill>
+                  <a:srgbClr val="20794D"/>
+                </a:solidFill>
+                <a:latin typeface="Courier"/>
+              </a:rPr>
+              <a:t>"black"</a:t>
+            </a:r>
+            <a:r>
+              <a:rPr>
+                <a:solidFill>
+                  <a:srgbClr val="003B4F"/>
+                </a:solidFill>
+                <a:latin typeface="Courier"/>
+              </a:rPr>
+              <a:t>) </a:t>
+            </a:r>
+            <a:r>
+              <a:rPr>
+                <a:solidFill>
+                  <a:srgbClr val="5E5E5E"/>
+                </a:solidFill>
+                <a:latin typeface="Courier"/>
+              </a:rPr>
+              <a:t>+</a:t>
+            </a:r>
+            <a:br/>
+            <a:r>
+              <a:rPr>
+                <a:solidFill>
+                  <a:srgbClr val="003B4F"/>
+                </a:solidFill>
+                <a:latin typeface="Courier"/>
+              </a:rPr>
+              <a:t>  </a:t>
+            </a:r>
+            <a:r>
+              <a:rPr>
+                <a:solidFill>
+                  <a:srgbClr val="4758AB"/>
+                </a:solidFill>
+                <a:latin typeface="Courier"/>
+              </a:rPr>
+              <a:t>labs</a:t>
+            </a:r>
+            <a:r>
+              <a:rPr>
+                <a:solidFill>
+                  <a:srgbClr val="003B4F"/>
+                </a:solidFill>
+                <a:latin typeface="Courier"/>
+              </a:rPr>
+              <a:t>(</a:t>
+            </a:r>
+            <a:r>
+              <a:rPr>
+                <a:solidFill>
+                  <a:srgbClr val="657422"/>
+                </a:solidFill>
+                <a:latin typeface="Courier"/>
+              </a:rPr>
+              <a:t>title =</a:t>
+            </a:r>
+            <a:r>
+              <a:rPr>
+                <a:solidFill>
+                  <a:srgbClr val="003B4F"/>
+                </a:solidFill>
+                <a:latin typeface="Courier"/>
+              </a:rPr>
+              <a:t> </a:t>
+            </a:r>
+            <a:r>
+              <a:rPr>
+                <a:solidFill>
+                  <a:srgbClr val="20794D"/>
+                </a:solidFill>
+                <a:latin typeface="Courier"/>
+              </a:rPr>
+              <a:t>"Age"</a:t>
+            </a:r>
+            <a:r>
+              <a:rPr>
+                <a:solidFill>
+                  <a:srgbClr val="003B4F"/>
+                </a:solidFill>
+                <a:latin typeface="Courier"/>
+              </a:rPr>
+              <a:t>,</a:t>
+            </a:r>
+            <a:br/>
+            <a:r>
+              <a:rPr>
+                <a:solidFill>
+                  <a:srgbClr val="003B4F"/>
+                </a:solidFill>
+                <a:latin typeface="Courier"/>
+              </a:rPr>
+              <a:t>       </a:t>
+            </a:r>
+            <a:r>
+              <a:rPr>
+                <a:solidFill>
+                  <a:srgbClr val="657422"/>
+                </a:solidFill>
+                <a:latin typeface="Courier"/>
+              </a:rPr>
+              <a:t>x =</a:t>
+            </a:r>
+            <a:r>
+              <a:rPr>
+                <a:solidFill>
+                  <a:srgbClr val="003B4F"/>
+                </a:solidFill>
+                <a:latin typeface="Courier"/>
+              </a:rPr>
+              <a:t> </a:t>
+            </a:r>
+            <a:r>
+              <a:rPr>
+                <a:solidFill>
+                  <a:srgbClr val="20794D"/>
+                </a:solidFill>
+                <a:latin typeface="Courier"/>
+              </a:rPr>
+              <a:t>"Age"</a:t>
+            </a:r>
+            <a:r>
+              <a:rPr>
+                <a:solidFill>
+                  <a:srgbClr val="003B4F"/>
+                </a:solidFill>
+                <a:latin typeface="Courier"/>
+              </a:rPr>
+              <a:t>,</a:t>
+            </a:r>
+            <a:br/>
+            <a:r>
+              <a:rPr>
+                <a:solidFill>
+                  <a:srgbClr val="003B4F"/>
+                </a:solidFill>
+                <a:latin typeface="Courier"/>
+              </a:rPr>
+              <a:t>       </a:t>
+            </a:r>
+            <a:r>
+              <a:rPr>
+                <a:solidFill>
+                  <a:srgbClr val="657422"/>
+                </a:solidFill>
+                <a:latin typeface="Courier"/>
+              </a:rPr>
+              <a:t>y =</a:t>
+            </a:r>
+            <a:r>
+              <a:rPr>
+                <a:solidFill>
+                  <a:srgbClr val="003B4F"/>
+                </a:solidFill>
+                <a:latin typeface="Courier"/>
+              </a:rPr>
+              <a:t> </a:t>
+            </a:r>
+            <a:r>
+              <a:rPr>
+                <a:solidFill>
+                  <a:srgbClr val="20794D"/>
+                </a:solidFill>
+                <a:latin typeface="Courier"/>
+              </a:rPr>
+              <a:t>"Frequency"</a:t>
+            </a:r>
+            <a:r>
+              <a:rPr>
+                <a:solidFill>
+                  <a:srgbClr val="003B4F"/>
+                </a:solidFill>
+                <a:latin typeface="Courier"/>
+              </a:rPr>
+              <a:t>) </a:t>
+            </a:r>
+            <a:r>
+              <a:rPr>
+                <a:solidFill>
+                  <a:srgbClr val="5E5E5E"/>
+                </a:solidFill>
+                <a:latin typeface="Courier"/>
+              </a:rPr>
+              <a:t>+</a:t>
+            </a:r>
+            <a:br/>
+            <a:r>
+              <a:rPr>
+                <a:solidFill>
+                  <a:srgbClr val="003B4F"/>
+                </a:solidFill>
+                <a:latin typeface="Courier"/>
+              </a:rPr>
+              <a:t>  </a:t>
+            </a:r>
+            <a:r>
+              <a:rPr>
+                <a:solidFill>
+                  <a:srgbClr val="4758AB"/>
+                </a:solidFill>
+                <a:latin typeface="Courier"/>
+              </a:rPr>
+              <a:t>theme_minimal</a:t>
+            </a:r>
+            <a:r>
+              <a:rPr>
+                <a:solidFill>
+                  <a:srgbClr val="003B4F"/>
+                </a:solidFill>
+                <a:latin typeface="Courier"/>
+              </a:rPr>
+              <a:t>()</a:t>
+            </a:r>
+            <a:br/>
+            <a:br/>
+            <a:r>
+              <a:rPr>
+                <a:solidFill>
+                  <a:srgbClr val="003B4F"/>
+                </a:solidFill>
+                <a:latin typeface="Courier"/>
+              </a:rPr>
+              <a:t>p3_lion &lt;- </a:t>
+            </a:r>
+            <a:r>
+              <a:rPr>
+                <a:solidFill>
+                  <a:srgbClr val="4758AB"/>
+                </a:solidFill>
+                <a:latin typeface="Courier"/>
+              </a:rPr>
+              <a:t>ggplot</a:t>
+            </a:r>
+            <a:r>
+              <a:rPr>
+                <a:solidFill>
+                  <a:srgbClr val="003B4F"/>
+                </a:solidFill>
+                <a:latin typeface="Courier"/>
+              </a:rPr>
+              <a:t>(lion_data, </a:t>
+            </a:r>
+            <a:r>
+              <a:rPr>
+                <a:solidFill>
+                  <a:srgbClr val="4758AB"/>
+                </a:solidFill>
+                <a:latin typeface="Courier"/>
+              </a:rPr>
+              <a:t>aes</a:t>
+            </a:r>
+            <a:r>
+              <a:rPr>
+                <a:solidFill>
+                  <a:srgbClr val="003B4F"/>
+                </a:solidFill>
+                <a:latin typeface="Courier"/>
+              </a:rPr>
+              <a:t>(</a:t>
+            </a:r>
+            <a:r>
+              <a:rPr>
+                <a:solidFill>
+                  <a:srgbClr val="657422"/>
+                </a:solidFill>
+                <a:latin typeface="Courier"/>
+              </a:rPr>
+              <a:t>sample =</a:t>
+            </a:r>
+            <a:r>
+              <a:rPr>
+                <a:solidFill>
+                  <a:srgbClr val="003B4F"/>
+                </a:solidFill>
+                <a:latin typeface="Courier"/>
+              </a:rPr>
+              <a:t> proportion_black)) </a:t>
+            </a:r>
+            <a:r>
+              <a:rPr>
+                <a:solidFill>
+                  <a:srgbClr val="5E5E5E"/>
+                </a:solidFill>
+                <a:latin typeface="Courier"/>
+              </a:rPr>
+              <a:t>+</a:t>
+            </a:r>
+            <a:br/>
+            <a:r>
+              <a:rPr>
+                <a:solidFill>
+                  <a:srgbClr val="003B4F"/>
+                </a:solidFill>
+                <a:latin typeface="Courier"/>
+              </a:rPr>
+              <a:t>  </a:t>
+            </a:r>
+            <a:r>
+              <a:rPr>
+                <a:solidFill>
+                  <a:srgbClr val="4758AB"/>
+                </a:solidFill>
+                <a:latin typeface="Courier"/>
+              </a:rPr>
+              <a:t>geom_qq</a:t>
+            </a:r>
+            <a:r>
+              <a:rPr>
+                <a:solidFill>
+                  <a:srgbClr val="003B4F"/>
+                </a:solidFill>
+                <a:latin typeface="Courier"/>
+              </a:rPr>
+              <a:t>() </a:t>
+            </a:r>
+            <a:r>
+              <a:rPr>
+                <a:solidFill>
+                  <a:srgbClr val="5E5E5E"/>
+                </a:solidFill>
+                <a:latin typeface="Courier"/>
+              </a:rPr>
+              <a:t>+</a:t>
+            </a:r>
+            <a:br/>
+            <a:r>
+              <a:rPr>
+                <a:solidFill>
+                  <a:srgbClr val="003B4F"/>
+                </a:solidFill>
+                <a:latin typeface="Courier"/>
+              </a:rPr>
+              <a:t>  </a:t>
+            </a:r>
+            <a:r>
+              <a:rPr>
+                <a:solidFill>
+                  <a:srgbClr val="4758AB"/>
+                </a:solidFill>
+                <a:latin typeface="Courier"/>
+              </a:rPr>
+              <a:t>geom_qq_line</a:t>
+            </a:r>
+            <a:r>
+              <a:rPr>
+                <a:solidFill>
+                  <a:srgbClr val="003B4F"/>
+                </a:solidFill>
+                <a:latin typeface="Courier"/>
+              </a:rPr>
+              <a:t>() </a:t>
+            </a:r>
+            <a:r>
+              <a:rPr>
+                <a:solidFill>
+                  <a:srgbClr val="5E5E5E"/>
+                </a:solidFill>
+                <a:latin typeface="Courier"/>
+              </a:rPr>
+              <a:t>+</a:t>
+            </a:r>
+            <a:br/>
+            <a:r>
+              <a:rPr>
+                <a:solidFill>
+                  <a:srgbClr val="003B4F"/>
+                </a:solidFill>
+                <a:latin typeface="Courier"/>
+              </a:rPr>
+              <a:t>  </a:t>
+            </a:r>
+            <a:r>
+              <a:rPr>
+                <a:solidFill>
+                  <a:srgbClr val="4758AB"/>
+                </a:solidFill>
+                <a:latin typeface="Courier"/>
+              </a:rPr>
+              <a:t>labs</a:t>
+            </a:r>
+            <a:r>
+              <a:rPr>
+                <a:solidFill>
+                  <a:srgbClr val="003B4F"/>
+                </a:solidFill>
+                <a:latin typeface="Courier"/>
+              </a:rPr>
+              <a:t>(</a:t>
+            </a:r>
+            <a:r>
+              <a:rPr>
+                <a:solidFill>
+                  <a:srgbClr val="657422"/>
+                </a:solidFill>
+                <a:latin typeface="Courier"/>
+              </a:rPr>
+              <a:t>title =</a:t>
+            </a:r>
+            <a:r>
+              <a:rPr>
+                <a:solidFill>
+                  <a:srgbClr val="003B4F"/>
+                </a:solidFill>
+                <a:latin typeface="Courier"/>
+              </a:rPr>
+              <a:t> </a:t>
+            </a:r>
+            <a:r>
+              <a:rPr>
+                <a:solidFill>
+                  <a:srgbClr val="20794D"/>
+                </a:solidFill>
+                <a:latin typeface="Courier"/>
+              </a:rPr>
+              <a:t>"Q-Q Plot Prop Black"</a:t>
+            </a:r>
+            <a:r>
+              <a:rPr>
+                <a:solidFill>
+                  <a:srgbClr val="003B4F"/>
+                </a:solidFill>
+                <a:latin typeface="Courier"/>
+              </a:rPr>
+              <a:t>,</a:t>
+            </a:r>
+            <a:br/>
+            <a:r>
+              <a:rPr>
+                <a:solidFill>
+                  <a:srgbClr val="003B4F"/>
+                </a:solidFill>
+                <a:latin typeface="Courier"/>
+              </a:rPr>
+              <a:t>       </a:t>
+            </a:r>
+            <a:r>
+              <a:rPr>
+                <a:solidFill>
+                  <a:srgbClr val="657422"/>
+                </a:solidFill>
+                <a:latin typeface="Courier"/>
+              </a:rPr>
+              <a:t>x =</a:t>
+            </a:r>
+            <a:r>
+              <a:rPr>
+                <a:solidFill>
+                  <a:srgbClr val="003B4F"/>
+                </a:solidFill>
+                <a:latin typeface="Courier"/>
+              </a:rPr>
+              <a:t> </a:t>
+            </a:r>
+            <a:r>
+              <a:rPr>
+                <a:solidFill>
+                  <a:srgbClr val="20794D"/>
+                </a:solidFill>
+                <a:latin typeface="Courier"/>
+              </a:rPr>
+              <a:t>"Theoretical Quantiles"</a:t>
+            </a:r>
+            <a:r>
+              <a:rPr>
+                <a:solidFill>
+                  <a:srgbClr val="003B4F"/>
+                </a:solidFill>
+                <a:latin typeface="Courier"/>
+              </a:rPr>
+              <a:t>,</a:t>
+            </a:r>
+            <a:br/>
+            <a:r>
+              <a:rPr>
+                <a:solidFill>
+                  <a:srgbClr val="003B4F"/>
+                </a:solidFill>
+                <a:latin typeface="Courier"/>
+              </a:rPr>
+              <a:t>       </a:t>
+            </a:r>
+            <a:r>
+              <a:rPr>
+                <a:solidFill>
+                  <a:srgbClr val="657422"/>
+                </a:solidFill>
+                <a:latin typeface="Courier"/>
+              </a:rPr>
+              <a:t>y =</a:t>
+            </a:r>
+            <a:r>
+              <a:rPr>
+                <a:solidFill>
+                  <a:srgbClr val="003B4F"/>
+                </a:solidFill>
+                <a:latin typeface="Courier"/>
+              </a:rPr>
+              <a:t> </a:t>
+            </a:r>
+            <a:r>
+              <a:rPr>
+                <a:solidFill>
+                  <a:srgbClr val="20794D"/>
+                </a:solidFill>
+                <a:latin typeface="Courier"/>
+              </a:rPr>
+              <a:t>"Sample Quantiles"</a:t>
+            </a:r>
+            <a:r>
+              <a:rPr>
+                <a:solidFill>
+                  <a:srgbClr val="003B4F"/>
+                </a:solidFill>
+                <a:latin typeface="Courier"/>
+              </a:rPr>
+              <a:t>) </a:t>
+            </a:r>
+            <a:r>
+              <a:rPr>
+                <a:solidFill>
+                  <a:srgbClr val="5E5E5E"/>
+                </a:solidFill>
+                <a:latin typeface="Courier"/>
+              </a:rPr>
+              <a:t>+</a:t>
+            </a:r>
+            <a:br/>
+            <a:r>
+              <a:rPr>
+                <a:solidFill>
+                  <a:srgbClr val="003B4F"/>
+                </a:solidFill>
+                <a:latin typeface="Courier"/>
+              </a:rPr>
+              <a:t>  </a:t>
+            </a:r>
+            <a:r>
+              <a:rPr>
+                <a:solidFill>
+                  <a:srgbClr val="4758AB"/>
+                </a:solidFill>
+                <a:latin typeface="Courier"/>
+              </a:rPr>
+              <a:t>theme_minimal</a:t>
+            </a:r>
+            <a:r>
+              <a:rPr>
+                <a:solidFill>
+                  <a:srgbClr val="003B4F"/>
+                </a:solidFill>
+                <a:latin typeface="Courier"/>
+              </a:rPr>
+              <a:t>()</a:t>
+            </a:r>
+            <a:r>
+              <a:rPr>
+                <a:solidFill>
+                  <a:srgbClr val="5E5E5E"/>
+                </a:solidFill>
+                <a:latin typeface="Courier"/>
+              </a:rPr>
+              <a:t>+</a:t>
+            </a:r>
+            <a:r>
+              <a:rPr>
+                <a:solidFill>
+                  <a:srgbClr val="4758AB"/>
+                </a:solidFill>
+                <a:latin typeface="Courier"/>
+              </a:rPr>
+              <a:t>theme</a:t>
+            </a:r>
+            <a:r>
+              <a:rPr>
+                <a:solidFill>
+                  <a:srgbClr val="003B4F"/>
+                </a:solidFill>
+                <a:latin typeface="Courier"/>
+              </a:rPr>
+              <a:t>(</a:t>
+            </a:r>
+            <a:br/>
+            <a:r>
+              <a:rPr>
+                <a:solidFill>
+                  <a:srgbClr val="003B4F"/>
+                </a:solidFill>
+                <a:latin typeface="Courier"/>
+              </a:rPr>
+              <a:t>    </a:t>
+            </a:r>
+            <a:r>
+              <a:rPr>
+                <a:solidFill>
+                  <a:srgbClr val="657422"/>
+                </a:solidFill>
+                <a:latin typeface="Courier"/>
+              </a:rPr>
+              <a:t>axis.title.x =</a:t>
+            </a:r>
+            <a:r>
+              <a:rPr>
+                <a:solidFill>
+                  <a:srgbClr val="003B4F"/>
+                </a:solidFill>
+                <a:latin typeface="Courier"/>
+              </a:rPr>
+              <a:t> </a:t>
+            </a:r>
+            <a:r>
+              <a:rPr>
+                <a:solidFill>
+                  <a:srgbClr val="4758AB"/>
+                </a:solidFill>
+                <a:latin typeface="Courier"/>
+              </a:rPr>
+              <a:t>element_blank</a:t>
+            </a:r>
+            <a:r>
+              <a:rPr>
+                <a:solidFill>
+                  <a:srgbClr val="003B4F"/>
+                </a:solidFill>
+                <a:latin typeface="Courier"/>
+              </a:rPr>
+              <a:t>(),</a:t>
+            </a:r>
+            <a:br/>
+            <a:r>
+              <a:rPr>
+                <a:solidFill>
+                  <a:srgbClr val="003B4F"/>
+                </a:solidFill>
+                <a:latin typeface="Courier"/>
+              </a:rPr>
+              <a:t>    </a:t>
+            </a:r>
+            <a:r>
+              <a:rPr>
+                <a:solidFill>
+                  <a:srgbClr val="657422"/>
+                </a:solidFill>
+                <a:latin typeface="Courier"/>
+              </a:rPr>
+              <a:t>axis.text.x =</a:t>
+            </a:r>
+            <a:r>
+              <a:rPr>
+                <a:solidFill>
+                  <a:srgbClr val="003B4F"/>
+                </a:solidFill>
+                <a:latin typeface="Courier"/>
+              </a:rPr>
+              <a:t> </a:t>
+            </a:r>
+            <a:r>
+              <a:rPr>
+                <a:solidFill>
+                  <a:srgbClr val="4758AB"/>
+                </a:solidFill>
+                <a:latin typeface="Courier"/>
+              </a:rPr>
+              <a:t>element_blank</a:t>
+            </a:r>
+            <a:r>
+              <a:rPr>
+                <a:solidFill>
+                  <a:srgbClr val="003B4F"/>
+                </a:solidFill>
+                <a:latin typeface="Courier"/>
+              </a:rPr>
+              <a:t>())</a:t>
+            </a:r>
+            <a:br/>
+            <a:br/>
+            <a:r>
+              <a:rPr>
+                <a:solidFill>
+                  <a:srgbClr val="003B4F"/>
+                </a:solidFill>
+                <a:latin typeface="Courier"/>
+              </a:rPr>
+              <a:t>p4_lion &lt;- </a:t>
+            </a:r>
+            <a:r>
+              <a:rPr>
+                <a:solidFill>
+                  <a:srgbClr val="4758AB"/>
+                </a:solidFill>
+                <a:latin typeface="Courier"/>
+              </a:rPr>
+              <a:t>ggplot</a:t>
+            </a:r>
+            <a:r>
+              <a:rPr>
+                <a:solidFill>
+                  <a:srgbClr val="003B4F"/>
+                </a:solidFill>
+                <a:latin typeface="Courier"/>
+              </a:rPr>
+              <a:t>(lion_data, </a:t>
+            </a:r>
+            <a:r>
+              <a:rPr>
+                <a:solidFill>
+                  <a:srgbClr val="4758AB"/>
+                </a:solidFill>
+                <a:latin typeface="Courier"/>
+              </a:rPr>
+              <a:t>aes</a:t>
+            </a:r>
+            <a:r>
+              <a:rPr>
+                <a:solidFill>
+                  <a:srgbClr val="003B4F"/>
+                </a:solidFill>
+                <a:latin typeface="Courier"/>
+              </a:rPr>
+              <a:t>(</a:t>
+            </a:r>
+            <a:r>
+              <a:rPr>
+                <a:solidFill>
+                  <a:srgbClr val="657422"/>
+                </a:solidFill>
+                <a:latin typeface="Courier"/>
+              </a:rPr>
+              <a:t>sample =</a:t>
+            </a:r>
+            <a:r>
+              <a:rPr>
+                <a:solidFill>
+                  <a:srgbClr val="003B4F"/>
+                </a:solidFill>
+                <a:latin typeface="Courier"/>
+              </a:rPr>
+              <a:t> age_years)) </a:t>
+            </a:r>
+            <a:r>
+              <a:rPr>
+                <a:solidFill>
+                  <a:srgbClr val="5E5E5E"/>
+                </a:solidFill>
+                <a:latin typeface="Courier"/>
+              </a:rPr>
+              <a:t>+</a:t>
+            </a:r>
+            <a:br/>
+            <a:r>
+              <a:rPr>
+                <a:solidFill>
+                  <a:srgbClr val="003B4F"/>
+                </a:solidFill>
+                <a:latin typeface="Courier"/>
+              </a:rPr>
+              <a:t>  </a:t>
+            </a:r>
+            <a:r>
+              <a:rPr>
+                <a:solidFill>
+                  <a:srgbClr val="4758AB"/>
+                </a:solidFill>
+                <a:latin typeface="Courier"/>
+              </a:rPr>
+              <a:t>geom_qq</a:t>
+            </a:r>
+            <a:r>
+              <a:rPr>
+                <a:solidFill>
+                  <a:srgbClr val="003B4F"/>
+                </a:solidFill>
+                <a:latin typeface="Courier"/>
+              </a:rPr>
+              <a:t>() </a:t>
+            </a:r>
+            <a:r>
+              <a:rPr>
+                <a:solidFill>
+                  <a:srgbClr val="5E5E5E"/>
+                </a:solidFill>
+                <a:latin typeface="Courier"/>
+              </a:rPr>
+              <a:t>+</a:t>
+            </a:r>
+            <a:br/>
+            <a:r>
+              <a:rPr>
+                <a:solidFill>
+                  <a:srgbClr val="003B4F"/>
+                </a:solidFill>
+                <a:latin typeface="Courier"/>
+              </a:rPr>
+              <a:t>  </a:t>
+            </a:r>
+            <a:r>
+              <a:rPr>
+                <a:solidFill>
+                  <a:srgbClr val="4758AB"/>
+                </a:solidFill>
+                <a:latin typeface="Courier"/>
+              </a:rPr>
+              <a:t>geom_qq_line</a:t>
+            </a:r>
+            <a:r>
+              <a:rPr>
+                <a:solidFill>
+                  <a:srgbClr val="003B4F"/>
+                </a:solidFill>
+                <a:latin typeface="Courier"/>
+              </a:rPr>
+              <a:t>() </a:t>
+            </a:r>
+            <a:r>
+              <a:rPr>
+                <a:solidFill>
+                  <a:srgbClr val="5E5E5E"/>
+                </a:solidFill>
+                <a:latin typeface="Courier"/>
+              </a:rPr>
+              <a:t>+</a:t>
+            </a:r>
+            <a:br/>
+            <a:r>
+              <a:rPr>
+                <a:solidFill>
+                  <a:srgbClr val="003B4F"/>
+                </a:solidFill>
+                <a:latin typeface="Courier"/>
+              </a:rPr>
+              <a:t>  </a:t>
+            </a:r>
+            <a:r>
+              <a:rPr>
+                <a:solidFill>
+                  <a:srgbClr val="4758AB"/>
+                </a:solidFill>
+                <a:latin typeface="Courier"/>
+              </a:rPr>
+              <a:t>labs</a:t>
+            </a:r>
+            <a:r>
+              <a:rPr>
+                <a:solidFill>
+                  <a:srgbClr val="003B4F"/>
+                </a:solidFill>
+                <a:latin typeface="Courier"/>
+              </a:rPr>
+              <a:t>(</a:t>
+            </a:r>
+            <a:r>
+              <a:rPr>
+                <a:solidFill>
+                  <a:srgbClr val="657422"/>
+                </a:solidFill>
+                <a:latin typeface="Courier"/>
+              </a:rPr>
+              <a:t>title =</a:t>
+            </a:r>
+            <a:r>
+              <a:rPr>
+                <a:solidFill>
+                  <a:srgbClr val="003B4F"/>
+                </a:solidFill>
+                <a:latin typeface="Courier"/>
+              </a:rPr>
+              <a:t> </a:t>
+            </a:r>
+            <a:r>
+              <a:rPr>
+                <a:solidFill>
+                  <a:srgbClr val="20794D"/>
+                </a:solidFill>
+                <a:latin typeface="Courier"/>
+              </a:rPr>
+              <a:t>"Q-Q Plot for age"</a:t>
+            </a:r>
+            <a:r>
+              <a:rPr>
+                <a:solidFill>
+                  <a:srgbClr val="003B4F"/>
+                </a:solidFill>
+                <a:latin typeface="Courier"/>
+              </a:rPr>
+              <a:t>,</a:t>
+            </a:r>
+            <a:br/>
+            <a:r>
+              <a:rPr>
+                <a:solidFill>
+                  <a:srgbClr val="003B4F"/>
+                </a:solidFill>
+                <a:latin typeface="Courier"/>
+              </a:rPr>
+              <a:t>       </a:t>
+            </a:r>
+            <a:r>
+              <a:rPr>
+                <a:solidFill>
+                  <a:srgbClr val="657422"/>
+                </a:solidFill>
+                <a:latin typeface="Courier"/>
+              </a:rPr>
+              <a:t>x =</a:t>
+            </a:r>
+            <a:r>
+              <a:rPr>
+                <a:solidFill>
+                  <a:srgbClr val="003B4F"/>
+                </a:solidFill>
+                <a:latin typeface="Courier"/>
+              </a:rPr>
+              <a:t> </a:t>
+            </a:r>
+            <a:r>
+              <a:rPr>
+                <a:solidFill>
+                  <a:srgbClr val="20794D"/>
+                </a:solidFill>
+                <a:latin typeface="Courier"/>
+              </a:rPr>
+              <a:t>"Theoretical Quantiles"</a:t>
+            </a:r>
+            <a:r>
+              <a:rPr>
+                <a:solidFill>
+                  <a:srgbClr val="003B4F"/>
+                </a:solidFill>
+                <a:latin typeface="Courier"/>
+              </a:rPr>
+              <a:t>,</a:t>
+            </a:r>
+            <a:br/>
+            <a:r>
+              <a:rPr>
+                <a:solidFill>
+                  <a:srgbClr val="003B4F"/>
+                </a:solidFill>
+                <a:latin typeface="Courier"/>
+              </a:rPr>
+              <a:t>       </a:t>
+            </a:r>
+            <a:r>
+              <a:rPr>
+                <a:solidFill>
+                  <a:srgbClr val="657422"/>
+                </a:solidFill>
+                <a:latin typeface="Courier"/>
+              </a:rPr>
+              <a:t>y =</a:t>
+            </a:r>
+            <a:r>
+              <a:rPr>
+                <a:solidFill>
+                  <a:srgbClr val="003B4F"/>
+                </a:solidFill>
+                <a:latin typeface="Courier"/>
+              </a:rPr>
+              <a:t> </a:t>
+            </a:r>
+            <a:r>
+              <a:rPr>
+                <a:solidFill>
+                  <a:srgbClr val="20794D"/>
+                </a:solidFill>
+                <a:latin typeface="Courier"/>
+              </a:rPr>
+              <a:t>"Sample Quantiles"</a:t>
+            </a:r>
+            <a:r>
+              <a:rPr>
+                <a:solidFill>
+                  <a:srgbClr val="003B4F"/>
+                </a:solidFill>
+                <a:latin typeface="Courier"/>
+              </a:rPr>
+              <a:t>) </a:t>
+            </a:r>
+            <a:r>
+              <a:rPr>
+                <a:solidFill>
+                  <a:srgbClr val="5E5E5E"/>
+                </a:solidFill>
+                <a:latin typeface="Courier"/>
+              </a:rPr>
+              <a:t>+</a:t>
+            </a:r>
+            <a:br/>
+            <a:r>
+              <a:rPr>
+                <a:solidFill>
+                  <a:srgbClr val="003B4F"/>
+                </a:solidFill>
+                <a:latin typeface="Courier"/>
+              </a:rPr>
+              <a:t>  </a:t>
+            </a:r>
+            <a:r>
+              <a:rPr>
+                <a:solidFill>
+                  <a:srgbClr val="4758AB"/>
+                </a:solidFill>
+                <a:latin typeface="Courier"/>
+              </a:rPr>
+              <a:t>theme_minimal</a:t>
+            </a:r>
+            <a:r>
+              <a:rPr>
+                <a:solidFill>
+                  <a:srgbClr val="003B4F"/>
+                </a:solidFill>
+                <a:latin typeface="Courier"/>
+              </a:rPr>
+              <a:t>()</a:t>
+            </a:r>
+            <a:br/>
+            <a:br/>
+            <a:r>
+              <a:rPr>
+                <a:solidFill>
+                  <a:srgbClr val="5E5E5E"/>
+                </a:solidFill>
+                <a:latin typeface="Courier"/>
+              </a:rPr>
+              <a:t># Combine the plots</a:t>
+            </a:r>
+            <a:br/>
+            <a:r>
+              <a:rPr>
+                <a:solidFill>
+                  <a:srgbClr val="003B4F"/>
+                </a:solidFill>
+                <a:latin typeface="Courier"/>
+              </a:rPr>
+              <a:t>(p1_lion </a:t>
+            </a:r>
+            <a:r>
+              <a:rPr>
+                <a:solidFill>
+                  <a:srgbClr val="5E5E5E"/>
+                </a:solidFill>
+                <a:latin typeface="Courier"/>
+              </a:rPr>
+              <a:t>/</a:t>
+            </a:r>
+            <a:r>
+              <a:rPr>
+                <a:solidFill>
+                  <a:srgbClr val="003B4F"/>
+                </a:solidFill>
+                <a:latin typeface="Courier"/>
+              </a:rPr>
+              <a:t> p2_lion) </a:t>
+            </a:r>
+            <a:r>
+              <a:rPr>
+                <a:solidFill>
+                  <a:srgbClr val="5E5E5E"/>
+                </a:solidFill>
+                <a:latin typeface="Courier"/>
+              </a:rPr>
+              <a:t>|</a:t>
+            </a:r>
+            <a:r>
+              <a:rPr>
+                <a:solidFill>
+                  <a:srgbClr val="003B4F"/>
+                </a:solidFill>
+                <a:latin typeface="Courier"/>
+              </a:rPr>
+              <a:t> (p3_lion </a:t>
+            </a:r>
+            <a:r>
+              <a:rPr>
+                <a:solidFill>
+                  <a:srgbClr val="5E5E5E"/>
+                </a:solidFill>
+                <a:latin typeface="Courier"/>
+              </a:rPr>
+              <a:t>/</a:t>
+            </a:r>
+            <a:r>
+              <a:rPr>
+                <a:solidFill>
+                  <a:srgbClr val="003B4F"/>
+                </a:solidFill>
+                <a:latin typeface="Courier"/>
+              </a:rPr>
+              <a:t> p4_lion)</a:t>
             </a:r>
           </a:p>
         </p:txBody>
       </p:sp>
+      <p:pic>
+        <p:nvPicPr>
+          <p:cNvPr descr="09_01_lecture_powerpoint_files/figure-pptx/overview-plot-2m-1.png" id="0" name="Picture 1"/>
+          <p:cNvPicPr>
+            <a:picLocks noGrp="1" noChangeAspect="1"/>
+          </p:cNvPicPr>
+          <p:nvPr/>
+        </p:nvPicPr>
+        <p:blipFill>
+          <a:blip r:embed="rId2"/>
+          <a:stretch>
+            <a:fillRect/>
+          </a:stretch>
+        </p:blipFill>
+        <p:spPr bwMode="auto">
+          <a:xfrm>
+            <a:off x="3657600" y="1244600"/>
+            <a:ext cx="5232400" cy="3225800"/>
+          </a:xfrm>
+          <a:prstGeom prst="rect">
+            <a:avLst/>
+          </a:prstGeom>
+          <a:noFill/>
+          <a:ln w="9525">
+            <a:noFill/>
+            <a:headEnd/>
+            <a:tailEnd/>
+          </a:ln>
+        </p:spPr>
+      </p:pic>
     </p:spTree>
   </p:cSld>
 </p:sld>
@@ -3744,11 +5476,8 @@
         <p:spPr>
           <a:xfrm>
             <a:off x="0" y="0"/>
-            <a:ext cx="9144000" cy="602780"/>
+            <a:ext cx="9144000" cy="582780"/>
           </a:xfrm>
-          <a:solidFill>
-            <a:srgbClr val="70121D"/>
-          </a:solidFill>
         </p:spPr>
         <p:txBody>
           <a:bodyPr/>
@@ -3775,7 +5504,7 @@
             <a:spLocks noGrp="1"/>
           </p:cNvSpPr>
           <p:nvPr>
-            <p:ph idx="1" sz="half"/>
+            <p:ph idx="1"/>
           </p:nvPr>
         </p:nvSpPr>
         <p:spPr/>
@@ -3784,14 +5513,11 @@
           <a:lstStyle/>
           <a:p>
             <a:pPr lvl="0" indent="0" marL="0">
-              <a:spcBef>
-                <a:spcPts val="3000"/>
-              </a:spcBef>
               <a:buNone/>
             </a:pPr>
             <a:r>
-              <a:rPr b="1"/>
-              <a:t>Correlation: Important Considerations</a:t>
+              <a:rPr/>
+              <a:t>To understand the amount of variation explained, you can square the non parametric Spearman’s rho value.</a:t>
             </a:r>
           </a:p>
           <a:p>
@@ -3799,22 +5525,17 @@
               <a:buNone/>
             </a:pPr>
             <a:r>
-              <a:rPr b="1"/>
-              <a:t>The correlation coefficient depends on the range</a:t>
-            </a:r>
-          </a:p>
-          <a:p>
-            <a:pPr lvl="0"/>
-            <a:r>
               <a:rPr/>
-              <a:t>Restricting range of values can reduce the correlation coefficient</a:t>
-            </a:r>
-          </a:p>
-          <a:p>
-            <a:pPr lvl="0"/>
+              <a:t>For your value of 0.74485:</a:t>
+            </a:r>
+          </a:p>
+          <a:p>
+            <a:pPr lvl="0" indent="0" marL="0">
+              <a:buNone/>
+            </a:pPr>
             <a:r>
               <a:rPr/>
-              <a:t>Comparing correlations between studies requires similar ranges of values</a:t>
+              <a:t>ρ² = 0.74485² = 0.5548</a:t>
             </a:r>
           </a:p>
           <a:p>
@@ -3822,147 +5543,30 @@
               <a:buNone/>
             </a:pPr>
             <a:r>
-              <a:rPr b="1"/>
-              <a:t>Measurement error affects correlation</a:t>
-            </a:r>
-          </a:p>
-          <a:p>
-            <a:pPr lvl="0"/>
-            <a:r>
               <a:rPr/>
-              <a:t>Measurement error in X or Y tends to weaken observed correlation</a:t>
-            </a:r>
-          </a:p>
-          <a:p>
-            <a:pPr lvl="0"/>
-            <a:r>
-              <a:rPr/>
-              <a:t>This bias is called </a:t>
-            </a:r>
-            <a:r>
-              <a:rPr b="1"/>
-              <a:t>attenuation</a:t>
-            </a:r>
-          </a:p>
-          <a:p>
-            <a:pPr lvl="0"/>
-            <a:r>
-              <a:rPr/>
-              <a:t>True correlation typically stronger than observed correlation</a:t>
-            </a:r>
-          </a:p>
-          <a:p>
-            <a:pPr lvl="0" indent="0" marL="0">
+              <a:t>This means approximately 55.48% of the variance in ranks of one variable can be explained by the ranks of the other variable. This is similar to how R² works in linear regression, but specifically for ranked data.</a:t>
+            </a:r>
+          </a:p>
+          <a:p>
+            <a:pPr lvl="0" indent="0">
               <a:buNone/>
             </a:pPr>
             <a:r>
-              <a:rPr b="1"/>
-              <a:t>Correlation vs. Causation</a:t>
-            </a:r>
-          </a:p>
-          <a:p>
-            <a:pPr lvl="0"/>
-            <a:r>
-              <a:rPr/>
-              <a:t>Correlation does not imply causation</a:t>
-            </a:r>
-          </a:p>
-          <a:p>
-            <a:pPr lvl="0"/>
-            <a:r>
-              <a:rPr/>
-              <a:t>Three possible explanations for correlation:</a:t>
-            </a:r>
-          </a:p>
-          <a:p>
-            <a:pPr lvl="1" indent="-342900" marL="685800">
-              <a:buAutoNum type="arabicPeriod"/>
-            </a:pPr>
-            <a:r>
-              <a:rPr/>
-              <a:t>X causes Y</a:t>
-            </a:r>
-          </a:p>
-          <a:p>
-            <a:pPr lvl="1" indent="-342900" marL="685800">
-              <a:buAutoNum type="arabicPeriod"/>
-            </a:pPr>
-            <a:r>
-              <a:rPr/>
-              <a:t>Y causes X</a:t>
-            </a:r>
-          </a:p>
-          <a:p>
-            <a:pPr lvl="1" indent="-342900" marL="685800">
-              <a:buAutoNum type="arabicPeriod"/>
-            </a:pPr>
-            <a:r>
-              <a:rPr/>
-              <a:t>Z (a third variable) causes both X and Y</a:t>
-            </a:r>
-          </a:p>
-          <a:p>
-            <a:pPr lvl="0" indent="0" marL="0">
-              <a:buNone/>
-            </a:pPr>
-            <a:r>
-              <a:rPr b="1"/>
-              <a:t>Correlation significance test</a:t>
-            </a:r>
-          </a:p>
-          <a:p>
-            <a:pPr lvl="0"/>
-            <a:r>
-              <a:rPr/>
-              <a:t>H₀: ρ = 0 (no correlation in population)</a:t>
-            </a:r>
-          </a:p>
-          <a:p>
-            <a:pPr lvl="0"/>
-            <a:r>
-              <a:rPr/>
-              <a:t>H₁: ρ ≠ 0 (correlation exists in population)</a:t>
-            </a:r>
-          </a:p>
-          <a:p>
-            <a:pPr lvl="0"/>
-            <a:r>
-              <a:rPr b="1"/>
-              <a:t>Test statistic: t = r / SE(r) with df = n-2</a:t>
+              <a:rPr>
+                <a:latin typeface="Courier"/>
+              </a:rPr>
+              <a:t>
+    Spearman's rank correlation rho
+data:  lion_data$proportion_black and lion_data$age_years
+S = 1392.1, p-value = 1.013e-06
+alternative hypothesis: true rho is not equal to 0
+sample estimates:
+      rho 
+0.7448561 </a:t>
             </a:r>
           </a:p>
         </p:txBody>
       </p:sp>
-      <p:pic>
-        <p:nvPicPr>
-          <p:cNvPr descr="09_01_lecture_powerpoint_files/figure-pptx/overview-plot-1o-1.png" id="0" name="Picture 1"/>
-          <p:cNvPicPr>
-            <a:picLocks noGrp="1" noChangeAspect="1"/>
-          </p:cNvPicPr>
-          <p:nvPr/>
-        </p:nvPicPr>
-        <p:blipFill>
-          <a:blip r:embed="rId2"/>
-          <a:stretch>
-            <a:fillRect/>
-          </a:stretch>
-        </p:blipFill>
-        <p:spPr bwMode="auto">
-          <a:xfrm>
-            <a:off x="6121400" y="2044700"/>
-            <a:ext cx="2781300" cy="1714500"/>
-          </a:xfrm>
-          <a:prstGeom prst="rect">
-            <a:avLst/>
-          </a:prstGeom>
-          <a:noFill/>
-          <a:ln w="9525">
-            <a:noFill/>
-            <a:headEnd/>
-            <a:tailEnd/>
-          </a:ln>
-        </p:spPr>
-      </p:pic>
     </p:spTree>
   </p:cSld>
 </p:sld>
@@ -4017,286 +5621,179 @@
             </a:r>
             <a:r>
               <a:rPr/>
-              <a:t> Linear Regression</a:t>
+              <a:t> Correlation Analysis</a:t>
             </a:r>
           </a:p>
         </p:txBody>
       </p:sp>
-      <mc:AlternateContent xmlns:mc="http://schemas.openxmlformats.org/markup-compatibility/2006">
-        <mc:Choice xmlns:a14="http://schemas.microsoft.com/office/drawing/2010/main" Requires="a14">
-          <p:sp>
-            <p:nvSpPr>
-              <p:cNvPr id="3" name="Content Placeholder 2"/>
-              <p:cNvSpPr>
-                <a:spLocks noGrp="1"/>
-              </p:cNvSpPr>
-              <p:nvPr>
-                <p:ph idx="1" sz="half"/>
-              </p:nvPr>
-            </p:nvSpPr>
-            <p:spPr/>
-            <p:txBody>
-              <a:bodyPr/>
-              <a:lstStyle/>
-              <a:p>
-                <a:pPr lvl="0" indent="0" marL="0">
-                  <a:spcBef>
-                    <a:spcPts val="3000"/>
-                  </a:spcBef>
-                  <a:buNone/>
-                </a:pPr>
-                <a:r>
-                  <a:rPr b="1"/>
-                  <a:t>Simple Linear Regression Model</a:t>
-                </a:r>
-              </a:p>
-              <a:p>
-                <a:pPr lvl="0" indent="0" marL="0">
-                  <a:buNone/>
-                </a:pPr>
-                <a:r>
-                  <a:rPr b="1"/>
-                  <a:t>Simple linear regression</a:t>
-                </a:r>
-                <a:r>
-                  <a:rPr/>
-                  <a:t> models the relationship between a response variable (Y) and a predictor variable (X).</a:t>
-                </a:r>
-              </a:p>
-              <a:p>
-                <a:pPr lvl="0" indent="0" marL="0">
-                  <a:buNone/>
-                </a:pPr>
-                <a:r>
-                  <a:rPr/>
-                  <a:t>The </a:t>
-                </a:r>
-                <a:r>
-                  <a:rPr b="1"/>
-                  <a:t>population</a:t>
-                </a:r>
-                <a:r>
-                  <a:rPr/>
-                  <a:t> regression model</a:t>
-                </a:r>
-              </a:p>
-              <a:p>
-                <a:pPr lvl="0" indent="0" marL="0">
-                  <a:buNone/>
-                </a:pPr>
-                <a14:m>
-                  <m:oMathPara xmlns:m="http://schemas.openxmlformats.org/officeDocument/2006/math">
-                    <m:oMathParaPr>
-                      <m:jc m:val="center"/>
-                    </m:oMathParaPr>
-                    <m:oMath>
-                      <m:r>
-                        <m:t>Y</m:t>
-                      </m:r>
-                      <m:r>
-                        <m:rPr>
-                          <m:sty m:val="p"/>
-                        </m:rPr>
-                        <m:t>=</m:t>
-                      </m:r>
-                      <m:r>
-                        <m:t>α</m:t>
-                      </m:r>
-                      <m:r>
-                        <m:rPr>
-                          <m:sty m:val="p"/>
-                        </m:rPr>
-                        <m:t>+</m:t>
-                      </m:r>
-                      <m:r>
-                        <m:t>β</m:t>
-                      </m:r>
-                      <m:r>
-                        <m:t>X</m:t>
-                      </m:r>
-                      <m:r>
-                        <m:rPr>
-                          <m:sty m:val="p"/>
-                        </m:rPr>
-                        <m:t>+</m:t>
-                      </m:r>
-                      <m:r>
-                        <m:t>ε</m:t>
-                      </m:r>
-                    </m:oMath>
-                  </m:oMathPara>
-                </a14:m>
-              </a:p>
-              <a:p>
-                <a:pPr lvl="0" indent="0" marL="0">
-                  <a:buNone/>
-                </a:pPr>
-                <a:r>
-                  <a:rPr/>
-                  <a:t>Where:</a:t>
-                </a:r>
-              </a:p>
-              <a:p>
-                <a:pPr lvl="0"/>
-                <a:r>
-                  <a:rPr/>
-                  <a:t>Y is the response variable</a:t>
-                </a:r>
-              </a:p>
-              <a:p>
-                <a:pPr lvl="0"/>
-                <a:r>
-                  <a:rPr/>
-                  <a:t>X is the predictor variable</a:t>
-                </a:r>
-              </a:p>
-              <a:p>
-                <a:pPr lvl="0"/>
-                <a:r>
-                  <a:rPr/>
-                  <a:t>α (alpha) is the intercept (value of Y when X=0)</a:t>
-                </a:r>
-              </a:p>
-              <a:p>
-                <a:pPr lvl="0"/>
-                <a:r>
-                  <a:rPr/>
-                  <a:t>β (beta) is the slope (change in Y per unit change in X)</a:t>
-                </a:r>
-              </a:p>
-              <a:p>
-                <a:pPr lvl="0"/>
-                <a:r>
-                  <a:rPr/>
-                  <a:t>ε (epsilon) is the error term (random deviation from the line)</a:t>
-                </a:r>
-              </a:p>
-              <a:p>
-                <a:pPr lvl="0" indent="0" marL="0">
-                  <a:buNone/>
-                </a:pPr>
-                <a:r>
-                  <a:rPr/>
-                  <a:t>The </a:t>
-                </a:r>
-                <a:r>
-                  <a:rPr b="1"/>
-                  <a:t>sample</a:t>
-                </a:r>
-                <a:r>
-                  <a:rPr/>
-                  <a:t> regression equation is:</a:t>
-                </a:r>
-              </a:p>
-              <a:p>
-                <a:pPr lvl="0" indent="0" marL="0">
-                  <a:buNone/>
-                </a:pPr>
-                <a14:m>
-                  <m:oMathPara xmlns:m="http://schemas.openxmlformats.org/officeDocument/2006/math">
-                    <m:oMathParaPr>
-                      <m:jc m:val="center"/>
-                    </m:oMathParaPr>
-                    <m:oMath>
-                      <m:acc>
-                        <m:accPr>
-                          <m:chr m:val="̂"/>
-                        </m:accPr>
-                        <m:e>
-                          <m:r>
-                            <m:t>Y</m:t>
-                          </m:r>
-                        </m:e>
-                      </m:acc>
-                      <m:r>
-                        <m:rPr>
-                          <m:sty m:val="p"/>
-                        </m:rPr>
-                        <m:t>=</m:t>
-                      </m:r>
-                      <m:r>
-                        <m:t>a</m:t>
-                      </m:r>
-                      <m:r>
-                        <m:rPr>
-                          <m:sty m:val="p"/>
-                        </m:rPr>
-                        <m:t>+</m:t>
-                      </m:r>
-                      <m:r>
-                        <m:t>b</m:t>
-                      </m:r>
-                      <m:r>
-                        <m:t>X</m:t>
-                      </m:r>
-                    </m:oMath>
-                  </m:oMathPara>
-                </a14:m>
-              </a:p>
-              <a:p>
-                <a:pPr lvl="0" indent="0" marL="0">
-                  <a:buNone/>
-                </a:pPr>
-                <a:r>
-                  <a:rPr/>
-                  <a:t>Where:</a:t>
-                </a:r>
-              </a:p>
-              <a:p>
-                <a:pPr lvl="0"/>
-                <a14:m>
-                  <m:oMath xmlns:m="http://schemas.openxmlformats.org/officeDocument/2006/math">
-                    <m:acc>
-                      <m:accPr>
-                        <m:chr m:val="̂"/>
-                      </m:accPr>
-                      <m:e>
-                        <m:r>
-                          <m:t>Y</m:t>
-                        </m:r>
-                      </m:e>
-                    </m:acc>
-                  </m:oMath>
-                </a14:m>
-                <a:r>
-                  <a:rPr/>
-                  <a:t> is the predicted value of Y</a:t>
-                </a:r>
-              </a:p>
-              <a:p>
-                <a:pPr lvl="0"/>
-                <a:r>
-                  <a:rPr/>
-                  <a:t>a is the estimate of α (intercept)</a:t>
-                </a:r>
-              </a:p>
-              <a:p>
-                <a:pPr lvl="0"/>
-                <a:r>
-                  <a:rPr/>
-                  <a:t>b is the estimate of β (slope)</a:t>
-                </a:r>
-              </a:p>
-              <a:p>
-                <a:pPr lvl="0" indent="0" marL="0">
-                  <a:buNone/>
-                </a:pPr>
-                <a:r>
-                  <a:rPr b="1"/>
-                  <a:t>Method of Least Squares</a:t>
-                </a:r>
-                <a:r>
-                  <a:rPr/>
-                  <a:t>: The line is chosen to minimize the sum of squared vertical distances (residuals) between observed and predicted Y values.</a:t>
-                </a:r>
-              </a:p>
-            </p:txBody>
-          </p:sp>
-        </mc:Choice>
-      </mc:AlternateContent>
+      <p:sp>
+        <p:nvSpPr>
+          <p:cNvPr id="3" name="Content Placeholder 2"/>
+          <p:cNvSpPr>
+            <a:spLocks noGrp="1"/>
+          </p:cNvSpPr>
+          <p:nvPr>
+            <p:ph idx="1" sz="half"/>
+          </p:nvPr>
+        </p:nvSpPr>
+        <p:spPr/>
+        <p:txBody>
+          <a:bodyPr/>
+          <a:lstStyle/>
+          <a:p>
+            <a:pPr lvl="0" indent="0" marL="0">
+              <a:spcBef>
+                <a:spcPts val="3000"/>
+              </a:spcBef>
+              <a:buNone/>
+            </a:pPr>
+            <a:r>
+              <a:rPr b="1"/>
+              <a:t>Correlation: Important Considerations</a:t>
+            </a:r>
+          </a:p>
+          <a:p>
+            <a:pPr lvl="0" indent="0" marL="0">
+              <a:buNone/>
+            </a:pPr>
+            <a:r>
+              <a:rPr b="1"/>
+              <a:t>The correlation coefficient depends on the range</a:t>
+            </a:r>
+          </a:p>
+          <a:p>
+            <a:pPr lvl="0"/>
+            <a:r>
+              <a:rPr/>
+              <a:t>Restricting range of values can reduce the correlation coefficient</a:t>
+            </a:r>
+          </a:p>
+          <a:p>
+            <a:pPr lvl="0"/>
+            <a:r>
+              <a:rPr/>
+              <a:t>Comparing correlations between studies requires similar ranges of values</a:t>
+            </a:r>
+          </a:p>
+          <a:p>
+            <a:pPr lvl="0" indent="0" marL="0">
+              <a:buNone/>
+            </a:pPr>
+            <a:r>
+              <a:rPr b="1"/>
+              <a:t>Measurement error affects correlation</a:t>
+            </a:r>
+          </a:p>
+          <a:p>
+            <a:pPr lvl="0"/>
+            <a:r>
+              <a:rPr/>
+              <a:t>Measurement error in X or Y tends to weaken observed correlation</a:t>
+            </a:r>
+          </a:p>
+          <a:p>
+            <a:pPr lvl="0"/>
+            <a:r>
+              <a:rPr/>
+              <a:t>This bias is called </a:t>
+            </a:r>
+            <a:r>
+              <a:rPr b="1"/>
+              <a:t>attenuation</a:t>
+            </a:r>
+          </a:p>
+          <a:p>
+            <a:pPr lvl="0"/>
+            <a:r>
+              <a:rPr/>
+              <a:t>True correlation typically stronger than observed correlation</a:t>
+            </a:r>
+          </a:p>
+          <a:p>
+            <a:pPr lvl="0" indent="0" marL="0">
+              <a:buNone/>
+            </a:pPr>
+            <a:r>
+              <a:rPr b="1"/>
+              <a:t>Correlation vs. Causation</a:t>
+            </a:r>
+          </a:p>
+          <a:p>
+            <a:pPr lvl="0"/>
+            <a:r>
+              <a:rPr/>
+              <a:t>Correlation does not imply causation</a:t>
+            </a:r>
+          </a:p>
+          <a:p>
+            <a:pPr lvl="0"/>
+            <a:r>
+              <a:rPr/>
+              <a:t>Three possible explanations for correlation:</a:t>
+            </a:r>
+          </a:p>
+          <a:p>
+            <a:pPr lvl="1" indent="-342900" marL="685800">
+              <a:buAutoNum type="arabicPeriod"/>
+            </a:pPr>
+            <a:r>
+              <a:rPr/>
+              <a:t>X causes Y</a:t>
+            </a:r>
+          </a:p>
+          <a:p>
+            <a:pPr lvl="1" indent="-342900" marL="685800">
+              <a:buAutoNum type="arabicPeriod"/>
+            </a:pPr>
+            <a:r>
+              <a:rPr/>
+              <a:t>Y causes X</a:t>
+            </a:r>
+          </a:p>
+          <a:p>
+            <a:pPr lvl="1" indent="-342900" marL="685800">
+              <a:buAutoNum type="arabicPeriod"/>
+            </a:pPr>
+            <a:r>
+              <a:rPr/>
+              <a:t>Z (a third variable) causes both X and Y</a:t>
+            </a:r>
+          </a:p>
+          <a:p>
+            <a:pPr lvl="0" indent="0" marL="0">
+              <a:buNone/>
+            </a:pPr>
+            <a:r>
+              <a:rPr b="1"/>
+              <a:t>Correlation significance test</a:t>
+            </a:r>
+          </a:p>
+          <a:p>
+            <a:pPr lvl="0"/>
+            <a:r>
+              <a:rPr/>
+              <a:t>H₀: ρ = 0 (no correlation in population)</a:t>
+            </a:r>
+          </a:p>
+          <a:p>
+            <a:pPr lvl="0"/>
+            <a:r>
+              <a:rPr/>
+              <a:t>H₁: ρ ≠ 0 (correlation exists in population)</a:t>
+            </a:r>
+          </a:p>
+          <a:p>
+            <a:pPr lvl="0"/>
+            <a:r>
+              <a:rPr b="1"/>
+              <a:t>Test statistic: t = r / SE(r) with df = n-2</a:t>
+            </a:r>
+          </a:p>
+        </p:txBody>
+      </p:sp>
       <p:pic>
         <p:nvPicPr>
-          <p:cNvPr descr="images/clipboard-3360244964.png" id="0" name="Picture 1"/>
+          <p:cNvPr descr="09_01_lecture_powerpoint_files/figure-pptx/overview-plot-1o-1.png" id="0" name="Picture 1"/>
           <p:cNvPicPr>
             <a:picLocks noGrp="1" noChangeAspect="1"/>
           </p:cNvPicPr>
@@ -4310,8 +5807,8 @@
         </p:blipFill>
         <p:spPr bwMode="auto">
           <a:xfrm>
-            <a:off x="6680200" y="660400"/>
-            <a:ext cx="1663700" cy="4470400"/>
+            <a:off x="6121400" y="2044700"/>
+            <a:ext cx="2781300" cy="1714500"/>
           </a:xfrm>
           <a:prstGeom prst="rect">
             <a:avLst/>
@@ -4438,7 +5935,7 @@
                 </a:r>
                 <a:r>
                   <a:rPr/>
-                  <a:t> regression model is:</a:t>
+                  <a:t> regression model</a:t>
                 </a:r>
               </a:p>
               <a:p>
@@ -4657,7 +6154,7 @@
       </mc:AlternateContent>
       <p:pic>
         <p:nvPicPr>
-          <p:cNvPr descr="09_01_lecture_powerpoint_files/figure-pptx/overview-plot-1p-1.png" id="0" name="Picture 1"/>
+          <p:cNvPr descr="images/clipboard-3360244964.png" id="0" name="Picture 1"/>
           <p:cNvPicPr>
             <a:picLocks noGrp="1" noChangeAspect="1"/>
           </p:cNvPicPr>
@@ -4671,8 +6168,8 @@
         </p:blipFill>
         <p:spPr bwMode="auto">
           <a:xfrm>
-            <a:off x="6121400" y="2044700"/>
-            <a:ext cx="2781300" cy="1714500"/>
+            <a:off x="6680200" y="660400"/>
+            <a:ext cx="1663700" cy="4470400"/>
           </a:xfrm>
           <a:prstGeom prst="rect">
             <a:avLst/>
@@ -4762,91 +6259,254 @@
               <a:lstStyle/>
               <a:p>
                 <a:pPr lvl="0" indent="0" marL="0">
-                  <a:buNone/>
-                </a:pPr>
-                <a:r>
-                  <a:rPr/>
-                  <a:t>From Example 17.1 in the textbook the regression line for the lion data is:</a:t>
-                </a:r>
-              </a:p>
-              <a:p>
-                <a:pPr lvl="0" indent="0" marL="0">
                   <a:spcBef>
                     <a:spcPts val="3000"/>
                   </a:spcBef>
                   <a:buNone/>
                 </a:pPr>
-                <a14:m>
-                  <m:oMath xmlns:m="http://schemas.openxmlformats.org/officeDocument/2006/math">
-                    <m:r>
-                      <m:rPr>
-                        <m:nor/>
-                        <m:sty m:val="p"/>
-                      </m:rPr>
-                      <m:t>age</m:t>
-                    </m:r>
-                    <m:r>
-                      <m:rPr>
-                        <m:sty m:val="p"/>
-                      </m:rPr>
-                      <m:t>=</m:t>
-                    </m:r>
-                    <m:r>
-                      <m:t>0.88</m:t>
-                    </m:r>
-                    <m:r>
-                      <m:rPr>
-                        <m:sty m:val="p"/>
-                      </m:rPr>
-                      <m:t>+</m:t>
-                    </m:r>
-                    <m:r>
-                      <m:t>10.65</m:t>
-                    </m:r>
-                    <m:r>
-                      <m:rPr>
-                        <m:sty m:val="p"/>
-                      </m:rPr>
-                      <m:t>×</m:t>
-                    </m:r>
-                    <m:sSub>
-                      <m:e>
-                        <m:r>
-                          <m:rPr>
-                            <m:nor/>
-                            <m:sty m:val="p"/>
-                          </m:rPr>
-                          <m:t>proportion</m:t>
-                        </m:r>
-                      </m:e>
-                      <m:sub>
-                        <m:r>
-                          <m:t>b</m:t>
-                        </m:r>
-                        <m:r>
-                          <m:t>l</m:t>
-                        </m:r>
-                        <m:r>
-                          <m:t>a</m:t>
-                        </m:r>
-                        <m:r>
-                          <m:t>c</m:t>
-                        </m:r>
-                        <m:r>
-                          <m:t>k</m:t>
-                        </m:r>
-                      </m:sub>
-                    </m:sSub>
-                  </m:oMath>
-                </a14:m>
+                <a:r>
+                  <a:rPr b="1"/>
+                  <a:t>Simple Linear Regression Model</a:t>
+                </a:r>
               </a:p>
               <a:p>
                 <a:pPr lvl="0" indent="0" marL="0">
                   <a:buNone/>
                 </a:pPr>
                 <a:r>
+                  <a:rPr b="1"/>
+                  <a:t>Simple linear regression</a:t>
+                </a:r>
+                <a:r>
                   <a:rPr/>
-                  <a:t>This means: - When a lion has no black on its nose (proportion = 0), its predicted age is 0.88 years - For each 0.1 increase in the proportion of black, age increases by 1.065 years - The slope (10.65) indicates that lions with more black on their noses tend to be older</a:t>
+                  <a:t> models the relationship between a response variable (Y) and a predictor variable (X).</a:t>
+                </a:r>
+              </a:p>
+              <a:p>
+                <a:pPr lvl="0" indent="0" marL="0">
+                  <a:buNone/>
+                </a:pPr>
+                <a:r>
+                  <a:rPr/>
+                  <a:t>The </a:t>
+                </a:r>
+                <a:r>
+                  <a:rPr b="1"/>
+                  <a:t>population</a:t>
+                </a:r>
+                <a:r>
+                  <a:rPr/>
+                  <a:t> regression model is:</a:t>
+                </a:r>
+              </a:p>
+              <a:p>
+                <a:pPr lvl="0" indent="0" marL="0">
+                  <a:buNone/>
+                </a:pPr>
+                <a14:m>
+                  <m:oMathPara xmlns:m="http://schemas.openxmlformats.org/officeDocument/2006/math">
+                    <m:oMathParaPr>
+                      <m:jc m:val="center"/>
+                    </m:oMathParaPr>
+                    <m:oMath>
+                      <m:r>
+                        <m:t>Y</m:t>
+                      </m:r>
+                      <m:r>
+                        <m:rPr>
+                          <m:sty m:val="p"/>
+                        </m:rPr>
+                        <m:t>=</m:t>
+                      </m:r>
+                      <m:r>
+                        <m:t>α</m:t>
+                      </m:r>
+                      <m:r>
+                        <m:rPr>
+                          <m:sty m:val="p"/>
+                        </m:rPr>
+                        <m:t>+</m:t>
+                      </m:r>
+                      <m:r>
+                        <m:t>β</m:t>
+                      </m:r>
+                      <m:r>
+                        <m:t>X</m:t>
+                      </m:r>
+                      <m:r>
+                        <m:rPr>
+                          <m:sty m:val="p"/>
+                        </m:rPr>
+                        <m:t>+</m:t>
+                      </m:r>
+                      <m:r>
+                        <m:t>ε</m:t>
+                      </m:r>
+                    </m:oMath>
+                  </m:oMathPara>
+                </a14:m>
+              </a:p>
+              <a:p>
+                <a:pPr lvl="0" indent="0" marL="0">
+                  <a:buNone/>
+                </a:pPr>
+                <a:r>
+                  <a:rPr/>
+                  <a:t>Where:</a:t>
+                </a:r>
+              </a:p>
+              <a:p>
+                <a:pPr lvl="0"/>
+                <a:r>
+                  <a:rPr/>
+                  <a:t>Y is the response variable</a:t>
+                </a:r>
+              </a:p>
+              <a:p>
+                <a:pPr lvl="0"/>
+                <a:r>
+                  <a:rPr/>
+                  <a:t>X is the predictor variable</a:t>
+                </a:r>
+              </a:p>
+              <a:p>
+                <a:pPr lvl="0"/>
+                <a:r>
+                  <a:rPr/>
+                  <a:t>α (alpha) is the intercept (value of Y when X=0)</a:t>
+                </a:r>
+              </a:p>
+              <a:p>
+                <a:pPr lvl="0"/>
+                <a:r>
+                  <a:rPr/>
+                  <a:t>β (beta) is the slope (change in Y per unit change in X)</a:t>
+                </a:r>
+              </a:p>
+              <a:p>
+                <a:pPr lvl="0"/>
+                <a:r>
+                  <a:rPr/>
+                  <a:t>ε (epsilon) is the error term (random deviation from the line)</a:t>
+                </a:r>
+              </a:p>
+              <a:p>
+                <a:pPr lvl="0" indent="0" marL="0">
+                  <a:buNone/>
+                </a:pPr>
+                <a:r>
+                  <a:rPr/>
+                  <a:t>The </a:t>
+                </a:r>
+                <a:r>
+                  <a:rPr b="1"/>
+                  <a:t>sample</a:t>
+                </a:r>
+                <a:r>
+                  <a:rPr/>
+                  <a:t> regression equation is:</a:t>
+                </a:r>
+              </a:p>
+              <a:p>
+                <a:pPr lvl="0" indent="0" marL="0">
+                  <a:buNone/>
+                </a:pPr>
+                <a14:m>
+                  <m:oMathPara xmlns:m="http://schemas.openxmlformats.org/officeDocument/2006/math">
+                    <m:oMathParaPr>
+                      <m:jc m:val="center"/>
+                    </m:oMathParaPr>
+                    <m:oMath>
+                      <m:acc>
+                        <m:accPr>
+                          <m:chr m:val="̂"/>
+                        </m:accPr>
+                        <m:e>
+                          <m:r>
+                            <m:t>Y</m:t>
+                          </m:r>
+                        </m:e>
+                      </m:acc>
+                      <m:r>
+                        <m:rPr>
+                          <m:sty m:val="p"/>
+                        </m:rPr>
+                        <m:t>=</m:t>
+                      </m:r>
+                      <m:r>
+                        <m:t>a</m:t>
+                      </m:r>
+                      <m:r>
+                        <m:rPr>
+                          <m:sty m:val="p"/>
+                        </m:rPr>
+                        <m:t>+</m:t>
+                      </m:r>
+                      <m:r>
+                        <m:t>b</m:t>
+                      </m:r>
+                      <m:r>
+                        <m:t>X</m:t>
+                      </m:r>
+                    </m:oMath>
+                  </m:oMathPara>
+                </a14:m>
+              </a:p>
+              <a:p>
+                <a:pPr lvl="0" indent="0" marL="0">
+                  <a:buNone/>
+                </a:pPr>
+                <a:r>
+                  <a:rPr/>
+                  <a:t>Where:</a:t>
+                </a:r>
+              </a:p>
+              <a:p>
+                <a:pPr lvl="0"/>
+                <a14:m>
+                  <m:oMath xmlns:m="http://schemas.openxmlformats.org/officeDocument/2006/math">
+                    <m:acc>
+                      <m:accPr>
+                        <m:chr m:val="̂"/>
+                      </m:accPr>
+                      <m:e>
+                        <m:r>
+                          <m:t>Y</m:t>
+                        </m:r>
+                      </m:e>
+                    </m:acc>
+                  </m:oMath>
+                </a14:m>
+                <a:r>
+                  <a:rPr/>
+                  <a:t> is the predicted value of Y</a:t>
+                </a:r>
+              </a:p>
+              <a:p>
+                <a:pPr lvl="0"/>
+                <a:r>
+                  <a:rPr/>
+                  <a:t>a is the estimate of α (intercept)</a:t>
+                </a:r>
+              </a:p>
+              <a:p>
+                <a:pPr lvl="0"/>
+                <a:r>
+                  <a:rPr/>
+                  <a:t>b is the estimate of β (slope)</a:t>
+                </a:r>
+              </a:p>
+              <a:p>
+                <a:pPr lvl="0" indent="0" marL="0">
+                  <a:buNone/>
+                </a:pPr>
+                <a:r>
+                  <a:rPr b="1"/>
+                  <a:t>Method of Least Squares</a:t>
+                </a:r>
+                <a:r>
+                  <a:rPr/>
+                  <a:t>: The line is chosen to minimize the sum of squared vertical distances (residuals) between observed and predicted Y values.</a:t>
                 </a:r>
               </a:p>
             </p:txBody>
@@ -4855,7 +6515,7 @@
       </mc:AlternateContent>
       <p:pic>
         <p:nvPicPr>
-          <p:cNvPr descr="09_01_lecture_powerpoint_files/figure-pptx/overview-plot-1q-1.png" id="0" name="Picture 1"/>
+          <p:cNvPr descr="09_01_lecture_powerpoint_files/figure-pptx/overview-plot-1p-1.png" id="0" name="Picture 1"/>
           <p:cNvPicPr>
             <a:picLocks noGrp="1" noChangeAspect="1"/>
           </p:cNvPicPr>
@@ -4918,6 +6578,204 @@
         <p:spPr>
           <a:xfrm>
             <a:off x="0" y="0"/>
+            <a:ext cx="9144000" cy="602780"/>
+          </a:xfrm>
+          <a:solidFill>
+            <a:srgbClr val="70121D"/>
+          </a:solidFill>
+        </p:spPr>
+        <p:txBody>
+          <a:bodyPr/>
+          <a:lstStyle/>
+          <a:p>
+            <a:pPr lvl="0" indent="0" marL="0">
+              <a:buNone/>
+            </a:pPr>
+            <a:r>
+              <a:rPr b="1"/>
+              <a:t>Lecture 9:</a:t>
+            </a:r>
+            <a:r>
+              <a:rPr/>
+              <a:t> Linear Regression</a:t>
+            </a:r>
+          </a:p>
+        </p:txBody>
+      </p:sp>
+      <mc:AlternateContent xmlns:mc="http://schemas.openxmlformats.org/markup-compatibility/2006">
+        <mc:Choice xmlns:a14="http://schemas.microsoft.com/office/drawing/2010/main" Requires="a14">
+          <p:sp>
+            <p:nvSpPr>
+              <p:cNvPr id="3" name="Content Placeholder 2"/>
+              <p:cNvSpPr>
+                <a:spLocks noGrp="1"/>
+              </p:cNvSpPr>
+              <p:nvPr>
+                <p:ph idx="1" sz="half"/>
+              </p:nvPr>
+            </p:nvSpPr>
+            <p:spPr/>
+            <p:txBody>
+              <a:bodyPr/>
+              <a:lstStyle/>
+              <a:p>
+                <a:pPr lvl="0" indent="0" marL="0">
+                  <a:buNone/>
+                </a:pPr>
+                <a:r>
+                  <a:rPr/>
+                  <a:t>From Example 17.1 in the textbook the regression line for the lion data is:</a:t>
+                </a:r>
+              </a:p>
+              <a:p>
+                <a:pPr lvl="0" indent="0" marL="0">
+                  <a:spcBef>
+                    <a:spcPts val="3000"/>
+                  </a:spcBef>
+                  <a:buNone/>
+                </a:pPr>
+                <a14:m>
+                  <m:oMath xmlns:m="http://schemas.openxmlformats.org/officeDocument/2006/math">
+                    <m:r>
+                      <m:rPr>
+                        <m:nor/>
+                        <m:sty m:val="p"/>
+                      </m:rPr>
+                      <m:t>age</m:t>
+                    </m:r>
+                    <m:r>
+                      <m:rPr>
+                        <m:sty m:val="p"/>
+                      </m:rPr>
+                      <m:t>=</m:t>
+                    </m:r>
+                    <m:r>
+                      <m:t>0.88</m:t>
+                    </m:r>
+                    <m:r>
+                      <m:rPr>
+                        <m:sty m:val="p"/>
+                      </m:rPr>
+                      <m:t>+</m:t>
+                    </m:r>
+                    <m:r>
+                      <m:t>10.65</m:t>
+                    </m:r>
+                    <m:r>
+                      <m:rPr>
+                        <m:sty m:val="p"/>
+                      </m:rPr>
+                      <m:t>×</m:t>
+                    </m:r>
+                    <m:sSub>
+                      <m:e>
+                        <m:r>
+                          <m:rPr>
+                            <m:nor/>
+                            <m:sty m:val="p"/>
+                          </m:rPr>
+                          <m:t>proportion</m:t>
+                        </m:r>
+                      </m:e>
+                      <m:sub>
+                        <m:r>
+                          <m:t>b</m:t>
+                        </m:r>
+                        <m:r>
+                          <m:t>l</m:t>
+                        </m:r>
+                        <m:r>
+                          <m:t>a</m:t>
+                        </m:r>
+                        <m:r>
+                          <m:t>c</m:t>
+                        </m:r>
+                        <m:r>
+                          <m:t>k</m:t>
+                        </m:r>
+                      </m:sub>
+                    </m:sSub>
+                  </m:oMath>
+                </a14:m>
+              </a:p>
+              <a:p>
+                <a:pPr lvl="0" indent="0" marL="0">
+                  <a:buNone/>
+                </a:pPr>
+                <a:r>
+                  <a:rPr/>
+                  <a:t>This means: - When a lion has no black on its nose (proportion = 0), its predicted age is 0.88 years - For each 0.1 increase in the proportion of black, age increases by 1.065 years - The slope (10.65) indicates that lions with more black on their noses tend to be older</a:t>
+                </a:r>
+              </a:p>
+            </p:txBody>
+          </p:sp>
+        </mc:Choice>
+      </mc:AlternateContent>
+      <p:pic>
+        <p:nvPicPr>
+          <p:cNvPr descr="09_01_lecture_powerpoint_files/figure-pptx/overview-plot-1q-1.png" id="0" name="Picture 1"/>
+          <p:cNvPicPr>
+            <a:picLocks noGrp="1" noChangeAspect="1"/>
+          </p:cNvPicPr>
+          <p:nvPr/>
+        </p:nvPicPr>
+        <p:blipFill>
+          <a:blip r:embed="rId2"/>
+          <a:stretch>
+            <a:fillRect/>
+          </a:stretch>
+        </p:blipFill>
+        <p:spPr bwMode="auto">
+          <a:xfrm>
+            <a:off x="6121400" y="2044700"/>
+            <a:ext cx="2781300" cy="1714500"/>
+          </a:xfrm>
+          <a:prstGeom prst="rect">
+            <a:avLst/>
+          </a:prstGeom>
+          <a:noFill/>
+          <a:ln w="9525">
+            <a:noFill/>
+            <a:headEnd/>
+            <a:tailEnd/>
+          </a:ln>
+        </p:spPr>
+      </p:pic>
+    </p:spTree>
+  </p:cSld>
+</p:sld>
+</file>
+
+<file path=ppt/slides/slide17.xml><?xml version="1.0" encoding="utf-8"?>
+<p:sld xmlns:a="http://schemas.openxmlformats.org/drawingml/2006/main" xmlns:r="http://schemas.openxmlformats.org/officeDocument/2006/relationships" xmlns:p="http://schemas.openxmlformats.org/presentationml/2006/main">
+  <p:cSld>
+    <p:spTree>
+      <p:nvGrpSpPr>
+        <p:cNvPr id="1" name=""/>
+        <p:cNvGrpSpPr/>
+        <p:nvPr/>
+      </p:nvGrpSpPr>
+      <p:grpSpPr>
+        <a:xfrm>
+          <a:off x="0" y="0"/>
+          <a:ext cx="0" cy="0"/>
+          <a:chOff x="0" y="0"/>
+          <a:chExt cx="0" cy="0"/>
+        </a:xfrm>
+      </p:grpSpPr>
+      <p:sp>
+        <p:nvSpPr>
+          <p:cNvPr id="2" name="Title 1"/>
+          <p:cNvSpPr>
+            <a:spLocks noGrp="1"/>
+          </p:cNvSpPr>
+          <p:nvPr>
+            <p:ph type="title"/>
+          </p:nvPr>
+        </p:nvSpPr>
+        <p:spPr>
+          <a:xfrm>
+            <a:off x="0" y="0"/>
             <a:ext cx="9144000" cy="582780"/>
           </a:xfrm>
         </p:spPr>
@@ -5011,7 +6869,7 @@
 </p:sld>
 </file>
 
-<file path=ppt/slides/slide17.xml><?xml version="1.0" encoding="utf-8"?>
+<file path=ppt/slides/slide18.xml><?xml version="1.0" encoding="utf-8"?>
 <p:sld xmlns:a="http://schemas.openxmlformats.org/drawingml/2006/main" xmlns:r="http://schemas.openxmlformats.org/officeDocument/2006/relationships" xmlns:p="http://schemas.openxmlformats.org/presentationml/2006/main">
   <p:cSld>
     <p:spTree>
@@ -5840,7 +7698,7 @@
 </p:sld>
 </file>
 
-<file path=ppt/slides/slide18.xml><?xml version="1.0" encoding="utf-8"?>
+<file path=ppt/slides/slide19.xml><?xml version="1.0" encoding="utf-8"?>
 <p:sld xmlns:a="http://schemas.openxmlformats.org/drawingml/2006/main" xmlns:r="http://schemas.openxmlformats.org/officeDocument/2006/relationships" xmlns:p="http://schemas.openxmlformats.org/presentationml/2006/main">
   <p:cSld>
     <p:spTree>
@@ -6005,262 +7863,6 @@
           </a:p>
         </p:txBody>
       </p:sp>
-    </p:spTree>
-  </p:cSld>
-</p:sld>
-</file>
-
-<file path=ppt/slides/slide19.xml><?xml version="1.0" encoding="utf-8"?>
-<p:sld xmlns:a="http://schemas.openxmlformats.org/drawingml/2006/main" xmlns:r="http://schemas.openxmlformats.org/officeDocument/2006/relationships" xmlns:p="http://schemas.openxmlformats.org/presentationml/2006/main">
-  <p:cSld>
-    <p:spTree>
-      <p:nvGrpSpPr>
-        <p:cNvPr id="1" name=""/>
-        <p:cNvGrpSpPr/>
-        <p:nvPr/>
-      </p:nvGrpSpPr>
-      <p:grpSpPr>
-        <a:xfrm>
-          <a:off x="0" y="0"/>
-          <a:ext cx="0" cy="0"/>
-          <a:chOff x="0" y="0"/>
-          <a:chExt cx="0" cy="0"/>
-        </a:xfrm>
-      </p:grpSpPr>
-      <p:sp>
-        <p:nvSpPr>
-          <p:cNvPr id="2" name="Title 1"/>
-          <p:cNvSpPr>
-            <a:spLocks noGrp="1"/>
-          </p:cNvSpPr>
-          <p:nvPr>
-            <p:ph type="title"/>
-          </p:nvPr>
-        </p:nvSpPr>
-        <p:spPr>
-          <a:xfrm>
-            <a:off x="0" y="0"/>
-            <a:ext cx="9144000" cy="602780"/>
-          </a:xfrm>
-          <a:solidFill>
-            <a:srgbClr val="70121D"/>
-          </a:solidFill>
-        </p:spPr>
-        <p:txBody>
-          <a:bodyPr/>
-          <a:lstStyle/>
-          <a:p>
-            <a:pPr lvl="0" indent="0" marL="0">
-              <a:buNone/>
-            </a:pPr>
-            <a:r>
-              <a:rPr b="1"/>
-              <a:t>Lecture 9:</a:t>
-            </a:r>
-            <a:r>
-              <a:rPr/>
-              <a:t> Linear Regression</a:t>
-            </a:r>
-          </a:p>
-        </p:txBody>
-      </p:sp>
-      <mc:AlternateContent xmlns:mc="http://schemas.openxmlformats.org/markup-compatibility/2006">
-        <mc:Choice xmlns:a14="http://schemas.microsoft.com/office/drawing/2010/main" Requires="a14">
-          <p:sp>
-            <p:nvSpPr>
-              <p:cNvPr id="3" name="Content Placeholder 2"/>
-              <p:cNvSpPr>
-                <a:spLocks noGrp="1"/>
-              </p:cNvSpPr>
-              <p:nvPr>
-                <p:ph idx="1" sz="half"/>
-              </p:nvPr>
-            </p:nvSpPr>
-            <p:spPr/>
-            <p:txBody>
-              <a:bodyPr/>
-              <a:lstStyle/>
-              <a:p>
-                <a:pPr lvl="0" indent="0" marL="0">
-                  <a:buNone/>
-                </a:pPr>
-                <a:r>
-                  <a:rPr/>
-                  <a:t>The hypothesis test asks whether the slope equals zero:</a:t>
-                </a:r>
-              </a:p>
-              <a:p>
-                <a:pPr lvl="0"/>
-                <a:r>
-                  <a:rPr/>
-                  <a:t>H₀: β = 0 (species number does not affect stability)</a:t>
-                </a:r>
-              </a:p>
-              <a:p>
-                <a:pPr lvl="0"/>
-                <a:r>
-                  <a:rPr/>
-                  <a:t>H₁: β ≠ 0 (species number does affect stability)</a:t>
-                </a:r>
-              </a:p>
-              <a:p>
-                <a:pPr lvl="0" indent="0" marL="0">
-                  <a:spcBef>
-                    <a:spcPts val="3000"/>
-                  </a:spcBef>
-                  <a:buNone/>
-                </a:pPr>
-                <a:r>
-                  <a:rPr b="1"/>
-                  <a:t>The test statistic is: </a:t>
-                </a:r>
-                <a14:m>
-                  <m:oMath xmlns:m="http://schemas.openxmlformats.org/officeDocument/2006/math">
-                    <m:r>
-                      <m:t>t</m:t>
-                    </m:r>
-                    <m:r>
-                      <m:rPr>
-                        <m:sty m:val="p"/>
-                      </m:rPr>
-                      <m:t>=</m:t>
-                    </m:r>
-                    <m:f>
-                      <m:fPr>
-                        <m:type m:val="bar"/>
-                      </m:fPr>
-                      <m:num>
-                        <m:r>
-                          <m:t>b</m:t>
-                        </m:r>
-                        <m:r>
-                          <m:rPr>
-                            <m:sty m:val="p"/>
-                          </m:rPr>
-                          <m:t>−</m:t>
-                        </m:r>
-                        <m:sSub>
-                          <m:e>
-                            <m:r>
-                              <m:t>β</m:t>
-                            </m:r>
-                          </m:e>
-                          <m:sub>
-                            <m:r>
-                              <m:t>0</m:t>
-                            </m:r>
-                          </m:sub>
-                        </m:sSub>
-                      </m:num>
-                      <m:den>
-                        <m:r>
-                          <m:t>S</m:t>
-                        </m:r>
-                        <m:sSub>
-                          <m:e>
-                            <m:r>
-                              <m:t>E</m:t>
-                            </m:r>
-                          </m:e>
-                          <m:sub>
-                            <m:r>
-                              <m:t>b</m:t>
-                            </m:r>
-                          </m:sub>
-                        </m:sSub>
-                      </m:den>
-                    </m:f>
-                  </m:oMath>
-                </a14:m>
-              </a:p>
-              <a:p>
-                <a:pPr lvl="0" indent="0" marL="0">
-                  <a:buNone/>
-                </a:pPr>
-                <a:r>
-                  <a:rPr/>
-                  <a:t>With df = n - 2 = 161 - 2 = 159</a:t>
-                </a:r>
-              </a:p>
-              <a:p>
-                <a:pPr lvl="0" indent="0" marL="0">
-                  <a:buNone/>
-                </a:pPr>
-                <a:r>
-                  <a:rPr b="1"/>
-                  <a:t>Interpretation:</a:t>
-                </a:r>
-              </a:p>
-              <a:p>
-                <a:pPr lvl="0" indent="0" marL="0">
-                  <a:buNone/>
-                </a:pPr>
-                <a:r>
-                  <a:rPr/>
-                  <a:t>The slope estimate is 0.033, indicating that log stability increases by 0.033 units for each additional plant species in the plot.</a:t>
-                </a:r>
-              </a:p>
-              <a:p>
-                <a:pPr lvl="0" indent="0" marL="0">
-                  <a:buNone/>
-                </a:pPr>
-                <a:r>
-                  <a:rPr/>
-                  <a:t>The p-value is very small (2.73e-10), providing strong evidence to reject the null hypothesis that species number has no effect on ecosystem stability.</a:t>
-                </a:r>
-              </a:p>
-              <a:p>
-                <a:pPr lvl="0" indent="0" marL="0">
-                  <a:buNone/>
-                </a:pPr>
-                <a:r>
-                  <a:rPr/>
-                  <a:t>R² = 0.222, meaning that approximately 22.2% of the variation in log stability is explained by the number of plant species.</a:t>
-                </a:r>
-              </a:p>
-              <a:p>
-                <a:pPr lvl="0" indent="0" marL="0">
-                  <a:buNone/>
-                </a:pPr>
-                <a:r>
-                  <a:rPr/>
-                  <a:t>This supports the biodiversity-stability hypothesis: more diverse plant communities have more stable biomass production over time.</a:t>
-                </a:r>
-              </a:p>
-            </p:txBody>
-          </p:sp>
-        </mc:Choice>
-      </mc:AlternateContent>
-      <p:pic>
-        <p:nvPicPr>
-          <p:cNvPr descr="09_01_lecture_powerpoint_files/figure-pptx/overview-plot-1d-1.png" id="0" name="Picture 1"/>
-          <p:cNvPicPr>
-            <a:picLocks noGrp="1" noChangeAspect="1"/>
-          </p:cNvPicPr>
-          <p:nvPr/>
-        </p:nvPicPr>
-        <p:blipFill>
-          <a:blip r:embed="rId2"/>
-          <a:stretch>
-            <a:fillRect/>
-          </a:stretch>
-        </p:blipFill>
-        <p:spPr bwMode="auto">
-          <a:xfrm>
-            <a:off x="6121400" y="2044700"/>
-            <a:ext cx="2781300" cy="1714500"/>
-          </a:xfrm>
-          <a:prstGeom prst="rect">
-            <a:avLst/>
-          </a:prstGeom>
-          <a:noFill/>
-          <a:ln w="9525">
-            <a:noFill/>
-            <a:headEnd/>
-            <a:tailEnd/>
-          </a:ln>
-        </p:spPr>
-      </p:pic>
     </p:spTree>
   </p:cSld>
 </p:sld>
@@ -6418,8 +8020,8 @@
         </p:blipFill>
         <p:spPr bwMode="auto">
           <a:xfrm>
-            <a:off x="6121400" y="1155700"/>
-            <a:ext cx="2781300" cy="3479800"/>
+            <a:off x="6121400" y="2044700"/>
+            <a:ext cx="2781300" cy="1714500"/>
           </a:xfrm>
           <a:prstGeom prst="rect">
             <a:avLst/>
@@ -6509,6 +8111,29 @@
               <a:lstStyle/>
               <a:p>
                 <a:pPr lvl="0" indent="0" marL="0">
+                  <a:buNone/>
+                </a:pPr>
+                <a:r>
+                  <a:rPr/>
+                  <a:t>The hypothesis test asks whether the slope equals zero:</a:t>
+                </a:r>
+              </a:p>
+              <a:p>
+                <a:pPr lvl="0"/>
+                <a:r>
+                  <a:rPr/>
+                  <a:t>H₀: β = 0 (species number does not affect stability)</a:t>
+                </a:r>
+              </a:p>
+              <a:p>
+                <a:pPr lvl="0"/>
+                <a:r>
+                  <a:rPr/>
+                  <a:t>H₁: β ≠ 0 (species number does affect stability)</a:t>
+                </a:r>
+              </a:p>
+              <a:p>
+                <a:pPr lvl="0" indent="0" marL="0">
                   <a:spcBef>
                     <a:spcPts val="3000"/>
                   </a:spcBef>
@@ -6516,175 +8141,119 @@
                 </a:pPr>
                 <a:r>
                   <a:rPr b="1"/>
-                  <a:t>Testing Regression Assumptions</a:t>
-                </a:r>
-              </a:p>
-              <a:p>
-                <a:pPr lvl="0" indent="0" marL="0">
-                  <a:buNone/>
-                </a:pPr>
-                <a:r>
-                  <a:rPr/>
-                  <a:t>linear regression has four key assumptions:</a:t>
-                </a:r>
-              </a:p>
-              <a:p>
-                <a:pPr lvl="0" indent="-342900" marL="342900">
-                  <a:buAutoNum type="arabicPeriod"/>
-                </a:pPr>
-                <a:r>
-                  <a:rPr b="1"/>
-                  <a:t>Linearity</a:t>
-                </a:r>
-                <a:r>
-                  <a:rPr/>
-                  <a:t>: The relationship between X and Y is linear</a:t>
-                </a:r>
-              </a:p>
-              <a:p>
-                <a:pPr lvl="0" indent="-342900" marL="342900">
-                  <a:buAutoNum type="arabicPeriod"/>
-                </a:pPr>
-                <a:r>
-                  <a:rPr b="1"/>
-                  <a:t>Independence</a:t>
-                </a:r>
-                <a:r>
-                  <a:rPr/>
-                  <a:t>: Observations are independent</a:t>
-                </a:r>
-              </a:p>
-              <a:p>
-                <a:pPr lvl="0" indent="-342900" marL="342900">
-                  <a:buAutoNum type="arabicPeriod"/>
-                </a:pPr>
-                <a:r>
-                  <a:rPr b="1"/>
-                  <a:t>Homoscedasticity</a:t>
-                </a:r>
-                <a:r>
-                  <a:rPr/>
-                  <a:t>: Equal variance across all values of X</a:t>
-                </a:r>
-              </a:p>
-              <a:p>
-                <a:pPr lvl="0" indent="-342900" marL="342900">
-                  <a:buAutoNum type="arabicPeriod"/>
-                </a:pPr>
-                <a:r>
-                  <a:rPr b="1"/>
-                  <a:t>Normality</a:t>
-                </a:r>
-                <a:r>
-                  <a:rPr/>
-                  <a:t>: Residuals are normally distributed</a:t>
-                </a:r>
-              </a:p>
-              <a:p>
-                <a:pPr lvl="0" indent="0" marL="0">
-                  <a:buNone/>
-                </a:pPr>
-                <a:r>
-                  <a:rPr/>
-                  <a:t>Let’s check these assumptions for the lion regression model:</a:t>
-                </a:r>
-                <a:br/>
-                <a:br/>
-                <a:r>
-                  <a:rPr/>
-                  <a:t>Assume that </a:t>
-                </a:r>
-                <a:r>
-                  <a:rPr b="1"/>
-                  <a:t>error 𝞮 i</a:t>
-                </a:r>
-                <a:r>
-                  <a:rPr/>
-                  <a:t>s </a:t>
+                  <a:t>The test statistic is: </a:t>
                 </a:r>
                 <a14:m>
                   <m:oMath xmlns:m="http://schemas.openxmlformats.org/officeDocument/2006/math">
-                    <m:sSub>
-                      <m:e>
-                        <m:r>
-                          <m:t>e</m:t>
-                        </m:r>
-                      </m:e>
-                      <m:sub>
-                        <m:r>
-                          <m:t>i</m:t>
-                        </m:r>
-                      </m:sub>
-                    </m:sSub>
+                    <m:r>
+                      <m:t>t</m:t>
+                    </m:r>
                     <m:r>
                       <m:rPr>
                         <m:sty m:val="p"/>
                       </m:rPr>
                       <m:t>=</m:t>
                     </m:r>
-                    <m:sSub>
-                      <m:e>
-                        <m:r>
-                          <m:t>y</m:t>
-                        </m:r>
-                      </m:e>
-                      <m:sub>
-                        <m:r>
-                          <m:t>i</m:t>
-                        </m:r>
-                      </m:sub>
-                    </m:sSub>
-                    <m:r>
-                      <m:rPr>
-                        <m:sty m:val="p"/>
-                      </m:rPr>
-                      <m:t>−</m:t>
-                    </m:r>
-                    <m:sSub>
-                      <m:e>
-                        <m:acc>
-                          <m:accPr>
-                            <m:chr m:val="̂"/>
-                          </m:accPr>
+                    <m:f>
+                      <m:fPr>
+                        <m:type m:val="bar"/>
+                      </m:fPr>
+                      <m:num>
+                        <m:r>
+                          <m:t>b</m:t>
+                        </m:r>
+                        <m:r>
+                          <m:rPr>
+                            <m:sty m:val="p"/>
+                          </m:rPr>
+                          <m:t>−</m:t>
+                        </m:r>
+                        <m:sSub>
                           <m:e>
                             <m:r>
-                              <m:t>y</m:t>
+                              <m:t>β</m:t>
                             </m:r>
                           </m:e>
-                        </m:acc>
-                      </m:e>
-                      <m:sub>
-                        <m:r>
-                          <m:t>i</m:t>
-                        </m:r>
-                      </m:sub>
-                    </m:sSub>
+                          <m:sub>
+                            <m:r>
+                              <m:t>0</m:t>
+                            </m:r>
+                          </m:sub>
+                        </m:sSub>
+                      </m:num>
+                      <m:den>
+                        <m:r>
+                          <m:t>S</m:t>
+                        </m:r>
+                        <m:sSub>
+                          <m:e>
+                            <m:r>
+                              <m:t>E</m:t>
+                            </m:r>
+                          </m:e>
+                          <m:sub>
+                            <m:r>
+                              <m:t>b</m:t>
+                            </m:r>
+                          </m:sub>
+                        </m:sSub>
+                      </m:den>
+                    </m:f>
                   </m:oMath>
                 </a14:m>
               </a:p>
               <a:p>
-                <a:pPr lvl="0"/>
+                <a:pPr lvl="0" indent="0" marL="0">
+                  <a:buNone/>
+                </a:pPr>
                 <a:r>
                   <a:rPr/>
-                  <a:t>normally distributed for each x</a:t>
-                </a:r>
-                <a:r>
-                  <a:rPr baseline="-25000"/>
-                  <a:t>i</a:t>
-                </a:r>
-              </a:p>
-              <a:p>
-                <a:pPr lvl="0"/>
+                  <a:t>With df = n - 2 = 161 - 2 = 159</a:t>
+                </a:r>
+              </a:p>
+              <a:p>
+                <a:pPr lvl="0" indent="0" marL="0">
+                  <a:buNone/>
+                </a:pPr>
+                <a:r>
+                  <a:rPr b="1"/>
+                  <a:t>Interpretation:</a:t>
+                </a:r>
+              </a:p>
+              <a:p>
+                <a:pPr lvl="0" indent="0" marL="0">
+                  <a:buNone/>
+                </a:pPr>
                 <a:r>
                   <a:rPr/>
-                  <a:t>has the same variance</a:t>
-                </a:r>
-              </a:p>
-              <a:p>
-                <a:pPr lvl="0"/>
+                  <a:t>The slope estimate is 0.033, indicating that log stability increases by 0.033 units for each additional plant species in the plot.</a:t>
+                </a:r>
+              </a:p>
+              <a:p>
+                <a:pPr lvl="0" indent="0" marL="0">
+                  <a:buNone/>
+                </a:pPr>
                 <a:r>
                   <a:rPr/>
-                  <a:t>has a mean of 0 at each xi</a:t>
+                  <a:t>The p-value is very small (2.73e-10), providing strong evidence to reject the null hypothesis that species number has no effect on ecosystem stability.</a:t>
+                </a:r>
+              </a:p>
+              <a:p>
+                <a:pPr lvl="0" indent="0" marL="0">
+                  <a:buNone/>
+                </a:pPr>
+                <a:r>
+                  <a:rPr/>
+                  <a:t>R² = 0.222, meaning that approximately 22.2% of the variation in log stability is explained by the number of plant species.</a:t>
+                </a:r>
+              </a:p>
+              <a:p>
+                <a:pPr lvl="0" indent="0" marL="0">
+                  <a:buNone/>
+                </a:pPr>
+                <a:r>
+                  <a:rPr/>
+                  <a:t>This supports the biodiversity-stability hypothesis: more diverse plant communities have more stable biomass production over time.</a:t>
                 </a:r>
               </a:p>
             </p:txBody>
@@ -6693,7 +8262,7 @@
       </mc:AlternateContent>
       <p:pic>
         <p:nvPicPr>
-          <p:cNvPr descr="images/clipboard-2092034232.png" id="0" name="Picture 1"/>
+          <p:cNvPr descr="09_01_lecture_powerpoint_files/figure-pptx/overview-plot-1d-1.png" id="0" name="Picture 1"/>
           <p:cNvPicPr>
             <a:picLocks noGrp="1" noChangeAspect="1"/>
           </p:cNvPicPr>
@@ -6707,8 +8276,8 @@
         </p:blipFill>
         <p:spPr bwMode="auto">
           <a:xfrm>
-            <a:off x="6121400" y="2108200"/>
-            <a:ext cx="2781300" cy="1587500"/>
+            <a:off x="6121400" y="2044700"/>
+            <a:ext cx="2781300" cy="1714500"/>
           </a:xfrm>
           <a:prstGeom prst="rect">
             <a:avLst/>
@@ -6889,6 +8458,295 @@
                 </a:r>
                 <a:r>
                   <a:rPr/>
+                  <a:t>s </a:t>
+                </a:r>
+                <a14:m>
+                  <m:oMath xmlns:m="http://schemas.openxmlformats.org/officeDocument/2006/math">
+                    <m:sSub>
+                      <m:e>
+                        <m:r>
+                          <m:t>e</m:t>
+                        </m:r>
+                      </m:e>
+                      <m:sub>
+                        <m:r>
+                          <m:t>i</m:t>
+                        </m:r>
+                      </m:sub>
+                    </m:sSub>
+                    <m:r>
+                      <m:rPr>
+                        <m:sty m:val="p"/>
+                      </m:rPr>
+                      <m:t>=</m:t>
+                    </m:r>
+                    <m:sSub>
+                      <m:e>
+                        <m:r>
+                          <m:t>y</m:t>
+                        </m:r>
+                      </m:e>
+                      <m:sub>
+                        <m:r>
+                          <m:t>i</m:t>
+                        </m:r>
+                      </m:sub>
+                    </m:sSub>
+                    <m:r>
+                      <m:rPr>
+                        <m:sty m:val="p"/>
+                      </m:rPr>
+                      <m:t>−</m:t>
+                    </m:r>
+                    <m:sSub>
+                      <m:e>
+                        <m:acc>
+                          <m:accPr>
+                            <m:chr m:val="̂"/>
+                          </m:accPr>
+                          <m:e>
+                            <m:r>
+                              <m:t>y</m:t>
+                            </m:r>
+                          </m:e>
+                        </m:acc>
+                      </m:e>
+                      <m:sub>
+                        <m:r>
+                          <m:t>i</m:t>
+                        </m:r>
+                      </m:sub>
+                    </m:sSub>
+                  </m:oMath>
+                </a14:m>
+              </a:p>
+              <a:p>
+                <a:pPr lvl="0"/>
+                <a:r>
+                  <a:rPr/>
+                  <a:t>normally distributed for each x</a:t>
+                </a:r>
+                <a:r>
+                  <a:rPr baseline="-25000"/>
+                  <a:t>i</a:t>
+                </a:r>
+              </a:p>
+              <a:p>
+                <a:pPr lvl="0"/>
+                <a:r>
+                  <a:rPr/>
+                  <a:t>has the same variance</a:t>
+                </a:r>
+              </a:p>
+              <a:p>
+                <a:pPr lvl="0"/>
+                <a:r>
+                  <a:rPr/>
+                  <a:t>has a mean of 0 at each xi</a:t>
+                </a:r>
+              </a:p>
+            </p:txBody>
+          </p:sp>
+        </mc:Choice>
+      </mc:AlternateContent>
+      <p:pic>
+        <p:nvPicPr>
+          <p:cNvPr descr="images/clipboard-2092034232.png" id="0" name="Picture 1"/>
+          <p:cNvPicPr>
+            <a:picLocks noGrp="1" noChangeAspect="1"/>
+          </p:cNvPicPr>
+          <p:nvPr/>
+        </p:nvPicPr>
+        <p:blipFill>
+          <a:blip r:embed="rId2"/>
+          <a:stretch>
+            <a:fillRect/>
+          </a:stretch>
+        </p:blipFill>
+        <p:spPr bwMode="auto">
+          <a:xfrm>
+            <a:off x="6121400" y="2108200"/>
+            <a:ext cx="2781300" cy="1587500"/>
+          </a:xfrm>
+          <a:prstGeom prst="rect">
+            <a:avLst/>
+          </a:prstGeom>
+          <a:noFill/>
+          <a:ln w="9525">
+            <a:noFill/>
+            <a:headEnd/>
+            <a:tailEnd/>
+          </a:ln>
+        </p:spPr>
+      </p:pic>
+    </p:spTree>
+  </p:cSld>
+</p:sld>
+</file>
+
+<file path=ppt/slides/slide22.xml><?xml version="1.0" encoding="utf-8"?>
+<p:sld xmlns:a="http://schemas.openxmlformats.org/drawingml/2006/main" xmlns:r="http://schemas.openxmlformats.org/officeDocument/2006/relationships" xmlns:p="http://schemas.openxmlformats.org/presentationml/2006/main">
+  <p:cSld>
+    <p:spTree>
+      <p:nvGrpSpPr>
+        <p:cNvPr id="1" name=""/>
+        <p:cNvGrpSpPr/>
+        <p:nvPr/>
+      </p:nvGrpSpPr>
+      <p:grpSpPr>
+        <a:xfrm>
+          <a:off x="0" y="0"/>
+          <a:ext cx="0" cy="0"/>
+          <a:chOff x="0" y="0"/>
+          <a:chExt cx="0" cy="0"/>
+        </a:xfrm>
+      </p:grpSpPr>
+      <p:sp>
+        <p:nvSpPr>
+          <p:cNvPr id="2" name="Title 1"/>
+          <p:cNvSpPr>
+            <a:spLocks noGrp="1"/>
+          </p:cNvSpPr>
+          <p:nvPr>
+            <p:ph type="title"/>
+          </p:nvPr>
+        </p:nvSpPr>
+        <p:spPr>
+          <a:xfrm>
+            <a:off x="0" y="0"/>
+            <a:ext cx="9144000" cy="602780"/>
+          </a:xfrm>
+          <a:solidFill>
+            <a:srgbClr val="70121D"/>
+          </a:solidFill>
+        </p:spPr>
+        <p:txBody>
+          <a:bodyPr/>
+          <a:lstStyle/>
+          <a:p>
+            <a:pPr lvl="0" indent="0" marL="0">
+              <a:buNone/>
+            </a:pPr>
+            <a:r>
+              <a:rPr b="1"/>
+              <a:t>Lecture 9:</a:t>
+            </a:r>
+            <a:r>
+              <a:rPr/>
+              <a:t> Linear Regression</a:t>
+            </a:r>
+          </a:p>
+        </p:txBody>
+      </p:sp>
+      <mc:AlternateContent xmlns:mc="http://schemas.openxmlformats.org/markup-compatibility/2006">
+        <mc:Choice xmlns:a14="http://schemas.microsoft.com/office/drawing/2010/main" Requires="a14">
+          <p:sp>
+            <p:nvSpPr>
+              <p:cNvPr id="3" name="Content Placeholder 2"/>
+              <p:cNvSpPr>
+                <a:spLocks noGrp="1"/>
+              </p:cNvSpPr>
+              <p:nvPr>
+                <p:ph idx="1" sz="half"/>
+              </p:nvPr>
+            </p:nvSpPr>
+            <p:spPr/>
+            <p:txBody>
+              <a:bodyPr/>
+              <a:lstStyle/>
+              <a:p>
+                <a:pPr lvl="0" indent="0" marL="0">
+                  <a:spcBef>
+                    <a:spcPts val="3000"/>
+                  </a:spcBef>
+                  <a:buNone/>
+                </a:pPr>
+                <a:r>
+                  <a:rPr b="1"/>
+                  <a:t>Testing Regression Assumptions</a:t>
+                </a:r>
+              </a:p>
+              <a:p>
+                <a:pPr lvl="0" indent="0" marL="0">
+                  <a:buNone/>
+                </a:pPr>
+                <a:r>
+                  <a:rPr/>
+                  <a:t>linear regression has four key assumptions:</a:t>
+                </a:r>
+              </a:p>
+              <a:p>
+                <a:pPr lvl="0" indent="-342900" marL="342900">
+                  <a:buAutoNum type="arabicPeriod"/>
+                </a:pPr>
+                <a:r>
+                  <a:rPr b="1"/>
+                  <a:t>Linearity</a:t>
+                </a:r>
+                <a:r>
+                  <a:rPr/>
+                  <a:t>: The relationship between X and Y is linear</a:t>
+                </a:r>
+              </a:p>
+              <a:p>
+                <a:pPr lvl="0" indent="-342900" marL="342900">
+                  <a:buAutoNum type="arabicPeriod"/>
+                </a:pPr>
+                <a:r>
+                  <a:rPr b="1"/>
+                  <a:t>Independence</a:t>
+                </a:r>
+                <a:r>
+                  <a:rPr/>
+                  <a:t>: Observations are independent</a:t>
+                </a:r>
+              </a:p>
+              <a:p>
+                <a:pPr lvl="0" indent="-342900" marL="342900">
+                  <a:buAutoNum type="arabicPeriod"/>
+                </a:pPr>
+                <a:r>
+                  <a:rPr b="1"/>
+                  <a:t>Homoscedasticity</a:t>
+                </a:r>
+                <a:r>
+                  <a:rPr/>
+                  <a:t>: Equal variance across all values of X</a:t>
+                </a:r>
+              </a:p>
+              <a:p>
+                <a:pPr lvl="0" indent="-342900" marL="342900">
+                  <a:buAutoNum type="arabicPeriod"/>
+                </a:pPr>
+                <a:r>
+                  <a:rPr b="1"/>
+                  <a:t>Normality</a:t>
+                </a:r>
+                <a:r>
+                  <a:rPr/>
+                  <a:t>: Residuals are normally distributed</a:t>
+                </a:r>
+              </a:p>
+              <a:p>
+                <a:pPr lvl="0" indent="0" marL="0">
+                  <a:buNone/>
+                </a:pPr>
+                <a:r>
+                  <a:rPr/>
+                  <a:t>Let’s check these assumptions for the lion regression model:</a:t>
+                </a:r>
+                <a:br/>
+                <a:br/>
+                <a:r>
+                  <a:rPr/>
+                  <a:t>Assume that </a:t>
+                </a:r>
+                <a:r>
+                  <a:rPr b="1"/>
+                  <a:t>error 𝞮 i</a:t>
+                </a:r>
+                <a:r>
+                  <a:rPr/>
                   <a:t>s - estimated as the residuals: </a:t>
                 </a:r>
                 <a14:m>
@@ -7100,28 +8958,6 @@
 </p:sld>
 </file>
 
-<file path=ppt/slides/slide22.xml><?xml version="1.0" encoding="utf-8"?>
-<p:sld xmlns:a="http://schemas.openxmlformats.org/drawingml/2006/main" xmlns:r="http://schemas.openxmlformats.org/officeDocument/2006/relationships" xmlns:p="http://schemas.openxmlformats.org/presentationml/2006/main">
-  <p:cSld>
-    <p:spTree>
-      <p:nvGrpSpPr>
-        <p:cNvPr id="1" name=""/>
-        <p:cNvGrpSpPr/>
-        <p:nvPr/>
-      </p:nvGrpSpPr>
-      <p:grpSpPr>
-        <a:xfrm>
-          <a:off x="0" y="0"/>
-          <a:ext cx="0" cy="0"/>
-          <a:chOff x="0" y="0"/>
-          <a:chExt cx="0" cy="0"/>
-        </a:xfrm>
-      </p:grpSpPr>
-    </p:spTree>
-  </p:cSld>
-</p:sld>
-</file>
-
 <file path=ppt/slides/slide23.xml><?xml version="1.0" encoding="utf-8"?>
 <p:sld xmlns:a="http://schemas.openxmlformats.org/drawingml/2006/main" xmlns:r="http://schemas.openxmlformats.org/officeDocument/2006/relationships" xmlns:p="http://schemas.openxmlformats.org/presentationml/2006/main">
   <p:cSld>
@@ -7139,171 +8975,6 @@
           <a:chExt cx="0" cy="0"/>
         </a:xfrm>
       </p:grpSpPr>
-      <p:sp>
-        <p:nvSpPr>
-          <p:cNvPr id="2" name="Title 1"/>
-          <p:cNvSpPr>
-            <a:spLocks noGrp="1"/>
-          </p:cNvSpPr>
-          <p:nvPr>
-            <p:ph type="title"/>
-          </p:nvPr>
-        </p:nvSpPr>
-        <p:spPr>
-          <a:xfrm>
-            <a:off x="0" y="0"/>
-            <a:ext cx="9144000" cy="602780"/>
-          </a:xfrm>
-          <a:solidFill>
-            <a:srgbClr val="70121D"/>
-          </a:solidFill>
-        </p:spPr>
-        <p:txBody>
-          <a:bodyPr/>
-          <a:lstStyle/>
-          <a:p>
-            <a:pPr lvl="0" indent="0" marL="0">
-              <a:buNone/>
-            </a:pPr>
-            <a:r>
-              <a:rPr b="1"/>
-              <a:t>Lecture 9:</a:t>
-            </a:r>
-            <a:r>
-              <a:rPr/>
-              <a:t> Linear Regression</a:t>
-            </a:r>
-          </a:p>
-        </p:txBody>
-      </p:sp>
-      <p:sp>
-        <p:nvSpPr>
-          <p:cNvPr id="3" name="Content Placeholder 2"/>
-          <p:cNvSpPr>
-            <a:spLocks noGrp="1"/>
-          </p:cNvSpPr>
-          <p:nvPr>
-            <p:ph idx="1" sz="half"/>
-          </p:nvPr>
-        </p:nvSpPr>
-        <p:spPr/>
-        <p:txBody>
-          <a:bodyPr/>
-          <a:lstStyle/>
-          <a:p>
-            <a:pPr lvl="0" indent="0" marL="0">
-              <a:spcBef>
-                <a:spcPts val="3000"/>
-              </a:spcBef>
-              <a:buNone/>
-            </a:pPr>
-            <a:r>
-              <a:rPr b="1"/>
-              <a:t>Testing Regression Assumptions</a:t>
-            </a:r>
-          </a:p>
-          <a:p>
-            <a:pPr lvl="0" indent="0" marL="0">
-              <a:buNone/>
-            </a:pPr>
-            <a:r>
-              <a:rPr/>
-              <a:t>linear regression has four key assumptions:</a:t>
-            </a:r>
-          </a:p>
-          <a:p>
-            <a:pPr lvl="0" indent="-342900" marL="342900">
-              <a:buAutoNum type="arabicPeriod"/>
-            </a:pPr>
-            <a:r>
-              <a:rPr b="1"/>
-              <a:t>Linearity</a:t>
-            </a:r>
-            <a:r>
-              <a:rPr/>
-              <a:t>: The relationship between X and Y is linear</a:t>
-            </a:r>
-          </a:p>
-          <a:p>
-            <a:pPr lvl="0" indent="-342900" marL="342900">
-              <a:buAutoNum type="arabicPeriod"/>
-            </a:pPr>
-            <a:r>
-              <a:rPr b="1"/>
-              <a:t>Independence</a:t>
-            </a:r>
-            <a:r>
-              <a:rPr/>
-              <a:t>: Observations are independent</a:t>
-            </a:r>
-          </a:p>
-          <a:p>
-            <a:pPr lvl="0" indent="-342900" marL="342900">
-              <a:buAutoNum type="arabicPeriod"/>
-            </a:pPr>
-            <a:r>
-              <a:rPr b="1"/>
-              <a:t>Homoscedasticity</a:t>
-            </a:r>
-            <a:r>
-              <a:rPr/>
-              <a:t>: Equal variance across all values of X</a:t>
-            </a:r>
-          </a:p>
-          <a:p>
-            <a:pPr lvl="0" indent="-342900" marL="342900">
-              <a:buAutoNum type="arabicPeriod"/>
-            </a:pPr>
-            <a:r>
-              <a:rPr b="1"/>
-              <a:t>Normality</a:t>
-            </a:r>
-            <a:r>
-              <a:rPr/>
-              <a:t>: Residuals are normally distributed</a:t>
-            </a:r>
-          </a:p>
-          <a:p>
-            <a:pPr lvl="0" indent="0" marL="0">
-              <a:buNone/>
-            </a:pPr>
-            <a:r>
-              <a:rPr/>
-              <a:t>Let’s check these assumptions for the lion regression model:</a:t>
-            </a:r>
-          </a:p>
-        </p:txBody>
-      </p:sp>
-      <p:pic>
-        <p:nvPicPr>
-          <p:cNvPr descr="09_01_lecture_powerpoint_files/figure-pptx/overview-plot-1e-1.png" id="0" name="Picture 1"/>
-          <p:cNvPicPr>
-            <a:picLocks noGrp="1" noChangeAspect="1"/>
-          </p:cNvPicPr>
-          <p:nvPr/>
-        </p:nvPicPr>
-        <p:blipFill>
-          <a:blip r:embed="rId2"/>
-          <a:stretch>
-            <a:fillRect/>
-          </a:stretch>
-        </p:blipFill>
-        <p:spPr bwMode="auto">
-          <a:xfrm>
-            <a:off x="6121400" y="2044700"/>
-            <a:ext cx="2781300" cy="1714500"/>
-          </a:xfrm>
-          <a:prstGeom prst="rect">
-            <a:avLst/>
-          </a:prstGeom>
-          <a:noFill/>
-          <a:ln w="9525">
-            <a:noFill/>
-            <a:headEnd/>
-            <a:tailEnd/>
-          </a:ln>
-        </p:spPr>
-      </p:pic>
     </p:spTree>
   </p:cSld>
 </p:sld>
@@ -7463,7 +9134,7 @@
       </p:sp>
       <p:pic>
         <p:nvPicPr>
-          <p:cNvPr descr="09_01_lecture_powerpoint_files/figure-pptx/overview-plot-1f-1.png" id="0" name="Picture 1"/>
+          <p:cNvPr descr="09_01_lecture_powerpoint_files/figure-pptx/overview-plot-1e-1.png" id="0" name="Picture 1"/>
           <p:cNvPicPr>
             <a:picLocks noGrp="1" noChangeAspect="1"/>
           </p:cNvPicPr>
@@ -7648,36 +9319,36 @@
           </a:p>
         </p:txBody>
       </p:sp>
-      <p:sp>
-        <p:nvSpPr>
-          <p:cNvPr id="4" name="Content Placeholder 3"/>
-          <p:cNvSpPr>
-            <a:spLocks noGrp="1"/>
-          </p:cNvSpPr>
-          <p:nvPr>
-            <p:ph idx="2" sz="half"/>
-          </p:nvPr>
-        </p:nvSpPr>
-        <p:spPr/>
-        <p:txBody>
-          <a:bodyPr/>
-          <a:lstStyle/>
-          <a:p>
-            <a:pPr lvl="0" indent="0">
-              <a:buNone/>
-            </a:pPr>
-            <a:r>
-              <a:rPr>
-                <a:latin typeface="Courier"/>
-              </a:rPr>
-              <a:t>
-    Shapiro-Wilk normality test
-data:  residuals(lion_model)
-W = 0.93879, p-value = 0.0692</a:t>
-            </a:r>
-          </a:p>
-        </p:txBody>
-      </p:sp>
+      <p:pic>
+        <p:nvPicPr>
+          <p:cNvPr descr="09_01_lecture_powerpoint_files/figure-pptx/overview-plot-1f-1.png" id="0" name="Picture 1"/>
+          <p:cNvPicPr>
+            <a:picLocks noGrp="1" noChangeAspect="1"/>
+          </p:cNvPicPr>
+          <p:nvPr/>
+        </p:nvPicPr>
+        <p:blipFill>
+          <a:blip r:embed="rId2"/>
+          <a:stretch>
+            <a:fillRect/>
+          </a:stretch>
+        </p:blipFill>
+        <p:spPr bwMode="auto">
+          <a:xfrm>
+            <a:off x="6121400" y="2044700"/>
+            <a:ext cx="2781300" cy="1714500"/>
+          </a:xfrm>
+          <a:prstGeom prst="rect">
+            <a:avLst/>
+          </a:prstGeom>
+          <a:noFill/>
+          <a:ln w="9525">
+            <a:noFill/>
+            <a:headEnd/>
+            <a:tailEnd/>
+          </a:ln>
+        </p:spPr>
+      </p:pic>
     </p:spTree>
   </p:cSld>
 </p:sld>
@@ -7760,7 +9431,7 @@
             </a:pPr>
             <a:r>
               <a:rPr b="1"/>
-              <a:t>Simple Linear Regression Model</a:t>
+              <a:t>Testing Regression Assumptions</a:t>
             </a:r>
           </a:p>
           <a:p>
@@ -7830,41 +9501,41 @@
             </a:pPr>
             <a:r>
               <a:rPr/>
-              <a:t>If assumptions are violated: 1. Transform the data (Section 17.6) 2. Use weighted least squares for heteroscedasticity 3. Consider non-linear models (Section 17.8)</a:t>
+              <a:t>Let’s check these assumptions for the lion regression model:</a:t>
             </a:r>
           </a:p>
         </p:txBody>
       </p:sp>
-      <p:pic>
-        <p:nvPicPr>
-          <p:cNvPr descr="09_01_lecture_powerpoint_files/figure-pptx/overview-plot-1h-1.png" id="0" name="Picture 1"/>
-          <p:cNvPicPr>
-            <a:picLocks noGrp="1" noChangeAspect="1"/>
-          </p:cNvPicPr>
-          <p:nvPr/>
-        </p:nvPicPr>
-        <p:blipFill>
-          <a:blip r:embed="rId2"/>
-          <a:stretch>
-            <a:fillRect/>
-          </a:stretch>
-        </p:blipFill>
-        <p:spPr bwMode="auto">
-          <a:xfrm>
-            <a:off x="6121400" y="1778000"/>
-            <a:ext cx="2781300" cy="2222500"/>
-          </a:xfrm>
-          <a:prstGeom prst="rect">
-            <a:avLst/>
-          </a:prstGeom>
-          <a:noFill/>
-          <a:ln w="9525">
-            <a:noFill/>
-            <a:headEnd/>
-            <a:tailEnd/>
-          </a:ln>
-        </p:spPr>
-      </p:pic>
+      <p:sp>
+        <p:nvSpPr>
+          <p:cNvPr id="4" name="Content Placeholder 3"/>
+          <p:cNvSpPr>
+            <a:spLocks noGrp="1"/>
+          </p:cNvSpPr>
+          <p:nvPr>
+            <p:ph idx="2" sz="half"/>
+          </p:nvPr>
+        </p:nvSpPr>
+        <p:spPr/>
+        <p:txBody>
+          <a:bodyPr/>
+          <a:lstStyle/>
+          <a:p>
+            <a:pPr lvl="0" indent="0">
+              <a:buNone/>
+            </a:pPr>
+            <a:r>
+              <a:rPr>
+                <a:latin typeface="Courier"/>
+              </a:rPr>
+              <a:t>
+    Shapiro-Wilk normality test
+data:  residuals(lion_model)
+W = 0.93879, p-value = 0.0692</a:t>
+            </a:r>
+          </a:p>
+        </p:txBody>
+      </p:sp>
     </p:spTree>
   </p:cSld>
 </p:sld>
@@ -7919,7 +9590,7 @@
             </a:r>
             <a:r>
               <a:rPr/>
-              <a:t> Linear Regression - estimates of error and significance</a:t>
+              <a:t> Linear Regression</a:t>
             </a:r>
           </a:p>
         </p:txBody>
@@ -7939,31 +9610,92 @@
           <a:bodyPr/>
           <a:lstStyle/>
           <a:p>
-            <a:pPr lvl="0"/>
+            <a:pPr lvl="0" indent="0" marL="0">
+              <a:spcBef>
+                <a:spcPts val="3000"/>
+              </a:spcBef>
+              <a:buNone/>
+            </a:pPr>
+            <a:r>
+              <a:rPr b="1"/>
+              <a:t>Simple Linear Regression Model</a:t>
+            </a:r>
+          </a:p>
+          <a:p>
+            <a:pPr lvl="0" indent="0" marL="0">
+              <a:buNone/>
+            </a:pPr>
             <a:r>
               <a:rPr/>
-              <a:t>Estimates of standard error and confidence intervals for slow and intercept to determine confidence bands</a:t>
-            </a:r>
-          </a:p>
-          <a:p>
-            <a:pPr lvl="0"/>
+              <a:t>linear regression has four key assumptions:</a:t>
+            </a:r>
+          </a:p>
+          <a:p>
+            <a:pPr lvl="0" indent="-342900" marL="342900">
+              <a:buAutoNum type="arabicPeriod"/>
+            </a:pPr>
+            <a:r>
+              <a:rPr b="1"/>
+              <a:t>Linearity</a:t>
+            </a:r>
             <a:r>
               <a:rPr/>
-              <a:t>the 95% confidence band will contain the true population line 95/100 under repeated sampling</a:t>
-            </a:r>
-          </a:p>
-          <a:p>
-            <a:pPr lvl="0"/>
+              <a:t>: The relationship between X and Y is linear</a:t>
+            </a:r>
+          </a:p>
+          <a:p>
+            <a:pPr lvl="0" indent="-342900" marL="342900">
+              <a:buAutoNum type="arabicPeriod"/>
+            </a:pPr>
+            <a:r>
+              <a:rPr b="1"/>
+              <a:t>Independence</a:t>
+            </a:r>
             <a:r>
               <a:rPr/>
-              <a:t>this is usually done in R</a:t>
+              <a:t>: Observations are independent</a:t>
+            </a:r>
+          </a:p>
+          <a:p>
+            <a:pPr lvl="0" indent="-342900" marL="342900">
+              <a:buAutoNum type="arabicPeriod"/>
+            </a:pPr>
+            <a:r>
+              <a:rPr b="1"/>
+              <a:t>Homoscedasticity</a:t>
+            </a:r>
+            <a:r>
+              <a:rPr/>
+              <a:t>: Equal variance across all values of X</a:t>
+            </a:r>
+          </a:p>
+          <a:p>
+            <a:pPr lvl="0" indent="-342900" marL="342900">
+              <a:buAutoNum type="arabicPeriod"/>
+            </a:pPr>
+            <a:r>
+              <a:rPr b="1"/>
+              <a:t>Normality</a:t>
+            </a:r>
+            <a:r>
+              <a:rPr/>
+              <a:t>: Residuals are normally distributed</a:t>
+            </a:r>
+          </a:p>
+          <a:p>
+            <a:pPr lvl="0" indent="0" marL="0">
+              <a:buNone/>
+            </a:pPr>
+            <a:r>
+              <a:rPr/>
+              <a:t>If assumptions are violated: 1. Transform the data (Section 17.6) 2. Use weighted least squares for heteroscedasticity 3. Consider non-linear models (Section 17.8)</a:t>
             </a:r>
           </a:p>
         </p:txBody>
       </p:sp>
       <p:pic>
         <p:nvPicPr>
-          <p:cNvPr descr="images/clipboard-934594306.png" id="0" name="Picture 1"/>
+          <p:cNvPr descr="09_01_lecture_powerpoint_files/figure-pptx/overview-plot-1h-1.png" id="0" name="Picture 1"/>
           <p:cNvPicPr>
             <a:picLocks noGrp="1" noChangeAspect="1"/>
           </p:cNvPicPr>
@@ -7977,8 +9709,8 @@
         </p:blipFill>
         <p:spPr bwMode="auto">
           <a:xfrm>
-            <a:off x="6121400" y="2374900"/>
-            <a:ext cx="2781300" cy="1028700"/>
+            <a:off x="6121400" y="1778000"/>
+            <a:ext cx="2781300" cy="2222500"/>
           </a:xfrm>
           <a:prstGeom prst="rect">
             <a:avLst/>
@@ -8065,33 +9797,31 @@
           <a:bodyPr/>
           <a:lstStyle/>
           <a:p>
-            <a:pPr lvl="0" indent="0" marL="0">
-              <a:buNone/>
-            </a:pPr>
+            <a:pPr lvl="0"/>
             <a:r>
               <a:rPr/>
-              <a:t>In addition to getting estimates of population parameters (β0 , β1), want to test hypotheses about them</a:t>
+              <a:t>Estimates of standard error and confidence intervals for slow and intercept to determine confidence bands</a:t>
             </a:r>
           </a:p>
           <a:p>
             <a:pPr lvl="0"/>
             <a:r>
               <a:rPr/>
-              <a:t>This is accomplished by analysis of variance</a:t>
+              <a:t>the 95% confidence band will contain the true population line 95/100 under repeated sampling</a:t>
             </a:r>
           </a:p>
           <a:p>
             <a:pPr lvl="0"/>
             <a:r>
               <a:rPr/>
-              <a:t>Partition variance in Y: due to variation in X, due to other things (error)</a:t>
+              <a:t>this is usually done in R</a:t>
             </a:r>
           </a:p>
         </p:txBody>
       </p:sp>
       <p:pic>
         <p:nvPicPr>
-          <p:cNvPr descr="images/clipboard-2817787184.png" id="0" name="Picture 1"/>
+          <p:cNvPr descr="images/clipboard-934594306.png" id="0" name="Picture 1"/>
           <p:cNvPicPr>
             <a:picLocks noGrp="1" noChangeAspect="1"/>
           </p:cNvPicPr>
@@ -8105,8 +9835,8 @@
         </p:blipFill>
         <p:spPr bwMode="auto">
           <a:xfrm>
-            <a:off x="6121400" y="2425700"/>
-            <a:ext cx="2781300" cy="927100"/>
+            <a:off x="6121400" y="2374900"/>
+            <a:ext cx="2781300" cy="1028700"/>
           </a:xfrm>
           <a:prstGeom prst="rect">
             <a:avLst/>
@@ -8173,305 +9903,50 @@
             </a:r>
             <a:r>
               <a:rPr/>
-              <a:t> Linear Regression - estimates of variance</a:t>
+              <a:t> Linear Regression - estimates of error and significance</a:t>
             </a:r>
           </a:p>
         </p:txBody>
       </p:sp>
-      <mc:AlternateContent xmlns:mc="http://schemas.openxmlformats.org/markup-compatibility/2006">
-        <mc:Choice xmlns:a14="http://schemas.microsoft.com/office/drawing/2010/main" Requires="a14">
-          <p:sp>
-            <p:nvSpPr>
-              <p:cNvPr id="3" name="Content Placeholder 2"/>
-              <p:cNvSpPr>
-                <a:spLocks noGrp="1"/>
-              </p:cNvSpPr>
-              <p:nvPr>
-                <p:ph idx="1" sz="half"/>
-              </p:nvPr>
-            </p:nvSpPr>
-            <p:spPr/>
-            <p:txBody>
-              <a:bodyPr/>
-              <a:lstStyle/>
-              <a:p>
-                <a:pPr lvl="0" indent="0" marL="0">
-                  <a:buNone/>
-                </a:pPr>
-                <a:r>
-                  <a:rPr/>
-                  <a:t>Total variation in Y is “partitioned” into 3 components:</a:t>
-                </a:r>
-              </a:p>
-              <a:p>
-                <a:pPr lvl="0"/>
-                <a14:m>
-                  <m:oMath xmlns:m="http://schemas.openxmlformats.org/officeDocument/2006/math">
-                    <m:r>
-                      <m:t>S</m:t>
-                    </m:r>
-                    <m:sSub>
-                      <m:e>
-                        <m:r>
-                          <m:t>S</m:t>
-                        </m:r>
-                      </m:e>
-                      <m:sub>
-                        <m:r>
-                          <m:t>r</m:t>
-                        </m:r>
-                        <m:r>
-                          <m:t>e</m:t>
-                        </m:r>
-                        <m:r>
-                          <m:t>g</m:t>
-                        </m:r>
-                        <m:r>
-                          <m:t>r</m:t>
-                        </m:r>
-                        <m:r>
-                          <m:t>e</m:t>
-                        </m:r>
-                        <m:r>
-                          <m:t>s</m:t>
-                        </m:r>
-                        <m:r>
-                          <m:t>s</m:t>
-                        </m:r>
-                        <m:r>
-                          <m:t>i</m:t>
-                        </m:r>
-                        <m:r>
-                          <m:t>o</m:t>
-                        </m:r>
-                        <m:r>
-                          <m:t>n</m:t>
-                        </m:r>
-                      </m:sub>
-                    </m:sSub>
-                  </m:oMath>
-                </a14:m>
-                <a:r>
-                  <a:rPr/>
-                  <a:t>: variation explained by regression</a:t>
-                </a:r>
-              </a:p>
-              <a:p>
-                <a:pPr lvl="1"/>
-                <a:r>
-                  <a:rPr/>
-                  <a:t>difference between predicted values (ŷi ) and mean y (ȳ)</a:t>
-                </a:r>
-              </a:p>
-              <a:p>
-                <a:pPr lvl="1"/>
-                <a:r>
-                  <a:rPr/>
-                  <a:t>dfs= 1 for simple linear (parameters-1)</a:t>
-                </a:r>
-              </a:p>
-              <a:p>
-                <a:pPr lvl="0"/>
-                <a14:m>
-                  <m:oMath xmlns:m="http://schemas.openxmlformats.org/officeDocument/2006/math">
-                    <m:r>
-                      <m:t>S</m:t>
-                    </m:r>
-                    <m:sSub>
-                      <m:e>
-                        <m:r>
-                          <m:t>S</m:t>
-                        </m:r>
-                      </m:e>
-                      <m:sub>
-                        <m:r>
-                          <m:t>r</m:t>
-                        </m:r>
-                        <m:r>
-                          <m:t>e</m:t>
-                        </m:r>
-                        <m:r>
-                          <m:t>s</m:t>
-                        </m:r>
-                        <m:r>
-                          <m:t>i</m:t>
-                        </m:r>
-                        <m:r>
-                          <m:t>d</m:t>
-                        </m:r>
-                        <m:r>
-                          <m:t>u</m:t>
-                        </m:r>
-                        <m:r>
-                          <m:t>a</m:t>
-                        </m:r>
-                        <m:r>
-                          <m:t>l</m:t>
-                        </m:r>
-                      </m:sub>
-                    </m:sSub>
-                  </m:oMath>
-                </a14:m>
-                <a:r>
-                  <a:rPr/>
-                  <a:t>: variation not explained by regression</a:t>
-                </a:r>
-              </a:p>
-              <a:p>
-                <a:pPr lvl="1"/>
-                <a:r>
-                  <a:rPr/>
-                  <a:t>difference between observed (</a:t>
-                </a:r>
-                <a14:m>
-                  <m:oMath xmlns:m="http://schemas.openxmlformats.org/officeDocument/2006/math">
-                    <m:sSub>
-                      <m:e>
-                        <m:r>
-                          <m:t>y</m:t>
-                        </m:r>
-                      </m:e>
-                      <m:sub>
-                        <m:r>
-                          <m:t>i</m:t>
-                        </m:r>
-                      </m:sub>
-                    </m:sSub>
-                  </m:oMath>
-                </a14:m>
-                <a:r>
-                  <a:rPr/>
-                  <a:t>) and predicted (</a:t>
-                </a:r>
-                <a14:m>
-                  <m:oMath xmlns:m="http://schemas.openxmlformats.org/officeDocument/2006/math">
-                    <m:sSub>
-                      <m:e>
-                        <m:acc>
-                          <m:accPr>
-                            <m:chr m:val="̂"/>
-                          </m:accPr>
-                          <m:e>
-                            <m:r>
-                              <m:t>y</m:t>
-                            </m:r>
-                          </m:e>
-                        </m:acc>
-                      </m:e>
-                      <m:sub>
-                        <m:r>
-                          <m:t>i</m:t>
-                        </m:r>
-                      </m:sub>
-                    </m:sSub>
-                  </m:oMath>
-                </a14:m>
-                <a:r>
-                  <a:rPr/>
-                  <a:t>) values</a:t>
-                </a:r>
-              </a:p>
-              <a:p>
-                <a:pPr lvl="1"/>
-                <a:r>
-                  <a:rPr/>
-                  <a:t>dfs= n-2</a:t>
-                </a:r>
-              </a:p>
-              <a:p>
-                <a:pPr lvl="0"/>
-                <a14:m>
-                  <m:oMath xmlns:m="http://schemas.openxmlformats.org/officeDocument/2006/math">
-                    <m:r>
-                      <m:t>S</m:t>
-                    </m:r>
-                    <m:sSub>
-                      <m:e>
-                        <m:r>
-                          <m:t>S</m:t>
-                        </m:r>
-                      </m:e>
-                      <m:sub>
-                        <m:r>
-                          <m:t>t</m:t>
-                        </m:r>
-                        <m:r>
-                          <m:t>o</m:t>
-                        </m:r>
-                        <m:r>
-                          <m:t>t</m:t>
-                        </m:r>
-                        <m:r>
-                          <m:t>a</m:t>
-                        </m:r>
-                        <m:r>
-                          <m:t>l</m:t>
-                        </m:r>
-                      </m:sub>
-                    </m:sSub>
-                  </m:oMath>
-                </a14:m>
-                <a:r>
-                  <a:rPr/>
-                  <a:t>: total variation</a:t>
-                </a:r>
-              </a:p>
-              <a:p>
-                <a:pPr lvl="1"/>
-                <a:r>
-                  <a:rPr/>
-                  <a:t>sum of squared deviations of each observation (</a:t>
-                </a:r>
-                <a14:m>
-                  <m:oMath xmlns:m="http://schemas.openxmlformats.org/officeDocument/2006/math">
-                    <m:sSub>
-                      <m:e>
-                        <m:r>
-                          <m:t>y</m:t>
-                        </m:r>
-                      </m:e>
-                      <m:sub>
-                        <m:r>
-                          <m:t>i</m:t>
-                        </m:r>
-                      </m:sub>
-                    </m:sSub>
-                  </m:oMath>
-                </a14:m>
-                <a:r>
-                  <a:rPr/>
-                  <a:t>) from mean (</a:t>
-                </a:r>
-                <a14:m>
-                  <m:oMath xmlns:m="http://schemas.openxmlformats.org/officeDocument/2006/math">
-                    <m:acc>
-                      <m:accPr>
-                        <m:chr m:val="‾"/>
-                      </m:accPr>
-                      <m:e>
-                        <m:r>
-                          <m:t>y</m:t>
-                        </m:r>
-                      </m:e>
-                    </m:acc>
-                  </m:oMath>
-                </a14:m>
-                <a:r>
-                  <a:rPr/>
-                  <a:t>)</a:t>
-                </a:r>
-              </a:p>
-              <a:p>
-                <a:pPr lvl="1"/>
-                <a:r>
-                  <a:rPr/>
-                  <a:t>dfs = n-1</a:t>
-                </a:r>
-              </a:p>
-            </p:txBody>
-          </p:sp>
-        </mc:Choice>
-      </mc:AlternateContent>
+      <p:sp>
+        <p:nvSpPr>
+          <p:cNvPr id="3" name="Content Placeholder 2"/>
+          <p:cNvSpPr>
+            <a:spLocks noGrp="1"/>
+          </p:cNvSpPr>
+          <p:nvPr>
+            <p:ph idx="1" sz="half"/>
+          </p:nvPr>
+        </p:nvSpPr>
+        <p:spPr/>
+        <p:txBody>
+          <a:bodyPr/>
+          <a:lstStyle/>
+          <a:p>
+            <a:pPr lvl="0" indent="0" marL="0">
+              <a:buNone/>
+            </a:pPr>
+            <a:r>
+              <a:rPr/>
+              <a:t>In addition to getting estimates of population parameters (β0 , β1), want to test hypotheses about them</a:t>
+            </a:r>
+          </a:p>
+          <a:p>
+            <a:pPr lvl="0"/>
+            <a:r>
+              <a:rPr/>
+              <a:t>This is accomplished by analysis of variance</a:t>
+            </a:r>
+          </a:p>
+          <a:p>
+            <a:pPr lvl="0"/>
+            <a:r>
+              <a:rPr/>
+              <a:t>Partition variance in Y: due to variation in X, due to other things (error)</a:t>
+            </a:r>
+          </a:p>
+        </p:txBody>
+      </p:sp>
       <p:pic>
         <p:nvPicPr>
           <p:cNvPr descr="images/clipboard-2817787184.png" id="0" name="Picture 1"/>
@@ -9007,7 +10482,7 @@
       </mc:AlternateContent>
       <p:pic>
         <p:nvPicPr>
-          <p:cNvPr descr="images/clipboard-77063277.png" id="0" name="Picture 1"/>
+          <p:cNvPr descr="images/clipboard-2817787184.png" id="0" name="Picture 1"/>
           <p:cNvPicPr>
             <a:picLocks noGrp="1" noChangeAspect="1"/>
           </p:cNvPicPr>
@@ -9021,8 +10496,8 @@
         </p:blipFill>
         <p:spPr bwMode="auto">
           <a:xfrm>
-            <a:off x="6121400" y="2438400"/>
-            <a:ext cx="2781300" cy="914400"/>
+            <a:off x="6121400" y="2425700"/>
+            <a:ext cx="2781300" cy="927100"/>
           </a:xfrm>
           <a:prstGeom prst="rect">
             <a:avLst/>
@@ -9176,7 +10651,14 @@
                 <a:pPr lvl="1"/>
                 <a:r>
                   <a:rPr/>
-                  <a:t>GREATER IN C than D</a:t>
+                  <a:t>difference between predicted values (ŷi ) and mean y (ȳ)</a:t>
+                </a:r>
+              </a:p>
+              <a:p>
+                <a:pPr lvl="1"/>
+                <a:r>
+                  <a:rPr/>
+                  <a:t>dfs= 1 for simple linear (parameters-1)</a:t>
                 </a:r>
               </a:p>
               <a:p>
@@ -9230,7 +10712,61 @@
                 <a:pPr lvl="1"/>
                 <a:r>
                   <a:rPr/>
-                  <a:t>GREATER IN B THAN A</a:t>
+                  <a:t>difference between observed (</a:t>
+                </a:r>
+                <a14:m>
+                  <m:oMath xmlns:m="http://schemas.openxmlformats.org/officeDocument/2006/math">
+                    <m:sSub>
+                      <m:e>
+                        <m:r>
+                          <m:t>y</m:t>
+                        </m:r>
+                      </m:e>
+                      <m:sub>
+                        <m:r>
+                          <m:t>i</m:t>
+                        </m:r>
+                      </m:sub>
+                    </m:sSub>
+                  </m:oMath>
+                </a14:m>
+                <a:r>
+                  <a:rPr/>
+                  <a:t>) and predicted (</a:t>
+                </a:r>
+                <a14:m>
+                  <m:oMath xmlns:m="http://schemas.openxmlformats.org/officeDocument/2006/math">
+                    <m:sSub>
+                      <m:e>
+                        <m:acc>
+                          <m:accPr>
+                            <m:chr m:val="̂"/>
+                          </m:accPr>
+                          <m:e>
+                            <m:r>
+                              <m:t>y</m:t>
+                            </m:r>
+                          </m:e>
+                        </m:acc>
+                      </m:e>
+                      <m:sub>
+                        <m:r>
+                          <m:t>i</m:t>
+                        </m:r>
+                      </m:sub>
+                    </m:sSub>
+                  </m:oMath>
+                </a14:m>
+                <a:r>
+                  <a:rPr/>
+                  <a:t>) values</a:t>
+                </a:r>
+              </a:p>
+              <a:p>
+                <a:pPr lvl="1"/>
+                <a:r>
+                  <a:rPr/>
+                  <a:t>dfs= n-2</a:t>
                 </a:r>
               </a:p>
               <a:p>
@@ -9271,13 +10807,65 @@
                   <a:t>: total variation</a:t>
                 </a:r>
               </a:p>
+              <a:p>
+                <a:pPr lvl="1"/>
+                <a:r>
+                  <a:rPr/>
+                  <a:t>sum of squared deviations of each observation (</a:t>
+                </a:r>
+                <a14:m>
+                  <m:oMath xmlns:m="http://schemas.openxmlformats.org/officeDocument/2006/math">
+                    <m:sSub>
+                      <m:e>
+                        <m:r>
+                          <m:t>y</m:t>
+                        </m:r>
+                      </m:e>
+                      <m:sub>
+                        <m:r>
+                          <m:t>i</m:t>
+                        </m:r>
+                      </m:sub>
+                    </m:sSub>
+                  </m:oMath>
+                </a14:m>
+                <a:r>
+                  <a:rPr/>
+                  <a:t>) from mean (</a:t>
+                </a:r>
+                <a14:m>
+                  <m:oMath xmlns:m="http://schemas.openxmlformats.org/officeDocument/2006/math">
+                    <m:acc>
+                      <m:accPr>
+                        <m:chr m:val="‾"/>
+                      </m:accPr>
+                      <m:e>
+                        <m:r>
+                          <m:t>y</m:t>
+                        </m:r>
+                      </m:e>
+                    </m:acc>
+                  </m:oMath>
+                </a14:m>
+                <a:r>
+                  <a:rPr/>
+                  <a:t>)</a:t>
+                </a:r>
+              </a:p>
+              <a:p>
+                <a:pPr lvl="1"/>
+                <a:r>
+                  <a:rPr/>
+                  <a:t>dfs = n-1</a:t>
+                </a:r>
+              </a:p>
             </p:txBody>
           </p:sp>
         </mc:Choice>
       </mc:AlternateContent>
       <p:pic>
         <p:nvPicPr>
-          <p:cNvPr descr="images/clipboard-217151541.png" id="0" name="Picture 1"/>
+          <p:cNvPr descr="images/clipboard-77063277.png" id="0" name="Picture 1"/>
           <p:cNvPicPr>
             <a:picLocks noGrp="1" noChangeAspect="1"/>
           </p:cNvPicPr>
@@ -9291,8 +10879,8 @@
         </p:blipFill>
         <p:spPr bwMode="auto">
           <a:xfrm>
-            <a:off x="6121400" y="1892300"/>
-            <a:ext cx="2781300" cy="1993900"/>
+            <a:off x="6121400" y="2438400"/>
+            <a:ext cx="2781300" cy="914400"/>
           </a:xfrm>
           <a:prstGeom prst="rect">
             <a:avLst/>
@@ -9386,6 +10974,276 @@
                 </a:pPr>
                 <a:r>
                   <a:rPr/>
+                  <a:t>Total variation in Y is “partitioned” into 3 components:</a:t>
+                </a:r>
+              </a:p>
+              <a:p>
+                <a:pPr lvl="0"/>
+                <a14:m>
+                  <m:oMath xmlns:m="http://schemas.openxmlformats.org/officeDocument/2006/math">
+                    <m:r>
+                      <m:t>S</m:t>
+                    </m:r>
+                    <m:sSub>
+                      <m:e>
+                        <m:r>
+                          <m:t>S</m:t>
+                        </m:r>
+                      </m:e>
+                      <m:sub>
+                        <m:r>
+                          <m:t>r</m:t>
+                        </m:r>
+                        <m:r>
+                          <m:t>e</m:t>
+                        </m:r>
+                        <m:r>
+                          <m:t>g</m:t>
+                        </m:r>
+                        <m:r>
+                          <m:t>r</m:t>
+                        </m:r>
+                        <m:r>
+                          <m:t>e</m:t>
+                        </m:r>
+                        <m:r>
+                          <m:t>s</m:t>
+                        </m:r>
+                        <m:r>
+                          <m:t>s</m:t>
+                        </m:r>
+                        <m:r>
+                          <m:t>i</m:t>
+                        </m:r>
+                        <m:r>
+                          <m:t>o</m:t>
+                        </m:r>
+                        <m:r>
+                          <m:t>n</m:t>
+                        </m:r>
+                      </m:sub>
+                    </m:sSub>
+                  </m:oMath>
+                </a14:m>
+                <a:r>
+                  <a:rPr/>
+                  <a:t>: variation explained by regression</a:t>
+                </a:r>
+              </a:p>
+              <a:p>
+                <a:pPr lvl="1"/>
+                <a:r>
+                  <a:rPr/>
+                  <a:t>GREATER IN C than D</a:t>
+                </a:r>
+              </a:p>
+              <a:p>
+                <a:pPr lvl="0"/>
+                <a14:m>
+                  <m:oMath xmlns:m="http://schemas.openxmlformats.org/officeDocument/2006/math">
+                    <m:r>
+                      <m:t>S</m:t>
+                    </m:r>
+                    <m:sSub>
+                      <m:e>
+                        <m:r>
+                          <m:t>S</m:t>
+                        </m:r>
+                      </m:e>
+                      <m:sub>
+                        <m:r>
+                          <m:t>r</m:t>
+                        </m:r>
+                        <m:r>
+                          <m:t>e</m:t>
+                        </m:r>
+                        <m:r>
+                          <m:t>s</m:t>
+                        </m:r>
+                        <m:r>
+                          <m:t>i</m:t>
+                        </m:r>
+                        <m:r>
+                          <m:t>d</m:t>
+                        </m:r>
+                        <m:r>
+                          <m:t>u</m:t>
+                        </m:r>
+                        <m:r>
+                          <m:t>a</m:t>
+                        </m:r>
+                        <m:r>
+                          <m:t>l</m:t>
+                        </m:r>
+                      </m:sub>
+                    </m:sSub>
+                  </m:oMath>
+                </a14:m>
+                <a:r>
+                  <a:rPr/>
+                  <a:t>: variation not explained by regression</a:t>
+                </a:r>
+              </a:p>
+              <a:p>
+                <a:pPr lvl="1"/>
+                <a:r>
+                  <a:rPr/>
+                  <a:t>GREATER IN B THAN A</a:t>
+                </a:r>
+              </a:p>
+              <a:p>
+                <a:pPr lvl="0"/>
+                <a14:m>
+                  <m:oMath xmlns:m="http://schemas.openxmlformats.org/officeDocument/2006/math">
+                    <m:r>
+                      <m:t>S</m:t>
+                    </m:r>
+                    <m:sSub>
+                      <m:e>
+                        <m:r>
+                          <m:t>S</m:t>
+                        </m:r>
+                      </m:e>
+                      <m:sub>
+                        <m:r>
+                          <m:t>t</m:t>
+                        </m:r>
+                        <m:r>
+                          <m:t>o</m:t>
+                        </m:r>
+                        <m:r>
+                          <m:t>t</m:t>
+                        </m:r>
+                        <m:r>
+                          <m:t>a</m:t>
+                        </m:r>
+                        <m:r>
+                          <m:t>l</m:t>
+                        </m:r>
+                      </m:sub>
+                    </m:sSub>
+                  </m:oMath>
+                </a14:m>
+                <a:r>
+                  <a:rPr/>
+                  <a:t>: total variation</a:t>
+                </a:r>
+              </a:p>
+            </p:txBody>
+          </p:sp>
+        </mc:Choice>
+      </mc:AlternateContent>
+      <p:pic>
+        <p:nvPicPr>
+          <p:cNvPr descr="images/clipboard-217151541.png" id="0" name="Picture 1"/>
+          <p:cNvPicPr>
+            <a:picLocks noGrp="1" noChangeAspect="1"/>
+          </p:cNvPicPr>
+          <p:nvPr/>
+        </p:nvPicPr>
+        <p:blipFill>
+          <a:blip r:embed="rId2"/>
+          <a:stretch>
+            <a:fillRect/>
+          </a:stretch>
+        </p:blipFill>
+        <p:spPr bwMode="auto">
+          <a:xfrm>
+            <a:off x="6121400" y="1892300"/>
+            <a:ext cx="2781300" cy="1993900"/>
+          </a:xfrm>
+          <a:prstGeom prst="rect">
+            <a:avLst/>
+          </a:prstGeom>
+          <a:noFill/>
+          <a:ln w="9525">
+            <a:noFill/>
+            <a:headEnd/>
+            <a:tailEnd/>
+          </a:ln>
+        </p:spPr>
+      </p:pic>
+    </p:spTree>
+  </p:cSld>
+</p:sld>
+</file>
+
+<file path=ppt/slides/slide33.xml><?xml version="1.0" encoding="utf-8"?>
+<p:sld xmlns:a="http://schemas.openxmlformats.org/drawingml/2006/main" xmlns:r="http://schemas.openxmlformats.org/officeDocument/2006/relationships" xmlns:p="http://schemas.openxmlformats.org/presentationml/2006/main">
+  <p:cSld>
+    <p:spTree>
+      <p:nvGrpSpPr>
+        <p:cNvPr id="1" name=""/>
+        <p:cNvGrpSpPr/>
+        <p:nvPr/>
+      </p:nvGrpSpPr>
+      <p:grpSpPr>
+        <a:xfrm>
+          <a:off x="0" y="0"/>
+          <a:ext cx="0" cy="0"/>
+          <a:chOff x="0" y="0"/>
+          <a:chExt cx="0" cy="0"/>
+        </a:xfrm>
+      </p:grpSpPr>
+      <p:sp>
+        <p:nvSpPr>
+          <p:cNvPr id="2" name="Title 1"/>
+          <p:cNvSpPr>
+            <a:spLocks noGrp="1"/>
+          </p:cNvSpPr>
+          <p:nvPr>
+            <p:ph type="title"/>
+          </p:nvPr>
+        </p:nvSpPr>
+        <p:spPr>
+          <a:xfrm>
+            <a:off x="0" y="0"/>
+            <a:ext cx="9144000" cy="602780"/>
+          </a:xfrm>
+          <a:solidFill>
+            <a:srgbClr val="70121D"/>
+          </a:solidFill>
+        </p:spPr>
+        <p:txBody>
+          <a:bodyPr/>
+          <a:lstStyle/>
+          <a:p>
+            <a:pPr lvl="0" indent="0" marL="0">
+              <a:buNone/>
+            </a:pPr>
+            <a:r>
+              <a:rPr b="1"/>
+              <a:t>Lecture 9:</a:t>
+            </a:r>
+            <a:r>
+              <a:rPr/>
+              <a:t> Linear Regression - estimates of variance</a:t>
+            </a:r>
+          </a:p>
+        </p:txBody>
+      </p:sp>
+      <mc:AlternateContent xmlns:mc="http://schemas.openxmlformats.org/markup-compatibility/2006">
+        <mc:Choice xmlns:a14="http://schemas.microsoft.com/office/drawing/2010/main" Requires="a14">
+          <p:sp>
+            <p:nvSpPr>
+              <p:cNvPr id="3" name="Content Placeholder 2"/>
+              <p:cNvSpPr>
+                <a:spLocks noGrp="1"/>
+              </p:cNvSpPr>
+              <p:nvPr>
+                <p:ph idx="1" sz="half"/>
+              </p:nvPr>
+            </p:nvSpPr>
+            <p:spPr/>
+            <p:txBody>
+              <a:bodyPr/>
+              <a:lstStyle/>
+              <a:p>
+                <a:pPr lvl="0" indent="0" marL="0">
+                  <a:buNone/>
+                </a:pPr>
+                <a:r>
+                  <a:rPr/>
                   <a:t>Sums of Squares and degress of freedome are:</a:t>
                 </a:r>
               </a:p>
@@ -9694,7 +11552,7 @@
 </p:sld>
 </file>
 
-<file path=ppt/slides/slide33.xml><?xml version="1.0" encoding="utf-8"?>
+<file path=ppt/slides/slide34.xml><?xml version="1.0" encoding="utf-8"?>
 <p:sld xmlns:a="http://schemas.openxmlformats.org/drawingml/2006/main" xmlns:r="http://schemas.openxmlformats.org/officeDocument/2006/relationships" xmlns:p="http://schemas.openxmlformats.org/presentationml/2006/main">
   <p:cSld>
     <p:spTree>
@@ -10901,7 +12759,7 @@
                 <a:pPr lvl="0"/>
                 <a:r>
                   <a:rPr/>
-                  <a:t>This is r (not rho as Spearman nonparticipant below), as indicated by “cor” in your output</a:t>
+                  <a:t>This is r (not rho as Spearman nonparametric below), as indicated by “cor” in your output</a:t>
                 </a:r>
               </a:p>
               <a:p>
@@ -10927,7 +12785,7 @@
                 </a:pPr>
                 <a:r>
                   <a:rPr b="1"/>
-                  <a:t>Note </a:t>
+                  <a:t>Note that it is tested by: </a:t>
                 </a:r>
                 <a14:m>
                   <m:oMath xmlns:m="http://schemas.openxmlformats.org/officeDocument/2006/math">
@@ -11396,7 +13254,7 @@
             </a:pPr>
             <a:r>
               <a:rPr/>
-              <a:t>Let’s check these assumptions using the lion data from Example 17.1 Lion Noses:</a:t>
+              <a:t>Let’s check these assumptions booby data:</a:t>
             </a:r>
           </a:p>
         </p:txBody>
@@ -11425,8 +13283,8 @@
               </a:rPr>
               <a:t>
     Shapiro-Wilk normality test
-data:  lion_data$proportion_black
-W = 0.88895, p-value = 0.003279</a:t>
+data:  booby_data$visits_as_nestling
+W = 0.95783, p-value = 0.3965</a:t>
             </a:r>
           </a:p>
           <a:p>
@@ -11439,8 +13297,8 @@
               </a:rPr>
               <a:t>
     Shapiro-Wilk normality test
-data:  lion_data$age_years
-W = 0.87615, p-value = 0.001615</a:t>
+data:  booby_data$future_aggression
+W = 0.91575, p-value = 0.04709</a:t>
             </a:r>
           </a:p>
         </p:txBody>

--- a/docs/ecostats_lectures/lecture_09/09_01_lecture_powerpoint.pptx
+++ b/docs/ecostats_lectures/lecture_09/09_01_lecture_powerpoint.pptx
@@ -3654,1761 +3654,6 @@
               <a:t>Examine the data for outliers or influential points</a:t>
             </a:r>
           </a:p>
-          <a:p>
-            <a:pPr lvl="0" indent="0">
-              <a:buNone/>
-            </a:pPr>
-            <a:r>
-              <a:rPr>
-                <a:solidFill>
-                  <a:srgbClr val="5E5E5E"/>
-                </a:solidFill>
-                <a:latin typeface="Courier"/>
-              </a:rPr>
-              <a:t>#| echo: false</a:t>
-            </a:r>
-            <a:br/>
-            <a:r>
-              <a:rPr>
-                <a:solidFill>
-                  <a:srgbClr val="5E5E5E"/>
-                </a:solidFill>
-                <a:latin typeface="Courier"/>
-              </a:rPr>
-              <a:t>#| fig-height: 5</a:t>
-            </a:r>
-            <a:br/>
-            <a:r>
-              <a:rPr>
-                <a:solidFill>
-                  <a:srgbClr val="5E5E5E"/>
-                </a:solidFill>
-                <a:latin typeface="Courier"/>
-              </a:rPr>
-              <a:t>#| fig-width: 5</a:t>
-            </a:r>
-            <a:br/>
-            <a:r>
-              <a:rPr>
-                <a:solidFill>
-                  <a:srgbClr val="5E5E5E"/>
-                </a:solidFill>
-                <a:latin typeface="Courier"/>
-              </a:rPr>
-              <a:t>#| message: false</a:t>
-            </a:r>
-            <a:br/>
-            <a:r>
-              <a:rPr>
-                <a:solidFill>
-                  <a:srgbClr val="5E5E5E"/>
-                </a:solidFill>
-                <a:latin typeface="Courier"/>
-              </a:rPr>
-              <a:t>#| warning: false</a:t>
-            </a:r>
-            <a:br/>
-            <a:br/>
-            <a:br/>
-            <a:r>
-              <a:rPr>
-                <a:solidFill>
-                  <a:srgbClr val="003B4F"/>
-                </a:solidFill>
-                <a:latin typeface="Courier"/>
-              </a:rPr>
-              <a:t>p1_lion &lt;- </a:t>
-            </a:r>
-            <a:r>
-              <a:rPr>
-                <a:solidFill>
-                  <a:srgbClr val="4758AB"/>
-                </a:solidFill>
-                <a:latin typeface="Courier"/>
-              </a:rPr>
-              <a:t>ggplot</a:t>
-            </a:r>
-            <a:r>
-              <a:rPr>
-                <a:solidFill>
-                  <a:srgbClr val="003B4F"/>
-                </a:solidFill>
-                <a:latin typeface="Courier"/>
-              </a:rPr>
-              <a:t>(lion_data, </a:t>
-            </a:r>
-            <a:r>
-              <a:rPr>
-                <a:solidFill>
-                  <a:srgbClr val="4758AB"/>
-                </a:solidFill>
-                <a:latin typeface="Courier"/>
-              </a:rPr>
-              <a:t>aes</a:t>
-            </a:r>
-            <a:r>
-              <a:rPr>
-                <a:solidFill>
-                  <a:srgbClr val="003B4F"/>
-                </a:solidFill>
-                <a:latin typeface="Courier"/>
-              </a:rPr>
-              <a:t>(</a:t>
-            </a:r>
-            <a:r>
-              <a:rPr>
-                <a:solidFill>
-                  <a:srgbClr val="657422"/>
-                </a:solidFill>
-                <a:latin typeface="Courier"/>
-              </a:rPr>
-              <a:t>x =</a:t>
-            </a:r>
-            <a:r>
-              <a:rPr>
-                <a:solidFill>
-                  <a:srgbClr val="003B4F"/>
-                </a:solidFill>
-                <a:latin typeface="Courier"/>
-              </a:rPr>
-              <a:t> proportion_black)) </a:t>
-            </a:r>
-            <a:r>
-              <a:rPr>
-                <a:solidFill>
-                  <a:srgbClr val="5E5E5E"/>
-                </a:solidFill>
-                <a:latin typeface="Courier"/>
-              </a:rPr>
-              <a:t>+</a:t>
-            </a:r>
-            <a:br/>
-            <a:r>
-              <a:rPr>
-                <a:solidFill>
-                  <a:srgbClr val="003B4F"/>
-                </a:solidFill>
-                <a:latin typeface="Courier"/>
-              </a:rPr>
-              <a:t>  </a:t>
-            </a:r>
-            <a:r>
-              <a:rPr>
-                <a:solidFill>
-                  <a:srgbClr val="4758AB"/>
-                </a:solidFill>
-                <a:latin typeface="Courier"/>
-              </a:rPr>
-              <a:t>geom_histogram</a:t>
-            </a:r>
-            <a:r>
-              <a:rPr>
-                <a:solidFill>
-                  <a:srgbClr val="003B4F"/>
-                </a:solidFill>
-                <a:latin typeface="Courier"/>
-              </a:rPr>
-              <a:t>(</a:t>
-            </a:r>
-            <a:r>
-              <a:rPr>
-                <a:solidFill>
-                  <a:srgbClr val="657422"/>
-                </a:solidFill>
-                <a:latin typeface="Courier"/>
-              </a:rPr>
-              <a:t>bins =</a:t>
-            </a:r>
-            <a:r>
-              <a:rPr>
-                <a:solidFill>
-                  <a:srgbClr val="003B4F"/>
-                </a:solidFill>
-                <a:latin typeface="Courier"/>
-              </a:rPr>
-              <a:t> </a:t>
-            </a:r>
-            <a:r>
-              <a:rPr>
-                <a:solidFill>
-                  <a:srgbClr val="AD0000"/>
-                </a:solidFill>
-                <a:latin typeface="Courier"/>
-              </a:rPr>
-              <a:t>10</a:t>
-            </a:r>
-            <a:r>
-              <a:rPr>
-                <a:solidFill>
-                  <a:srgbClr val="003B4F"/>
-                </a:solidFill>
-                <a:latin typeface="Courier"/>
-              </a:rPr>
-              <a:t>, </a:t>
-            </a:r>
-            <a:r>
-              <a:rPr>
-                <a:solidFill>
-                  <a:srgbClr val="657422"/>
-                </a:solidFill>
-                <a:latin typeface="Courier"/>
-              </a:rPr>
-              <a:t>fill =</a:t>
-            </a:r>
-            <a:r>
-              <a:rPr>
-                <a:solidFill>
-                  <a:srgbClr val="003B4F"/>
-                </a:solidFill>
-                <a:latin typeface="Courier"/>
-              </a:rPr>
-              <a:t> </a:t>
-            </a:r>
-            <a:r>
-              <a:rPr>
-                <a:solidFill>
-                  <a:srgbClr val="20794D"/>
-                </a:solidFill>
-                <a:latin typeface="Courier"/>
-              </a:rPr>
-              <a:t>"lightblue"</a:t>
-            </a:r>
-            <a:r>
-              <a:rPr>
-                <a:solidFill>
-                  <a:srgbClr val="003B4F"/>
-                </a:solidFill>
-                <a:latin typeface="Courier"/>
-              </a:rPr>
-              <a:t>, </a:t>
-            </a:r>
-            <a:r>
-              <a:rPr>
-                <a:solidFill>
-                  <a:srgbClr val="657422"/>
-                </a:solidFill>
-                <a:latin typeface="Courier"/>
-              </a:rPr>
-              <a:t>color =</a:t>
-            </a:r>
-            <a:r>
-              <a:rPr>
-                <a:solidFill>
-                  <a:srgbClr val="003B4F"/>
-                </a:solidFill>
-                <a:latin typeface="Courier"/>
-              </a:rPr>
-              <a:t> </a:t>
-            </a:r>
-            <a:r>
-              <a:rPr>
-                <a:solidFill>
-                  <a:srgbClr val="20794D"/>
-                </a:solidFill>
-                <a:latin typeface="Courier"/>
-              </a:rPr>
-              <a:t>"black"</a:t>
-            </a:r>
-            <a:r>
-              <a:rPr>
-                <a:solidFill>
-                  <a:srgbClr val="003B4F"/>
-                </a:solidFill>
-                <a:latin typeface="Courier"/>
-              </a:rPr>
-              <a:t>) </a:t>
-            </a:r>
-            <a:r>
-              <a:rPr>
-                <a:solidFill>
-                  <a:srgbClr val="5E5E5E"/>
-                </a:solidFill>
-                <a:latin typeface="Courier"/>
-              </a:rPr>
-              <a:t>+</a:t>
-            </a:r>
-            <a:br/>
-            <a:r>
-              <a:rPr>
-                <a:solidFill>
-                  <a:srgbClr val="003B4F"/>
-                </a:solidFill>
-                <a:latin typeface="Courier"/>
-              </a:rPr>
-              <a:t>  </a:t>
-            </a:r>
-            <a:r>
-              <a:rPr>
-                <a:solidFill>
-                  <a:srgbClr val="4758AB"/>
-                </a:solidFill>
-                <a:latin typeface="Courier"/>
-              </a:rPr>
-              <a:t>labs</a:t>
-            </a:r>
-            <a:r>
-              <a:rPr>
-                <a:solidFill>
-                  <a:srgbClr val="003B4F"/>
-                </a:solidFill>
-                <a:latin typeface="Courier"/>
-              </a:rPr>
-              <a:t>(</a:t>
-            </a:r>
-            <a:r>
-              <a:rPr>
-                <a:solidFill>
-                  <a:srgbClr val="657422"/>
-                </a:solidFill>
-                <a:latin typeface="Courier"/>
-              </a:rPr>
-              <a:t>title =</a:t>
-            </a:r>
-            <a:r>
-              <a:rPr>
-                <a:solidFill>
-                  <a:srgbClr val="003B4F"/>
-                </a:solidFill>
-                <a:latin typeface="Courier"/>
-              </a:rPr>
-              <a:t> </a:t>
-            </a:r>
-            <a:r>
-              <a:rPr>
-                <a:solidFill>
-                  <a:srgbClr val="20794D"/>
-                </a:solidFill>
-                <a:latin typeface="Courier"/>
-              </a:rPr>
-              <a:t>"Prop black"</a:t>
-            </a:r>
-            <a:r>
-              <a:rPr>
-                <a:solidFill>
-                  <a:srgbClr val="003B4F"/>
-                </a:solidFill>
-                <a:latin typeface="Courier"/>
-              </a:rPr>
-              <a:t>,</a:t>
-            </a:r>
-            <a:br/>
-            <a:r>
-              <a:rPr>
-                <a:solidFill>
-                  <a:srgbClr val="003B4F"/>
-                </a:solidFill>
-                <a:latin typeface="Courier"/>
-              </a:rPr>
-              <a:t>       </a:t>
-            </a:r>
-            <a:r>
-              <a:rPr>
-                <a:solidFill>
-                  <a:srgbClr val="657422"/>
-                </a:solidFill>
-                <a:latin typeface="Courier"/>
-              </a:rPr>
-              <a:t>x =</a:t>
-            </a:r>
-            <a:r>
-              <a:rPr>
-                <a:solidFill>
-                  <a:srgbClr val="003B4F"/>
-                </a:solidFill>
-                <a:latin typeface="Courier"/>
-              </a:rPr>
-              <a:t> </a:t>
-            </a:r>
-            <a:r>
-              <a:rPr>
-                <a:solidFill>
-                  <a:srgbClr val="20794D"/>
-                </a:solidFill>
-                <a:latin typeface="Courier"/>
-              </a:rPr>
-              <a:t>"Visits"</a:t>
-            </a:r>
-            <a:r>
-              <a:rPr>
-                <a:solidFill>
-                  <a:srgbClr val="003B4F"/>
-                </a:solidFill>
-                <a:latin typeface="Courier"/>
-              </a:rPr>
-              <a:t>,</a:t>
-            </a:r>
-            <a:br/>
-            <a:r>
-              <a:rPr>
-                <a:solidFill>
-                  <a:srgbClr val="003B4F"/>
-                </a:solidFill>
-                <a:latin typeface="Courier"/>
-              </a:rPr>
-              <a:t>       </a:t>
-            </a:r>
-            <a:r>
-              <a:rPr>
-                <a:solidFill>
-                  <a:srgbClr val="657422"/>
-                </a:solidFill>
-                <a:latin typeface="Courier"/>
-              </a:rPr>
-              <a:t>y =</a:t>
-            </a:r>
-            <a:r>
-              <a:rPr>
-                <a:solidFill>
-                  <a:srgbClr val="003B4F"/>
-                </a:solidFill>
-                <a:latin typeface="Courier"/>
-              </a:rPr>
-              <a:t> </a:t>
-            </a:r>
-            <a:r>
-              <a:rPr>
-                <a:solidFill>
-                  <a:srgbClr val="20794D"/>
-                </a:solidFill>
-                <a:latin typeface="Courier"/>
-              </a:rPr>
-              <a:t>"Frequency"</a:t>
-            </a:r>
-            <a:r>
-              <a:rPr>
-                <a:solidFill>
-                  <a:srgbClr val="003B4F"/>
-                </a:solidFill>
-                <a:latin typeface="Courier"/>
-              </a:rPr>
-              <a:t>) </a:t>
-            </a:r>
-            <a:r>
-              <a:rPr>
-                <a:solidFill>
-                  <a:srgbClr val="5E5E5E"/>
-                </a:solidFill>
-                <a:latin typeface="Courier"/>
-              </a:rPr>
-              <a:t>+</a:t>
-            </a:r>
-            <a:br/>
-            <a:r>
-              <a:rPr>
-                <a:solidFill>
-                  <a:srgbClr val="003B4F"/>
-                </a:solidFill>
-                <a:latin typeface="Courier"/>
-              </a:rPr>
-              <a:t>  </a:t>
-            </a:r>
-            <a:r>
-              <a:rPr>
-                <a:solidFill>
-                  <a:srgbClr val="4758AB"/>
-                </a:solidFill>
-                <a:latin typeface="Courier"/>
-              </a:rPr>
-              <a:t>theme_minimal</a:t>
-            </a:r>
-            <a:r>
-              <a:rPr>
-                <a:solidFill>
-                  <a:srgbClr val="003B4F"/>
-                </a:solidFill>
-                <a:latin typeface="Courier"/>
-              </a:rPr>
-              <a:t>()</a:t>
-            </a:r>
-            <a:br/>
-            <a:br/>
-            <a:r>
-              <a:rPr>
-                <a:solidFill>
-                  <a:srgbClr val="003B4F"/>
-                </a:solidFill>
-                <a:latin typeface="Courier"/>
-              </a:rPr>
-              <a:t>p2_lion &lt;- </a:t>
-            </a:r>
-            <a:r>
-              <a:rPr>
-                <a:solidFill>
-                  <a:srgbClr val="4758AB"/>
-                </a:solidFill>
-                <a:latin typeface="Courier"/>
-              </a:rPr>
-              <a:t>ggplot</a:t>
-            </a:r>
-            <a:r>
-              <a:rPr>
-                <a:solidFill>
-                  <a:srgbClr val="003B4F"/>
-                </a:solidFill>
-                <a:latin typeface="Courier"/>
-              </a:rPr>
-              <a:t>(lion_data, </a:t>
-            </a:r>
-            <a:r>
-              <a:rPr>
-                <a:solidFill>
-                  <a:srgbClr val="4758AB"/>
-                </a:solidFill>
-                <a:latin typeface="Courier"/>
-              </a:rPr>
-              <a:t>aes</a:t>
-            </a:r>
-            <a:r>
-              <a:rPr>
-                <a:solidFill>
-                  <a:srgbClr val="003B4F"/>
-                </a:solidFill>
-                <a:latin typeface="Courier"/>
-              </a:rPr>
-              <a:t>(</a:t>
-            </a:r>
-            <a:r>
-              <a:rPr>
-                <a:solidFill>
-                  <a:srgbClr val="657422"/>
-                </a:solidFill>
-                <a:latin typeface="Courier"/>
-              </a:rPr>
-              <a:t>x =</a:t>
-            </a:r>
-            <a:r>
-              <a:rPr>
-                <a:solidFill>
-                  <a:srgbClr val="003B4F"/>
-                </a:solidFill>
-                <a:latin typeface="Courier"/>
-              </a:rPr>
-              <a:t> age_years)) </a:t>
-            </a:r>
-            <a:r>
-              <a:rPr>
-                <a:solidFill>
-                  <a:srgbClr val="5E5E5E"/>
-                </a:solidFill>
-                <a:latin typeface="Courier"/>
-              </a:rPr>
-              <a:t>+</a:t>
-            </a:r>
-            <a:br/>
-            <a:r>
-              <a:rPr>
-                <a:solidFill>
-                  <a:srgbClr val="003B4F"/>
-                </a:solidFill>
-                <a:latin typeface="Courier"/>
-              </a:rPr>
-              <a:t>  </a:t>
-            </a:r>
-            <a:r>
-              <a:rPr>
-                <a:solidFill>
-                  <a:srgbClr val="4758AB"/>
-                </a:solidFill>
-                <a:latin typeface="Courier"/>
-              </a:rPr>
-              <a:t>geom_histogram</a:t>
-            </a:r>
-            <a:r>
-              <a:rPr>
-                <a:solidFill>
-                  <a:srgbClr val="003B4F"/>
-                </a:solidFill>
-                <a:latin typeface="Courier"/>
-              </a:rPr>
-              <a:t>(</a:t>
-            </a:r>
-            <a:r>
-              <a:rPr>
-                <a:solidFill>
-                  <a:srgbClr val="657422"/>
-                </a:solidFill>
-                <a:latin typeface="Courier"/>
-              </a:rPr>
-              <a:t>bins =</a:t>
-            </a:r>
-            <a:r>
-              <a:rPr>
-                <a:solidFill>
-                  <a:srgbClr val="003B4F"/>
-                </a:solidFill>
-                <a:latin typeface="Courier"/>
-              </a:rPr>
-              <a:t> </a:t>
-            </a:r>
-            <a:r>
-              <a:rPr>
-                <a:solidFill>
-                  <a:srgbClr val="AD0000"/>
-                </a:solidFill>
-                <a:latin typeface="Courier"/>
-              </a:rPr>
-              <a:t>10</a:t>
-            </a:r>
-            <a:r>
-              <a:rPr>
-                <a:solidFill>
-                  <a:srgbClr val="003B4F"/>
-                </a:solidFill>
-                <a:latin typeface="Courier"/>
-              </a:rPr>
-              <a:t>, </a:t>
-            </a:r>
-            <a:r>
-              <a:rPr>
-                <a:solidFill>
-                  <a:srgbClr val="657422"/>
-                </a:solidFill>
-                <a:latin typeface="Courier"/>
-              </a:rPr>
-              <a:t>fill =</a:t>
-            </a:r>
-            <a:r>
-              <a:rPr>
-                <a:solidFill>
-                  <a:srgbClr val="003B4F"/>
-                </a:solidFill>
-                <a:latin typeface="Courier"/>
-              </a:rPr>
-              <a:t> </a:t>
-            </a:r>
-            <a:r>
-              <a:rPr>
-                <a:solidFill>
-                  <a:srgbClr val="20794D"/>
-                </a:solidFill>
-                <a:latin typeface="Courier"/>
-              </a:rPr>
-              <a:t>"lightgreen"</a:t>
-            </a:r>
-            <a:r>
-              <a:rPr>
-                <a:solidFill>
-                  <a:srgbClr val="003B4F"/>
-                </a:solidFill>
-                <a:latin typeface="Courier"/>
-              </a:rPr>
-              <a:t>, </a:t>
-            </a:r>
-            <a:r>
-              <a:rPr>
-                <a:solidFill>
-                  <a:srgbClr val="657422"/>
-                </a:solidFill>
-                <a:latin typeface="Courier"/>
-              </a:rPr>
-              <a:t>color =</a:t>
-            </a:r>
-            <a:r>
-              <a:rPr>
-                <a:solidFill>
-                  <a:srgbClr val="003B4F"/>
-                </a:solidFill>
-                <a:latin typeface="Courier"/>
-              </a:rPr>
-              <a:t> </a:t>
-            </a:r>
-            <a:r>
-              <a:rPr>
-                <a:solidFill>
-                  <a:srgbClr val="20794D"/>
-                </a:solidFill>
-                <a:latin typeface="Courier"/>
-              </a:rPr>
-              <a:t>"black"</a:t>
-            </a:r>
-            <a:r>
-              <a:rPr>
-                <a:solidFill>
-                  <a:srgbClr val="003B4F"/>
-                </a:solidFill>
-                <a:latin typeface="Courier"/>
-              </a:rPr>
-              <a:t>) </a:t>
-            </a:r>
-            <a:r>
-              <a:rPr>
-                <a:solidFill>
-                  <a:srgbClr val="5E5E5E"/>
-                </a:solidFill>
-                <a:latin typeface="Courier"/>
-              </a:rPr>
-              <a:t>+</a:t>
-            </a:r>
-            <a:br/>
-            <a:r>
-              <a:rPr>
-                <a:solidFill>
-                  <a:srgbClr val="003B4F"/>
-                </a:solidFill>
-                <a:latin typeface="Courier"/>
-              </a:rPr>
-              <a:t>  </a:t>
-            </a:r>
-            <a:r>
-              <a:rPr>
-                <a:solidFill>
-                  <a:srgbClr val="4758AB"/>
-                </a:solidFill>
-                <a:latin typeface="Courier"/>
-              </a:rPr>
-              <a:t>labs</a:t>
-            </a:r>
-            <a:r>
-              <a:rPr>
-                <a:solidFill>
-                  <a:srgbClr val="003B4F"/>
-                </a:solidFill>
-                <a:latin typeface="Courier"/>
-              </a:rPr>
-              <a:t>(</a:t>
-            </a:r>
-            <a:r>
-              <a:rPr>
-                <a:solidFill>
-                  <a:srgbClr val="657422"/>
-                </a:solidFill>
-                <a:latin typeface="Courier"/>
-              </a:rPr>
-              <a:t>title =</a:t>
-            </a:r>
-            <a:r>
-              <a:rPr>
-                <a:solidFill>
-                  <a:srgbClr val="003B4F"/>
-                </a:solidFill>
-                <a:latin typeface="Courier"/>
-              </a:rPr>
-              <a:t> </a:t>
-            </a:r>
-            <a:r>
-              <a:rPr>
-                <a:solidFill>
-                  <a:srgbClr val="20794D"/>
-                </a:solidFill>
-                <a:latin typeface="Courier"/>
-              </a:rPr>
-              <a:t>"Age"</a:t>
-            </a:r>
-            <a:r>
-              <a:rPr>
-                <a:solidFill>
-                  <a:srgbClr val="003B4F"/>
-                </a:solidFill>
-                <a:latin typeface="Courier"/>
-              </a:rPr>
-              <a:t>,</a:t>
-            </a:r>
-            <a:br/>
-            <a:r>
-              <a:rPr>
-                <a:solidFill>
-                  <a:srgbClr val="003B4F"/>
-                </a:solidFill>
-                <a:latin typeface="Courier"/>
-              </a:rPr>
-              <a:t>       </a:t>
-            </a:r>
-            <a:r>
-              <a:rPr>
-                <a:solidFill>
-                  <a:srgbClr val="657422"/>
-                </a:solidFill>
-                <a:latin typeface="Courier"/>
-              </a:rPr>
-              <a:t>x =</a:t>
-            </a:r>
-            <a:r>
-              <a:rPr>
-                <a:solidFill>
-                  <a:srgbClr val="003B4F"/>
-                </a:solidFill>
-                <a:latin typeface="Courier"/>
-              </a:rPr>
-              <a:t> </a:t>
-            </a:r>
-            <a:r>
-              <a:rPr>
-                <a:solidFill>
-                  <a:srgbClr val="20794D"/>
-                </a:solidFill>
-                <a:latin typeface="Courier"/>
-              </a:rPr>
-              <a:t>"Age"</a:t>
-            </a:r>
-            <a:r>
-              <a:rPr>
-                <a:solidFill>
-                  <a:srgbClr val="003B4F"/>
-                </a:solidFill>
-                <a:latin typeface="Courier"/>
-              </a:rPr>
-              <a:t>,</a:t>
-            </a:r>
-            <a:br/>
-            <a:r>
-              <a:rPr>
-                <a:solidFill>
-                  <a:srgbClr val="003B4F"/>
-                </a:solidFill>
-                <a:latin typeface="Courier"/>
-              </a:rPr>
-              <a:t>       </a:t>
-            </a:r>
-            <a:r>
-              <a:rPr>
-                <a:solidFill>
-                  <a:srgbClr val="657422"/>
-                </a:solidFill>
-                <a:latin typeface="Courier"/>
-              </a:rPr>
-              <a:t>y =</a:t>
-            </a:r>
-            <a:r>
-              <a:rPr>
-                <a:solidFill>
-                  <a:srgbClr val="003B4F"/>
-                </a:solidFill>
-                <a:latin typeface="Courier"/>
-              </a:rPr>
-              <a:t> </a:t>
-            </a:r>
-            <a:r>
-              <a:rPr>
-                <a:solidFill>
-                  <a:srgbClr val="20794D"/>
-                </a:solidFill>
-                <a:latin typeface="Courier"/>
-              </a:rPr>
-              <a:t>"Frequency"</a:t>
-            </a:r>
-            <a:r>
-              <a:rPr>
-                <a:solidFill>
-                  <a:srgbClr val="003B4F"/>
-                </a:solidFill>
-                <a:latin typeface="Courier"/>
-              </a:rPr>
-              <a:t>) </a:t>
-            </a:r>
-            <a:r>
-              <a:rPr>
-                <a:solidFill>
-                  <a:srgbClr val="5E5E5E"/>
-                </a:solidFill>
-                <a:latin typeface="Courier"/>
-              </a:rPr>
-              <a:t>+</a:t>
-            </a:r>
-            <a:br/>
-            <a:r>
-              <a:rPr>
-                <a:solidFill>
-                  <a:srgbClr val="003B4F"/>
-                </a:solidFill>
-                <a:latin typeface="Courier"/>
-              </a:rPr>
-              <a:t>  </a:t>
-            </a:r>
-            <a:r>
-              <a:rPr>
-                <a:solidFill>
-                  <a:srgbClr val="4758AB"/>
-                </a:solidFill>
-                <a:latin typeface="Courier"/>
-              </a:rPr>
-              <a:t>theme_minimal</a:t>
-            </a:r>
-            <a:r>
-              <a:rPr>
-                <a:solidFill>
-                  <a:srgbClr val="003B4F"/>
-                </a:solidFill>
-                <a:latin typeface="Courier"/>
-              </a:rPr>
-              <a:t>()</a:t>
-            </a:r>
-            <a:br/>
-            <a:br/>
-            <a:r>
-              <a:rPr>
-                <a:solidFill>
-                  <a:srgbClr val="003B4F"/>
-                </a:solidFill>
-                <a:latin typeface="Courier"/>
-              </a:rPr>
-              <a:t>p3_lion &lt;- </a:t>
-            </a:r>
-            <a:r>
-              <a:rPr>
-                <a:solidFill>
-                  <a:srgbClr val="4758AB"/>
-                </a:solidFill>
-                <a:latin typeface="Courier"/>
-              </a:rPr>
-              <a:t>ggplot</a:t>
-            </a:r>
-            <a:r>
-              <a:rPr>
-                <a:solidFill>
-                  <a:srgbClr val="003B4F"/>
-                </a:solidFill>
-                <a:latin typeface="Courier"/>
-              </a:rPr>
-              <a:t>(lion_data, </a:t>
-            </a:r>
-            <a:r>
-              <a:rPr>
-                <a:solidFill>
-                  <a:srgbClr val="4758AB"/>
-                </a:solidFill>
-                <a:latin typeface="Courier"/>
-              </a:rPr>
-              <a:t>aes</a:t>
-            </a:r>
-            <a:r>
-              <a:rPr>
-                <a:solidFill>
-                  <a:srgbClr val="003B4F"/>
-                </a:solidFill>
-                <a:latin typeface="Courier"/>
-              </a:rPr>
-              <a:t>(</a:t>
-            </a:r>
-            <a:r>
-              <a:rPr>
-                <a:solidFill>
-                  <a:srgbClr val="657422"/>
-                </a:solidFill>
-                <a:latin typeface="Courier"/>
-              </a:rPr>
-              <a:t>sample =</a:t>
-            </a:r>
-            <a:r>
-              <a:rPr>
-                <a:solidFill>
-                  <a:srgbClr val="003B4F"/>
-                </a:solidFill>
-                <a:latin typeface="Courier"/>
-              </a:rPr>
-              <a:t> proportion_black)) </a:t>
-            </a:r>
-            <a:r>
-              <a:rPr>
-                <a:solidFill>
-                  <a:srgbClr val="5E5E5E"/>
-                </a:solidFill>
-                <a:latin typeface="Courier"/>
-              </a:rPr>
-              <a:t>+</a:t>
-            </a:r>
-            <a:br/>
-            <a:r>
-              <a:rPr>
-                <a:solidFill>
-                  <a:srgbClr val="003B4F"/>
-                </a:solidFill>
-                <a:latin typeface="Courier"/>
-              </a:rPr>
-              <a:t>  </a:t>
-            </a:r>
-            <a:r>
-              <a:rPr>
-                <a:solidFill>
-                  <a:srgbClr val="4758AB"/>
-                </a:solidFill>
-                <a:latin typeface="Courier"/>
-              </a:rPr>
-              <a:t>geom_qq</a:t>
-            </a:r>
-            <a:r>
-              <a:rPr>
-                <a:solidFill>
-                  <a:srgbClr val="003B4F"/>
-                </a:solidFill>
-                <a:latin typeface="Courier"/>
-              </a:rPr>
-              <a:t>() </a:t>
-            </a:r>
-            <a:r>
-              <a:rPr>
-                <a:solidFill>
-                  <a:srgbClr val="5E5E5E"/>
-                </a:solidFill>
-                <a:latin typeface="Courier"/>
-              </a:rPr>
-              <a:t>+</a:t>
-            </a:r>
-            <a:br/>
-            <a:r>
-              <a:rPr>
-                <a:solidFill>
-                  <a:srgbClr val="003B4F"/>
-                </a:solidFill>
-                <a:latin typeface="Courier"/>
-              </a:rPr>
-              <a:t>  </a:t>
-            </a:r>
-            <a:r>
-              <a:rPr>
-                <a:solidFill>
-                  <a:srgbClr val="4758AB"/>
-                </a:solidFill>
-                <a:latin typeface="Courier"/>
-              </a:rPr>
-              <a:t>geom_qq_line</a:t>
-            </a:r>
-            <a:r>
-              <a:rPr>
-                <a:solidFill>
-                  <a:srgbClr val="003B4F"/>
-                </a:solidFill>
-                <a:latin typeface="Courier"/>
-              </a:rPr>
-              <a:t>() </a:t>
-            </a:r>
-            <a:r>
-              <a:rPr>
-                <a:solidFill>
-                  <a:srgbClr val="5E5E5E"/>
-                </a:solidFill>
-                <a:latin typeface="Courier"/>
-              </a:rPr>
-              <a:t>+</a:t>
-            </a:r>
-            <a:br/>
-            <a:r>
-              <a:rPr>
-                <a:solidFill>
-                  <a:srgbClr val="003B4F"/>
-                </a:solidFill>
-                <a:latin typeface="Courier"/>
-              </a:rPr>
-              <a:t>  </a:t>
-            </a:r>
-            <a:r>
-              <a:rPr>
-                <a:solidFill>
-                  <a:srgbClr val="4758AB"/>
-                </a:solidFill>
-                <a:latin typeface="Courier"/>
-              </a:rPr>
-              <a:t>labs</a:t>
-            </a:r>
-            <a:r>
-              <a:rPr>
-                <a:solidFill>
-                  <a:srgbClr val="003B4F"/>
-                </a:solidFill>
-                <a:latin typeface="Courier"/>
-              </a:rPr>
-              <a:t>(</a:t>
-            </a:r>
-            <a:r>
-              <a:rPr>
-                <a:solidFill>
-                  <a:srgbClr val="657422"/>
-                </a:solidFill>
-                <a:latin typeface="Courier"/>
-              </a:rPr>
-              <a:t>title =</a:t>
-            </a:r>
-            <a:r>
-              <a:rPr>
-                <a:solidFill>
-                  <a:srgbClr val="003B4F"/>
-                </a:solidFill>
-                <a:latin typeface="Courier"/>
-              </a:rPr>
-              <a:t> </a:t>
-            </a:r>
-            <a:r>
-              <a:rPr>
-                <a:solidFill>
-                  <a:srgbClr val="20794D"/>
-                </a:solidFill>
-                <a:latin typeface="Courier"/>
-              </a:rPr>
-              <a:t>"Q-Q Plot Prop Black"</a:t>
-            </a:r>
-            <a:r>
-              <a:rPr>
-                <a:solidFill>
-                  <a:srgbClr val="003B4F"/>
-                </a:solidFill>
-                <a:latin typeface="Courier"/>
-              </a:rPr>
-              <a:t>,</a:t>
-            </a:r>
-            <a:br/>
-            <a:r>
-              <a:rPr>
-                <a:solidFill>
-                  <a:srgbClr val="003B4F"/>
-                </a:solidFill>
-                <a:latin typeface="Courier"/>
-              </a:rPr>
-              <a:t>       </a:t>
-            </a:r>
-            <a:r>
-              <a:rPr>
-                <a:solidFill>
-                  <a:srgbClr val="657422"/>
-                </a:solidFill>
-                <a:latin typeface="Courier"/>
-              </a:rPr>
-              <a:t>x =</a:t>
-            </a:r>
-            <a:r>
-              <a:rPr>
-                <a:solidFill>
-                  <a:srgbClr val="003B4F"/>
-                </a:solidFill>
-                <a:latin typeface="Courier"/>
-              </a:rPr>
-              <a:t> </a:t>
-            </a:r>
-            <a:r>
-              <a:rPr>
-                <a:solidFill>
-                  <a:srgbClr val="20794D"/>
-                </a:solidFill>
-                <a:latin typeface="Courier"/>
-              </a:rPr>
-              <a:t>"Theoretical Quantiles"</a:t>
-            </a:r>
-            <a:r>
-              <a:rPr>
-                <a:solidFill>
-                  <a:srgbClr val="003B4F"/>
-                </a:solidFill>
-                <a:latin typeface="Courier"/>
-              </a:rPr>
-              <a:t>,</a:t>
-            </a:r>
-            <a:br/>
-            <a:r>
-              <a:rPr>
-                <a:solidFill>
-                  <a:srgbClr val="003B4F"/>
-                </a:solidFill>
-                <a:latin typeface="Courier"/>
-              </a:rPr>
-              <a:t>       </a:t>
-            </a:r>
-            <a:r>
-              <a:rPr>
-                <a:solidFill>
-                  <a:srgbClr val="657422"/>
-                </a:solidFill>
-                <a:latin typeface="Courier"/>
-              </a:rPr>
-              <a:t>y =</a:t>
-            </a:r>
-            <a:r>
-              <a:rPr>
-                <a:solidFill>
-                  <a:srgbClr val="003B4F"/>
-                </a:solidFill>
-                <a:latin typeface="Courier"/>
-              </a:rPr>
-              <a:t> </a:t>
-            </a:r>
-            <a:r>
-              <a:rPr>
-                <a:solidFill>
-                  <a:srgbClr val="20794D"/>
-                </a:solidFill>
-                <a:latin typeface="Courier"/>
-              </a:rPr>
-              <a:t>"Sample Quantiles"</a:t>
-            </a:r>
-            <a:r>
-              <a:rPr>
-                <a:solidFill>
-                  <a:srgbClr val="003B4F"/>
-                </a:solidFill>
-                <a:latin typeface="Courier"/>
-              </a:rPr>
-              <a:t>) </a:t>
-            </a:r>
-            <a:r>
-              <a:rPr>
-                <a:solidFill>
-                  <a:srgbClr val="5E5E5E"/>
-                </a:solidFill>
-                <a:latin typeface="Courier"/>
-              </a:rPr>
-              <a:t>+</a:t>
-            </a:r>
-            <a:br/>
-            <a:r>
-              <a:rPr>
-                <a:solidFill>
-                  <a:srgbClr val="003B4F"/>
-                </a:solidFill>
-                <a:latin typeface="Courier"/>
-              </a:rPr>
-              <a:t>  </a:t>
-            </a:r>
-            <a:r>
-              <a:rPr>
-                <a:solidFill>
-                  <a:srgbClr val="4758AB"/>
-                </a:solidFill>
-                <a:latin typeface="Courier"/>
-              </a:rPr>
-              <a:t>theme_minimal</a:t>
-            </a:r>
-            <a:r>
-              <a:rPr>
-                <a:solidFill>
-                  <a:srgbClr val="003B4F"/>
-                </a:solidFill>
-                <a:latin typeface="Courier"/>
-              </a:rPr>
-              <a:t>()</a:t>
-            </a:r>
-            <a:r>
-              <a:rPr>
-                <a:solidFill>
-                  <a:srgbClr val="5E5E5E"/>
-                </a:solidFill>
-                <a:latin typeface="Courier"/>
-              </a:rPr>
-              <a:t>+</a:t>
-            </a:r>
-            <a:r>
-              <a:rPr>
-                <a:solidFill>
-                  <a:srgbClr val="4758AB"/>
-                </a:solidFill>
-                <a:latin typeface="Courier"/>
-              </a:rPr>
-              <a:t>theme</a:t>
-            </a:r>
-            <a:r>
-              <a:rPr>
-                <a:solidFill>
-                  <a:srgbClr val="003B4F"/>
-                </a:solidFill>
-                <a:latin typeface="Courier"/>
-              </a:rPr>
-              <a:t>(</a:t>
-            </a:r>
-            <a:br/>
-            <a:r>
-              <a:rPr>
-                <a:solidFill>
-                  <a:srgbClr val="003B4F"/>
-                </a:solidFill>
-                <a:latin typeface="Courier"/>
-              </a:rPr>
-              <a:t>    </a:t>
-            </a:r>
-            <a:r>
-              <a:rPr>
-                <a:solidFill>
-                  <a:srgbClr val="657422"/>
-                </a:solidFill>
-                <a:latin typeface="Courier"/>
-              </a:rPr>
-              <a:t>axis.title.x =</a:t>
-            </a:r>
-            <a:r>
-              <a:rPr>
-                <a:solidFill>
-                  <a:srgbClr val="003B4F"/>
-                </a:solidFill>
-                <a:latin typeface="Courier"/>
-              </a:rPr>
-              <a:t> </a:t>
-            </a:r>
-            <a:r>
-              <a:rPr>
-                <a:solidFill>
-                  <a:srgbClr val="4758AB"/>
-                </a:solidFill>
-                <a:latin typeface="Courier"/>
-              </a:rPr>
-              <a:t>element_blank</a:t>
-            </a:r>
-            <a:r>
-              <a:rPr>
-                <a:solidFill>
-                  <a:srgbClr val="003B4F"/>
-                </a:solidFill>
-                <a:latin typeface="Courier"/>
-              </a:rPr>
-              <a:t>(),</a:t>
-            </a:r>
-            <a:br/>
-            <a:r>
-              <a:rPr>
-                <a:solidFill>
-                  <a:srgbClr val="003B4F"/>
-                </a:solidFill>
-                <a:latin typeface="Courier"/>
-              </a:rPr>
-              <a:t>    </a:t>
-            </a:r>
-            <a:r>
-              <a:rPr>
-                <a:solidFill>
-                  <a:srgbClr val="657422"/>
-                </a:solidFill>
-                <a:latin typeface="Courier"/>
-              </a:rPr>
-              <a:t>axis.text.x =</a:t>
-            </a:r>
-            <a:r>
-              <a:rPr>
-                <a:solidFill>
-                  <a:srgbClr val="003B4F"/>
-                </a:solidFill>
-                <a:latin typeface="Courier"/>
-              </a:rPr>
-              <a:t> </a:t>
-            </a:r>
-            <a:r>
-              <a:rPr>
-                <a:solidFill>
-                  <a:srgbClr val="4758AB"/>
-                </a:solidFill>
-                <a:latin typeface="Courier"/>
-              </a:rPr>
-              <a:t>element_blank</a:t>
-            </a:r>
-            <a:r>
-              <a:rPr>
-                <a:solidFill>
-                  <a:srgbClr val="003B4F"/>
-                </a:solidFill>
-                <a:latin typeface="Courier"/>
-              </a:rPr>
-              <a:t>())</a:t>
-            </a:r>
-            <a:br/>
-            <a:br/>
-            <a:r>
-              <a:rPr>
-                <a:solidFill>
-                  <a:srgbClr val="003B4F"/>
-                </a:solidFill>
-                <a:latin typeface="Courier"/>
-              </a:rPr>
-              <a:t>p4_lion &lt;- </a:t>
-            </a:r>
-            <a:r>
-              <a:rPr>
-                <a:solidFill>
-                  <a:srgbClr val="4758AB"/>
-                </a:solidFill>
-                <a:latin typeface="Courier"/>
-              </a:rPr>
-              <a:t>ggplot</a:t>
-            </a:r>
-            <a:r>
-              <a:rPr>
-                <a:solidFill>
-                  <a:srgbClr val="003B4F"/>
-                </a:solidFill>
-                <a:latin typeface="Courier"/>
-              </a:rPr>
-              <a:t>(lion_data, </a:t>
-            </a:r>
-            <a:r>
-              <a:rPr>
-                <a:solidFill>
-                  <a:srgbClr val="4758AB"/>
-                </a:solidFill>
-                <a:latin typeface="Courier"/>
-              </a:rPr>
-              <a:t>aes</a:t>
-            </a:r>
-            <a:r>
-              <a:rPr>
-                <a:solidFill>
-                  <a:srgbClr val="003B4F"/>
-                </a:solidFill>
-                <a:latin typeface="Courier"/>
-              </a:rPr>
-              <a:t>(</a:t>
-            </a:r>
-            <a:r>
-              <a:rPr>
-                <a:solidFill>
-                  <a:srgbClr val="657422"/>
-                </a:solidFill>
-                <a:latin typeface="Courier"/>
-              </a:rPr>
-              <a:t>sample =</a:t>
-            </a:r>
-            <a:r>
-              <a:rPr>
-                <a:solidFill>
-                  <a:srgbClr val="003B4F"/>
-                </a:solidFill>
-                <a:latin typeface="Courier"/>
-              </a:rPr>
-              <a:t> age_years)) </a:t>
-            </a:r>
-            <a:r>
-              <a:rPr>
-                <a:solidFill>
-                  <a:srgbClr val="5E5E5E"/>
-                </a:solidFill>
-                <a:latin typeface="Courier"/>
-              </a:rPr>
-              <a:t>+</a:t>
-            </a:r>
-            <a:br/>
-            <a:r>
-              <a:rPr>
-                <a:solidFill>
-                  <a:srgbClr val="003B4F"/>
-                </a:solidFill>
-                <a:latin typeface="Courier"/>
-              </a:rPr>
-              <a:t>  </a:t>
-            </a:r>
-            <a:r>
-              <a:rPr>
-                <a:solidFill>
-                  <a:srgbClr val="4758AB"/>
-                </a:solidFill>
-                <a:latin typeface="Courier"/>
-              </a:rPr>
-              <a:t>geom_qq</a:t>
-            </a:r>
-            <a:r>
-              <a:rPr>
-                <a:solidFill>
-                  <a:srgbClr val="003B4F"/>
-                </a:solidFill>
-                <a:latin typeface="Courier"/>
-              </a:rPr>
-              <a:t>() </a:t>
-            </a:r>
-            <a:r>
-              <a:rPr>
-                <a:solidFill>
-                  <a:srgbClr val="5E5E5E"/>
-                </a:solidFill>
-                <a:latin typeface="Courier"/>
-              </a:rPr>
-              <a:t>+</a:t>
-            </a:r>
-            <a:br/>
-            <a:r>
-              <a:rPr>
-                <a:solidFill>
-                  <a:srgbClr val="003B4F"/>
-                </a:solidFill>
-                <a:latin typeface="Courier"/>
-              </a:rPr>
-              <a:t>  </a:t>
-            </a:r>
-            <a:r>
-              <a:rPr>
-                <a:solidFill>
-                  <a:srgbClr val="4758AB"/>
-                </a:solidFill>
-                <a:latin typeface="Courier"/>
-              </a:rPr>
-              <a:t>geom_qq_line</a:t>
-            </a:r>
-            <a:r>
-              <a:rPr>
-                <a:solidFill>
-                  <a:srgbClr val="003B4F"/>
-                </a:solidFill>
-                <a:latin typeface="Courier"/>
-              </a:rPr>
-              <a:t>() </a:t>
-            </a:r>
-            <a:r>
-              <a:rPr>
-                <a:solidFill>
-                  <a:srgbClr val="5E5E5E"/>
-                </a:solidFill>
-                <a:latin typeface="Courier"/>
-              </a:rPr>
-              <a:t>+</a:t>
-            </a:r>
-            <a:br/>
-            <a:r>
-              <a:rPr>
-                <a:solidFill>
-                  <a:srgbClr val="003B4F"/>
-                </a:solidFill>
-                <a:latin typeface="Courier"/>
-              </a:rPr>
-              <a:t>  </a:t>
-            </a:r>
-            <a:r>
-              <a:rPr>
-                <a:solidFill>
-                  <a:srgbClr val="4758AB"/>
-                </a:solidFill>
-                <a:latin typeface="Courier"/>
-              </a:rPr>
-              <a:t>labs</a:t>
-            </a:r>
-            <a:r>
-              <a:rPr>
-                <a:solidFill>
-                  <a:srgbClr val="003B4F"/>
-                </a:solidFill>
-                <a:latin typeface="Courier"/>
-              </a:rPr>
-              <a:t>(</a:t>
-            </a:r>
-            <a:r>
-              <a:rPr>
-                <a:solidFill>
-                  <a:srgbClr val="657422"/>
-                </a:solidFill>
-                <a:latin typeface="Courier"/>
-              </a:rPr>
-              <a:t>title =</a:t>
-            </a:r>
-            <a:r>
-              <a:rPr>
-                <a:solidFill>
-                  <a:srgbClr val="003B4F"/>
-                </a:solidFill>
-                <a:latin typeface="Courier"/>
-              </a:rPr>
-              <a:t> </a:t>
-            </a:r>
-            <a:r>
-              <a:rPr>
-                <a:solidFill>
-                  <a:srgbClr val="20794D"/>
-                </a:solidFill>
-                <a:latin typeface="Courier"/>
-              </a:rPr>
-              <a:t>"Q-Q Plot for age"</a:t>
-            </a:r>
-            <a:r>
-              <a:rPr>
-                <a:solidFill>
-                  <a:srgbClr val="003B4F"/>
-                </a:solidFill>
-                <a:latin typeface="Courier"/>
-              </a:rPr>
-              <a:t>,</a:t>
-            </a:r>
-            <a:br/>
-            <a:r>
-              <a:rPr>
-                <a:solidFill>
-                  <a:srgbClr val="003B4F"/>
-                </a:solidFill>
-                <a:latin typeface="Courier"/>
-              </a:rPr>
-              <a:t>       </a:t>
-            </a:r>
-            <a:r>
-              <a:rPr>
-                <a:solidFill>
-                  <a:srgbClr val="657422"/>
-                </a:solidFill>
-                <a:latin typeface="Courier"/>
-              </a:rPr>
-              <a:t>x =</a:t>
-            </a:r>
-            <a:r>
-              <a:rPr>
-                <a:solidFill>
-                  <a:srgbClr val="003B4F"/>
-                </a:solidFill>
-                <a:latin typeface="Courier"/>
-              </a:rPr>
-              <a:t> </a:t>
-            </a:r>
-            <a:r>
-              <a:rPr>
-                <a:solidFill>
-                  <a:srgbClr val="20794D"/>
-                </a:solidFill>
-                <a:latin typeface="Courier"/>
-              </a:rPr>
-              <a:t>"Theoretical Quantiles"</a:t>
-            </a:r>
-            <a:r>
-              <a:rPr>
-                <a:solidFill>
-                  <a:srgbClr val="003B4F"/>
-                </a:solidFill>
-                <a:latin typeface="Courier"/>
-              </a:rPr>
-              <a:t>,</a:t>
-            </a:r>
-            <a:br/>
-            <a:r>
-              <a:rPr>
-                <a:solidFill>
-                  <a:srgbClr val="003B4F"/>
-                </a:solidFill>
-                <a:latin typeface="Courier"/>
-              </a:rPr>
-              <a:t>       </a:t>
-            </a:r>
-            <a:r>
-              <a:rPr>
-                <a:solidFill>
-                  <a:srgbClr val="657422"/>
-                </a:solidFill>
-                <a:latin typeface="Courier"/>
-              </a:rPr>
-              <a:t>y =</a:t>
-            </a:r>
-            <a:r>
-              <a:rPr>
-                <a:solidFill>
-                  <a:srgbClr val="003B4F"/>
-                </a:solidFill>
-                <a:latin typeface="Courier"/>
-              </a:rPr>
-              <a:t> </a:t>
-            </a:r>
-            <a:r>
-              <a:rPr>
-                <a:solidFill>
-                  <a:srgbClr val="20794D"/>
-                </a:solidFill>
-                <a:latin typeface="Courier"/>
-              </a:rPr>
-              <a:t>"Sample Quantiles"</a:t>
-            </a:r>
-            <a:r>
-              <a:rPr>
-                <a:solidFill>
-                  <a:srgbClr val="003B4F"/>
-                </a:solidFill>
-                <a:latin typeface="Courier"/>
-              </a:rPr>
-              <a:t>) </a:t>
-            </a:r>
-            <a:r>
-              <a:rPr>
-                <a:solidFill>
-                  <a:srgbClr val="5E5E5E"/>
-                </a:solidFill>
-                <a:latin typeface="Courier"/>
-              </a:rPr>
-              <a:t>+</a:t>
-            </a:r>
-            <a:br/>
-            <a:r>
-              <a:rPr>
-                <a:solidFill>
-                  <a:srgbClr val="003B4F"/>
-                </a:solidFill>
-                <a:latin typeface="Courier"/>
-              </a:rPr>
-              <a:t>  </a:t>
-            </a:r>
-            <a:r>
-              <a:rPr>
-                <a:solidFill>
-                  <a:srgbClr val="4758AB"/>
-                </a:solidFill>
-                <a:latin typeface="Courier"/>
-              </a:rPr>
-              <a:t>theme_minimal</a:t>
-            </a:r>
-            <a:r>
-              <a:rPr>
-                <a:solidFill>
-                  <a:srgbClr val="003B4F"/>
-                </a:solidFill>
-                <a:latin typeface="Courier"/>
-              </a:rPr>
-              <a:t>()</a:t>
-            </a:r>
-            <a:br/>
-            <a:br/>
-            <a:r>
-              <a:rPr>
-                <a:solidFill>
-                  <a:srgbClr val="5E5E5E"/>
-                </a:solidFill>
-                <a:latin typeface="Courier"/>
-              </a:rPr>
-              <a:t># Combine the plots</a:t>
-            </a:r>
-            <a:br/>
-            <a:r>
-              <a:rPr>
-                <a:solidFill>
-                  <a:srgbClr val="003B4F"/>
-                </a:solidFill>
-                <a:latin typeface="Courier"/>
-              </a:rPr>
-              <a:t>(p1_lion </a:t>
-            </a:r>
-            <a:r>
-              <a:rPr>
-                <a:solidFill>
-                  <a:srgbClr val="5E5E5E"/>
-                </a:solidFill>
-                <a:latin typeface="Courier"/>
-              </a:rPr>
-              <a:t>/</a:t>
-            </a:r>
-            <a:r>
-              <a:rPr>
-                <a:solidFill>
-                  <a:srgbClr val="003B4F"/>
-                </a:solidFill>
-                <a:latin typeface="Courier"/>
-              </a:rPr>
-              <a:t> p2_lion) </a:t>
-            </a:r>
-            <a:r>
-              <a:rPr>
-                <a:solidFill>
-                  <a:srgbClr val="5E5E5E"/>
-                </a:solidFill>
-                <a:latin typeface="Courier"/>
-              </a:rPr>
-              <a:t>|</a:t>
-            </a:r>
-            <a:r>
-              <a:rPr>
-                <a:solidFill>
-                  <a:srgbClr val="003B4F"/>
-                </a:solidFill>
-                <a:latin typeface="Courier"/>
-              </a:rPr>
-              <a:t> (p3_lion </a:t>
-            </a:r>
-            <a:r>
-              <a:rPr>
-                <a:solidFill>
-                  <a:srgbClr val="5E5E5E"/>
-                </a:solidFill>
-                <a:latin typeface="Courier"/>
-              </a:rPr>
-              <a:t>/</a:t>
-            </a:r>
-            <a:r>
-              <a:rPr>
-                <a:solidFill>
-                  <a:srgbClr val="003B4F"/>
-                </a:solidFill>
-                <a:latin typeface="Courier"/>
-              </a:rPr>
-              <a:t> p4_lion)</a:t>
-            </a:r>
-          </a:p>
         </p:txBody>
       </p:sp>
       <p:pic>
@@ -5653,46 +3898,42 @@
             </a:r>
           </a:p>
           <a:p>
-            <a:pPr lvl="0" indent="0" marL="0">
-              <a:buNone/>
-            </a:pPr>
+            <a:pPr lvl="0"/>
             <a:r>
               <a:rPr b="1"/>
               <a:t>The correlation coefficient depends on the range</a:t>
             </a:r>
           </a:p>
           <a:p>
+            <a:pPr lvl="1"/>
+            <a:r>
+              <a:rPr/>
+              <a:t>Restricting range of values can reduce the correlation coefficient</a:t>
+            </a:r>
+          </a:p>
+          <a:p>
+            <a:pPr lvl="1"/>
+            <a:r>
+              <a:rPr/>
+              <a:t>Comparing correlations between studies requires similar ranges of values</a:t>
+            </a:r>
+          </a:p>
+          <a:p>
             <a:pPr lvl="0"/>
-            <a:r>
-              <a:rPr/>
-              <a:t>Restricting range of values can reduce the correlation coefficient</a:t>
-            </a:r>
-          </a:p>
-          <a:p>
-            <a:pPr lvl="0"/>
-            <a:r>
-              <a:rPr/>
-              <a:t>Comparing correlations between studies requires similar ranges of values</a:t>
-            </a:r>
-          </a:p>
-          <a:p>
-            <a:pPr lvl="0" indent="0" marL="0">
-              <a:buNone/>
-            </a:pPr>
             <a:r>
               <a:rPr b="1"/>
               <a:t>Measurement error affects correlation</a:t>
             </a:r>
           </a:p>
           <a:p>
-            <a:pPr lvl="0"/>
+            <a:pPr lvl="1"/>
             <a:r>
               <a:rPr/>
               <a:t>Measurement error in X or Y tends to weaken observed correlation</a:t>
             </a:r>
           </a:p>
           <a:p>
-            <a:pPr lvl="0"/>
+            <a:pPr lvl="1"/>
             <a:r>
               <a:rPr/>
               <a:t>This bias is called </a:t>
@@ -5703,37 +3944,35 @@
             </a:r>
           </a:p>
           <a:p>
+            <a:pPr lvl="1"/>
+            <a:r>
+              <a:rPr/>
+              <a:t>True correlation typically stronger than observed correlation</a:t>
+            </a:r>
+          </a:p>
+          <a:p>
             <a:pPr lvl="0"/>
-            <a:r>
-              <a:rPr/>
-              <a:t>True correlation typically stronger than observed correlation</a:t>
-            </a:r>
-          </a:p>
-          <a:p>
-            <a:pPr lvl="0" indent="0" marL="0">
-              <a:buNone/>
-            </a:pPr>
             <a:r>
               <a:rPr b="1"/>
               <a:t>Correlation vs. Causation</a:t>
             </a:r>
           </a:p>
           <a:p>
-            <a:pPr lvl="0"/>
+            <a:pPr lvl="1"/>
             <a:r>
               <a:rPr/>
               <a:t>Correlation does not imply causation</a:t>
             </a:r>
           </a:p>
           <a:p>
-            <a:pPr lvl="0"/>
+            <a:pPr lvl="1"/>
             <a:r>
               <a:rPr/>
               <a:t>Three possible explanations for correlation:</a:t>
             </a:r>
           </a:p>
           <a:p>
-            <a:pPr lvl="1" indent="-342900" marL="685800">
+            <a:pPr lvl="2" indent="-342900" marL="1028700">
               <a:buAutoNum type="arabicPeriod"/>
             </a:pPr>
             <a:r>
@@ -5742,7 +3981,7 @@
             </a:r>
           </a:p>
           <a:p>
-            <a:pPr lvl="1" indent="-342900" marL="685800">
+            <a:pPr lvl="2" indent="-342900" marL="1028700">
               <a:buAutoNum type="arabicPeriod"/>
             </a:pPr>
             <a:r>
@@ -5751,7 +3990,7 @@
             </a:r>
           </a:p>
           <a:p>
-            <a:pPr lvl="1" indent="-342900" marL="685800">
+            <a:pPr lvl="2" indent="-342900" marL="1028700">
               <a:buAutoNum type="arabicPeriod"/>
             </a:pPr>
             <a:r>
@@ -5760,30 +3999,28 @@
             </a:r>
           </a:p>
           <a:p>
-            <a:pPr lvl="0" indent="0" marL="0">
-              <a:buNone/>
-            </a:pPr>
+            <a:pPr lvl="0"/>
             <a:r>
               <a:rPr b="1"/>
               <a:t>Correlation significance test</a:t>
             </a:r>
           </a:p>
           <a:p>
-            <a:pPr lvl="0"/>
+            <a:pPr lvl="1"/>
             <a:r>
               <a:rPr/>
               <a:t>H₀: ρ = 0 (no correlation in population)</a:t>
             </a:r>
           </a:p>
           <a:p>
-            <a:pPr lvl="0"/>
+            <a:pPr lvl="1"/>
             <a:r>
               <a:rPr/>
               <a:t>H₁: ρ ≠ 0 (correlation exists in population)</a:t>
             </a:r>
           </a:p>
           <a:p>
-            <a:pPr lvl="0"/>
+            <a:pPr lvl="1"/>
             <a:r>
               <a:rPr b="1"/>
               <a:t>Test statistic: t = r / SE(r) with df = n-2</a:t>
@@ -5807,8 +4044,8 @@
         </p:blipFill>
         <p:spPr bwMode="auto">
           <a:xfrm>
-            <a:off x="6121400" y="2044700"/>
-            <a:ext cx="2781300" cy="1714500"/>
+            <a:off x="6121400" y="1155700"/>
+            <a:ext cx="2781300" cy="3479800"/>
           </a:xfrm>
           <a:prstGeom prst="rect">
             <a:avLst/>
@@ -5935,104 +4172,92 @@
                 </a:r>
                 <a:r>
                   <a:rPr/>
-                  <a:t> regression model</a:t>
+                  <a:t> regression model </a:t>
+                </a:r>
+                <a14:m>
+                  <m:oMath xmlns:m="http://schemas.openxmlformats.org/officeDocument/2006/math">
+                    <m:r>
+                      <m:t>Y</m:t>
+                    </m:r>
+                    <m:r>
+                      <m:rPr>
+                        <m:sty m:val="p"/>
+                      </m:rPr>
+                      <m:t>=</m:t>
+                    </m:r>
+                    <m:r>
+                      <m:t>α</m:t>
+                    </m:r>
+                    <m:r>
+                      <m:rPr>
+                        <m:sty m:val="p"/>
+                      </m:rPr>
+                      <m:t>+</m:t>
+                    </m:r>
+                    <m:r>
+                      <m:t>β</m:t>
+                    </m:r>
+                    <m:r>
+                      <m:t>X</m:t>
+                    </m:r>
+                    <m:r>
+                      <m:rPr>
+                        <m:sty m:val="p"/>
+                      </m:rPr>
+                      <m:t>+</m:t>
+                    </m:r>
+                    <m:r>
+                      <m:t>ε</m:t>
+                    </m:r>
+                  </m:oMath>
+                </a14:m>
+              </a:p>
+              <a:p>
+                <a:pPr lvl="0"/>
+                <a:r>
+                  <a:rPr/>
+                  <a:t>Where:</a:t>
+                </a:r>
+              </a:p>
+              <a:p>
+                <a:pPr lvl="1"/>
+                <a:r>
+                  <a:rPr/>
+                  <a:t>Y is the response variable</a:t>
+                </a:r>
+              </a:p>
+              <a:p>
+                <a:pPr lvl="1"/>
+                <a:r>
+                  <a:rPr/>
+                  <a:t>X is the predictor variable</a:t>
+                </a:r>
+              </a:p>
+              <a:p>
+                <a:pPr lvl="1"/>
+                <a:r>
+                  <a:rPr/>
+                  <a:t>α (alpha) is the intercept (value of Y when X=0)</a:t>
+                </a:r>
+              </a:p>
+              <a:p>
+                <a:pPr lvl="1"/>
+                <a:r>
+                  <a:rPr/>
+                  <a:t>β (beta) is the slope (change in Y per unit change in X)</a:t>
+                </a:r>
+              </a:p>
+              <a:p>
+                <a:pPr lvl="1"/>
+                <a:r>
+                  <a:rPr/>
+                  <a:t>ε (epsilon) is the error term (random deviation from the line)</a:t>
                 </a:r>
               </a:p>
               <a:p>
                 <a:pPr lvl="0" indent="0" marL="0">
                   <a:buNone/>
                 </a:pPr>
-                <a14:m>
-                  <m:oMathPara xmlns:m="http://schemas.openxmlformats.org/officeDocument/2006/math">
-                    <m:oMathParaPr>
-                      <m:jc m:val="center"/>
-                    </m:oMathParaPr>
-                    <m:oMath>
-                      <m:r>
-                        <m:t>Y</m:t>
-                      </m:r>
-                      <m:r>
-                        <m:rPr>
-                          <m:sty m:val="p"/>
-                        </m:rPr>
-                        <m:t>=</m:t>
-                      </m:r>
-                      <m:r>
-                        <m:t>α</m:t>
-                      </m:r>
-                      <m:r>
-                        <m:rPr>
-                          <m:sty m:val="p"/>
-                        </m:rPr>
-                        <m:t>+</m:t>
-                      </m:r>
-                      <m:r>
-                        <m:t>β</m:t>
-                      </m:r>
-                      <m:r>
-                        <m:t>X</m:t>
-                      </m:r>
-                      <m:r>
-                        <m:rPr>
-                          <m:sty m:val="p"/>
-                        </m:rPr>
-                        <m:t>+</m:t>
-                      </m:r>
-                      <m:r>
-                        <m:t>ε</m:t>
-                      </m:r>
-                    </m:oMath>
-                  </m:oMathPara>
-                </a14:m>
-              </a:p>
-              <a:p>
-                <a:pPr lvl="0" indent="0" marL="0">
-                  <a:buNone/>
-                </a:pPr>
-                <a:r>
-                  <a:rPr/>
-                  <a:t>Where:</a:t>
-                </a:r>
-              </a:p>
-              <a:p>
-                <a:pPr lvl="0"/>
-                <a:r>
-                  <a:rPr/>
-                  <a:t>Y is the response variable</a:t>
-                </a:r>
-              </a:p>
-              <a:p>
-                <a:pPr lvl="0"/>
-                <a:r>
-                  <a:rPr/>
-                  <a:t>X is the predictor variable</a:t>
-                </a:r>
-              </a:p>
-              <a:p>
-                <a:pPr lvl="0"/>
-                <a:r>
-                  <a:rPr/>
-                  <a:t>α (alpha) is the intercept (value of Y when X=0)</a:t>
-                </a:r>
-              </a:p>
-              <a:p>
-                <a:pPr lvl="0"/>
-                <a:r>
-                  <a:rPr/>
-                  <a:t>β (beta) is the slope (change in Y per unit change in X)</a:t>
-                </a:r>
-              </a:p>
-              <a:p>
-                <a:pPr lvl="0"/>
-                <a:r>
-                  <a:rPr/>
-                  <a:t>ε (epsilon) is the error term (random deviation from the line)</a:t>
-                </a:r>
-              </a:p>
-              <a:p>
-                <a:pPr lvl="0" indent="0" marL="0">
-                  <a:buNone/>
-                </a:pPr>
                 <a:r>
                   <a:rPr/>
                   <a:t>The </a:t>
@@ -6043,65 +4268,8 @@
                 </a:r>
                 <a:r>
                   <a:rPr/>
-                  <a:t> regression equation is:</a:t>
-                </a:r>
-              </a:p>
-              <a:p>
-                <a:pPr lvl="0" indent="0" marL="0">
-                  <a:buNone/>
-                </a:pPr>
-                <a14:m>
-                  <m:oMathPara xmlns:m="http://schemas.openxmlformats.org/officeDocument/2006/math">
-                    <m:oMathParaPr>
-                      <m:jc m:val="center"/>
-                    </m:oMathParaPr>
-                    <m:oMath>
-                      <m:acc>
-                        <m:accPr>
-                          <m:chr m:val="̂"/>
-                        </m:accPr>
-                        <m:e>
-                          <m:r>
-                            <m:t>Y</m:t>
-                          </m:r>
-                        </m:e>
-                      </m:acc>
-                      <m:r>
-                        <m:rPr>
-                          <m:sty m:val="p"/>
-                        </m:rPr>
-                        <m:t>=</m:t>
-                      </m:r>
-                      <m:r>
-                        <m:t>a</m:t>
-                      </m:r>
-                      <m:r>
-                        <m:rPr>
-                          <m:sty m:val="p"/>
-                        </m:rPr>
-                        <m:t>+</m:t>
-                      </m:r>
-                      <m:r>
-                        <m:t>b</m:t>
-                      </m:r>
-                      <m:r>
-                        <m:t>X</m:t>
-                      </m:r>
-                    </m:oMath>
-                  </m:oMathPara>
-                </a14:m>
-              </a:p>
-              <a:p>
-                <a:pPr lvl="0" indent="0" marL="0">
-                  <a:buNone/>
-                </a:pPr>
-                <a:r>
-                  <a:rPr/>
-                  <a:t>Where:</a:t>
-                </a:r>
-              </a:p>
-              <a:p>
-                <a:pPr lvl="0"/>
+                  <a:t> regression equation is: </a:t>
+                </a:r>
                 <a14:m>
                   <m:oMath xmlns:m="http://schemas.openxmlformats.org/officeDocument/2006/math">
                     <m:acc>
@@ -6114,22 +4282,67 @@
                         </m:r>
                       </m:e>
                     </m:acc>
+                    <m:r>
+                      <m:rPr>
+                        <m:sty m:val="p"/>
+                      </m:rPr>
+                      <m:t>=</m:t>
+                    </m:r>
+                    <m:r>
+                      <m:t>a</m:t>
+                    </m:r>
+                    <m:r>
+                      <m:rPr>
+                        <m:sty m:val="p"/>
+                      </m:rPr>
+                      <m:t>+</m:t>
+                    </m:r>
+                    <m:r>
+                      <m:t>b</m:t>
+                    </m:r>
+                    <m:r>
+                      <m:t>X</m:t>
+                    </m:r>
                   </m:oMath>
                 </a14:m>
+              </a:p>
+              <a:p>
+                <a:pPr lvl="0"/>
+                <a:r>
+                  <a:rPr/>
+                  <a:t>Where:</a:t>
+                </a:r>
+              </a:p>
+              <a:p>
+                <a:pPr lvl="1"/>
+                <a14:m>
+                  <m:oMath xmlns:m="http://schemas.openxmlformats.org/officeDocument/2006/math">
+                    <m:acc>
+                      <m:accPr>
+                        <m:chr m:val="̂"/>
+                      </m:accPr>
+                      <m:e>
+                        <m:r>
+                          <m:t>Y</m:t>
+                        </m:r>
+                      </m:e>
+                    </m:acc>
+                  </m:oMath>
+                </a14:m>
                 <a:r>
                   <a:rPr/>
                   <a:t> is the predicted value of Y</a:t>
                 </a:r>
               </a:p>
               <a:p>
-                <a:pPr lvl="0"/>
+                <a:pPr lvl="1"/>
                 <a:r>
                   <a:rPr/>
                   <a:t>a is the estimate of α (intercept)</a:t>
                 </a:r>
               </a:p>
               <a:p>
-                <a:pPr lvl="0"/>
+                <a:pPr lvl="1"/>
                 <a:r>
                   <a:rPr/>
                   <a:t>b is the estimate of β (slope)</a:t>
@@ -6296,104 +4509,92 @@
                 </a:r>
                 <a:r>
                   <a:rPr/>
-                  <a:t> regression model is:</a:t>
+                  <a:t> regression model is: </a:t>
+                </a:r>
+                <a14:m>
+                  <m:oMath xmlns:m="http://schemas.openxmlformats.org/officeDocument/2006/math">
+                    <m:r>
+                      <m:t>Y</m:t>
+                    </m:r>
+                    <m:r>
+                      <m:rPr>
+                        <m:sty m:val="p"/>
+                      </m:rPr>
+                      <m:t>=</m:t>
+                    </m:r>
+                    <m:r>
+                      <m:t>α</m:t>
+                    </m:r>
+                    <m:r>
+                      <m:rPr>
+                        <m:sty m:val="p"/>
+                      </m:rPr>
+                      <m:t>+</m:t>
+                    </m:r>
+                    <m:r>
+                      <m:t>β</m:t>
+                    </m:r>
+                    <m:r>
+                      <m:t>X</m:t>
+                    </m:r>
+                    <m:r>
+                      <m:rPr>
+                        <m:sty m:val="p"/>
+                      </m:rPr>
+                      <m:t>+</m:t>
+                    </m:r>
+                    <m:r>
+                      <m:t>ε</m:t>
+                    </m:r>
+                  </m:oMath>
+                </a14:m>
+              </a:p>
+              <a:p>
+                <a:pPr lvl="0"/>
+                <a:r>
+                  <a:rPr/>
+                  <a:t>Where:</a:t>
+                </a:r>
+              </a:p>
+              <a:p>
+                <a:pPr lvl="1"/>
+                <a:r>
+                  <a:rPr/>
+                  <a:t>Y is the response variable</a:t>
+                </a:r>
+              </a:p>
+              <a:p>
+                <a:pPr lvl="1"/>
+                <a:r>
+                  <a:rPr/>
+                  <a:t>X is the predictor variable</a:t>
+                </a:r>
+              </a:p>
+              <a:p>
+                <a:pPr lvl="1"/>
+                <a:r>
+                  <a:rPr/>
+                  <a:t>α (alpha) is the intercept (value of Y when X=0)</a:t>
+                </a:r>
+              </a:p>
+              <a:p>
+                <a:pPr lvl="1"/>
+                <a:r>
+                  <a:rPr/>
+                  <a:t>β (beta) is the slope (change in Y per unit change in X)</a:t>
+                </a:r>
+              </a:p>
+              <a:p>
+                <a:pPr lvl="1"/>
+                <a:r>
+                  <a:rPr/>
+                  <a:t>ε (epsilon) is the error term (random deviation from the line)</a:t>
                 </a:r>
               </a:p>
               <a:p>
                 <a:pPr lvl="0" indent="0" marL="0">
                   <a:buNone/>
                 </a:pPr>
-                <a14:m>
-                  <m:oMathPara xmlns:m="http://schemas.openxmlformats.org/officeDocument/2006/math">
-                    <m:oMathParaPr>
-                      <m:jc m:val="center"/>
-                    </m:oMathParaPr>
-                    <m:oMath>
-                      <m:r>
-                        <m:t>Y</m:t>
-                      </m:r>
-                      <m:r>
-                        <m:rPr>
-                          <m:sty m:val="p"/>
-                        </m:rPr>
-                        <m:t>=</m:t>
-                      </m:r>
-                      <m:r>
-                        <m:t>α</m:t>
-                      </m:r>
-                      <m:r>
-                        <m:rPr>
-                          <m:sty m:val="p"/>
-                        </m:rPr>
-                        <m:t>+</m:t>
-                      </m:r>
-                      <m:r>
-                        <m:t>β</m:t>
-                      </m:r>
-                      <m:r>
-                        <m:t>X</m:t>
-                      </m:r>
-                      <m:r>
-                        <m:rPr>
-                          <m:sty m:val="p"/>
-                        </m:rPr>
-                        <m:t>+</m:t>
-                      </m:r>
-                      <m:r>
-                        <m:t>ε</m:t>
-                      </m:r>
-                    </m:oMath>
-                  </m:oMathPara>
-                </a14:m>
-              </a:p>
-              <a:p>
-                <a:pPr lvl="0" indent="0" marL="0">
-                  <a:buNone/>
-                </a:pPr>
-                <a:r>
-                  <a:rPr/>
-                  <a:t>Where:</a:t>
-                </a:r>
-              </a:p>
-              <a:p>
-                <a:pPr lvl="0"/>
-                <a:r>
-                  <a:rPr/>
-                  <a:t>Y is the response variable</a:t>
-                </a:r>
-              </a:p>
-              <a:p>
-                <a:pPr lvl="0"/>
-                <a:r>
-                  <a:rPr/>
-                  <a:t>X is the predictor variable</a:t>
-                </a:r>
-              </a:p>
-              <a:p>
-                <a:pPr lvl="0"/>
-                <a:r>
-                  <a:rPr/>
-                  <a:t>α (alpha) is the intercept (value of Y when X=0)</a:t>
-                </a:r>
-              </a:p>
-              <a:p>
-                <a:pPr lvl="0"/>
-                <a:r>
-                  <a:rPr/>
-                  <a:t>β (beta) is the slope (change in Y per unit change in X)</a:t>
-                </a:r>
-              </a:p>
-              <a:p>
-                <a:pPr lvl="0"/>
-                <a:r>
-                  <a:rPr/>
-                  <a:t>ε (epsilon) is the error term (random deviation from the line)</a:t>
-                </a:r>
-              </a:p>
-              <a:p>
-                <a:pPr lvl="0" indent="0" marL="0">
-                  <a:buNone/>
-                </a:pPr>
                 <a:r>
                   <a:rPr/>
                   <a:t>The </a:t>
@@ -6404,65 +4605,8 @@
                 </a:r>
                 <a:r>
                   <a:rPr/>
-                  <a:t> regression equation is:</a:t>
-                </a:r>
-              </a:p>
-              <a:p>
-                <a:pPr lvl="0" indent="0" marL="0">
-                  <a:buNone/>
-                </a:pPr>
-                <a14:m>
-                  <m:oMathPara xmlns:m="http://schemas.openxmlformats.org/officeDocument/2006/math">
-                    <m:oMathParaPr>
-                      <m:jc m:val="center"/>
-                    </m:oMathParaPr>
-                    <m:oMath>
-                      <m:acc>
-                        <m:accPr>
-                          <m:chr m:val="̂"/>
-                        </m:accPr>
-                        <m:e>
-                          <m:r>
-                            <m:t>Y</m:t>
-                          </m:r>
-                        </m:e>
-                      </m:acc>
-                      <m:r>
-                        <m:rPr>
-                          <m:sty m:val="p"/>
-                        </m:rPr>
-                        <m:t>=</m:t>
-                      </m:r>
-                      <m:r>
-                        <m:t>a</m:t>
-                      </m:r>
-                      <m:r>
-                        <m:rPr>
-                          <m:sty m:val="p"/>
-                        </m:rPr>
-                        <m:t>+</m:t>
-                      </m:r>
-                      <m:r>
-                        <m:t>b</m:t>
-                      </m:r>
-                      <m:r>
-                        <m:t>X</m:t>
-                      </m:r>
-                    </m:oMath>
-                  </m:oMathPara>
-                </a14:m>
-              </a:p>
-              <a:p>
-                <a:pPr lvl="0" indent="0" marL="0">
-                  <a:buNone/>
-                </a:pPr>
-                <a:r>
-                  <a:rPr/>
-                  <a:t>Where:</a:t>
-                </a:r>
-              </a:p>
-              <a:p>
-                <a:pPr lvl="0"/>
+                  <a:t> regression equation is: </a:t>
+                </a:r>
                 <a14:m>
                   <m:oMath xmlns:m="http://schemas.openxmlformats.org/officeDocument/2006/math">
                     <m:acc>
@@ -6475,22 +4619,67 @@
                         </m:r>
                       </m:e>
                     </m:acc>
+                    <m:r>
+                      <m:rPr>
+                        <m:sty m:val="p"/>
+                      </m:rPr>
+                      <m:t>=</m:t>
+                    </m:r>
+                    <m:r>
+                      <m:t>a</m:t>
+                    </m:r>
+                    <m:r>
+                      <m:rPr>
+                        <m:sty m:val="p"/>
+                      </m:rPr>
+                      <m:t>+</m:t>
+                    </m:r>
+                    <m:r>
+                      <m:t>b</m:t>
+                    </m:r>
+                    <m:r>
+                      <m:t>X</m:t>
+                    </m:r>
                   </m:oMath>
                 </a14:m>
+              </a:p>
+              <a:p>
+                <a:pPr lvl="0"/>
+                <a:r>
+                  <a:rPr/>
+                  <a:t>Where:</a:t>
+                </a:r>
+              </a:p>
+              <a:p>
+                <a:pPr lvl="1"/>
+                <a14:m>
+                  <m:oMath xmlns:m="http://schemas.openxmlformats.org/officeDocument/2006/math">
+                    <m:acc>
+                      <m:accPr>
+                        <m:chr m:val="̂"/>
+                      </m:accPr>
+                      <m:e>
+                        <m:r>
+                          <m:t>Y</m:t>
+                        </m:r>
+                      </m:e>
+                    </m:acc>
+                  </m:oMath>
+                </a14:m>
                 <a:r>
                   <a:rPr/>
                   <a:t> is the predicted value of Y</a:t>
                 </a:r>
               </a:p>
               <a:p>
-                <a:pPr lvl="0"/>
+                <a:pPr lvl="1"/>
                 <a:r>
                   <a:rPr/>
                   <a:t>a is the estimate of α (intercept)</a:t>
                 </a:r>
               </a:p>
               <a:p>
-                <a:pPr lvl="0"/>
+                <a:pPr lvl="1"/>
                 <a:r>
                   <a:rPr/>
                   <a:t>b is the estimate of β (slope)</a:t>
@@ -6704,43 +4893,1038 @@
                 </a:pPr>
                 <a:r>
                   <a:rPr/>
-                  <a:t>This means: - When a lion has no black on its nose (proportion = 0), its predicted age is 0.88 years - For each 0.1 increase in the proportion of black, age increases by 1.065 years - The slope (10.65) indicates that lions with more black on their noses tend to be older</a:t>
+                  <a:t>This means:</a:t>
+                </a:r>
+              </a:p>
+              <a:p>
+                <a:pPr lvl="0"/>
+                <a:r>
+                  <a:rPr/>
+                  <a:t>When a lion has no black on its nose (proportion = 0), its predicted age is 0.88 years</a:t>
+                </a:r>
+              </a:p>
+              <a:p>
+                <a:pPr lvl="0"/>
+                <a:r>
+                  <a:rPr/>
+                  <a:t>For each 0.1 increase in the proportion of black, age increases by 1.065 years</a:t>
+                </a:r>
+              </a:p>
+              <a:p>
+                <a:pPr lvl="0"/>
+                <a:r>
+                  <a:rPr/>
+                  <a:t>The slope (10.65) indicates that lions with more black on their noses tend to be older</a:t>
                 </a:r>
               </a:p>
             </p:txBody>
           </p:sp>
         </mc:Choice>
       </mc:AlternateContent>
-      <p:pic>
-        <p:nvPicPr>
-          <p:cNvPr descr="09_01_lecture_powerpoint_files/figure-pptx/overview-plot-1q-1.png" id="0" name="Picture 1"/>
-          <p:cNvPicPr>
-            <a:picLocks noGrp="1" noChangeAspect="1"/>
-          </p:cNvPicPr>
-          <p:nvPr/>
-        </p:nvPicPr>
-        <p:blipFill>
-          <a:blip r:embed="rId2"/>
-          <a:stretch>
-            <a:fillRect/>
-          </a:stretch>
-        </p:blipFill>
-        <p:spPr bwMode="auto">
-          <a:xfrm>
-            <a:off x="6121400" y="2044700"/>
-            <a:ext cx="2781300" cy="1714500"/>
-          </a:xfrm>
-          <a:prstGeom prst="rect">
-            <a:avLst/>
-          </a:prstGeom>
-          <a:noFill/>
-          <a:ln w="9525">
-            <a:noFill/>
-            <a:headEnd/>
-            <a:tailEnd/>
-          </a:ln>
-        </p:spPr>
-      </p:pic>
+      <p:sp>
+        <p:nvSpPr>
+          <p:cNvPr id="4" name="Content Placeholder 3"/>
+          <p:cNvSpPr>
+            <a:spLocks noGrp="1"/>
+          </p:cNvSpPr>
+          <p:nvPr>
+            <p:ph idx="2" sz="half"/>
+          </p:nvPr>
+        </p:nvSpPr>
+        <p:spPr/>
+        <p:txBody>
+          <a:bodyPr/>
+          <a:lstStyle/>
+          <a:p>
+            <a:pPr lvl="0" indent="0">
+              <a:buNone/>
+            </a:pPr>
+            <a:r>
+              <a:rPr>
+                <a:latin typeface="Courier"/>
+              </a:rPr>
+              <a:t>$data
+# A tibble: 32 × 2
+   proportion_black age_years
+              &lt;dbl&gt;     &lt;dbl&gt;
+ 1             0.21       1.1
+ 2             0.14       1.5
+ 3             0.11       1.9
+ 4             0.13       2.2
+ 5             0.12       2.6
+ 6             0.13       3.2
+ 7             0.12       3.2
+ 8             0.18       2.9
+ 9             0.23       2.4
+10             0.22       2.1
+# ℹ 22 more rows
+$layers
+$layers[[1]]
+geom_point: na.rm = FALSE
+stat_identity: na.rm = FALSE
+position_identity 
+$layers[[2]]
+geom_smooth: se = FALSE, na.rm = FALSE, orientation = NA
+stat_smooth: method = lm, formula = NULL, se = FALSE, n = 80, fullrange = TRUE, level = 0.95, na.rm = FALSE, orientation = NA, method.args = list(), span = 0.75, xseq = c(-0.1, 1)
+position_identity 
+$layers[[3]]
+mapping: x = ~proportion_black[10], y = ~age_years[10], xend = ~proportion_black[10], yend = ~predict(lion_model)[10] 
+geom_segment: arrow = NULL, arrow.fill = NULL, lineend = butt, linejoin = round, na.rm = FALSE
+stat_identity: na.rm = FALSE
+position_identity 
+$layers[[4]]
+mapping: x = ~x, y = ~y 
+geom_text: na.rm = FALSE
+stat_identity: na.rm = FALSE
+position_identity 
+$layers[[5]]
+mapping: x = ~x, y = ~y 
+geom_text: na.rm = FALSE
+stat_identity: na.rm = FALSE
+position_identity 
+$layers[[6]]
+mapping: x = ~x, y = ~y 
+geom_text: na.rm = FALSE
+stat_identity: na.rm = FALSE
+position_identity 
+$layers[[7]]
+mapping: x = ~x, y = ~y 
+geom_text: na.rm = FALSE
+stat_identity: na.rm = FALSE
+position_identity 
+$scales
+&lt;ggproto object: Class ScalesList, gg&gt;
+    add: function
+    add_defaults: function
+    add_missing: function
+    backtransform_df: function
+    clone: function
+    find: function
+    get_scales: function
+    has_scale: function
+    input: function
+    map_df: function
+    n: function
+    non_position_scales: function
+    scales: list
+    set_palettes: function
+    train_df: function
+    transform_df: function
+    super:  &lt;ggproto object: Class ScalesList, gg&gt;
+$guides
+&lt;Guides[0] ggproto object&gt;
+&lt;empty&gt;
+$mapping
+$x
+&lt;quosure&gt;
+expr: ^proportion_black
+env:  global
+$y
+&lt;quosure&gt;
+expr: ^age_years
+env:  global
+attr(,"class")
+[1] "uneval"
+$theme
+$line
+$colour
+[1] "black"
+$linewidth
+[1] 0.5
+$linetype
+[1] 1
+$lineend
+[1] "butt"
+$arrow
+[1] FALSE
+$inherit.blank
+[1] TRUE
+attr(,"class")
+[1] "element_line" "element"     
+$rect
+$fill
+[1] "white"
+$colour
+[1] "black"
+$linewidth
+[1] 0.5
+$linetype
+[1] 1
+$inherit.blank
+[1] TRUE
+attr(,"class")
+[1] "element_rect" "element"     
+$text
+$family
+[1] ""
+$face
+[1] "plain"
+$colour
+[1] "black"
+$size
+[1] 11
+$hjust
+[1] 0.5
+$vjust
+[1] 0.5
+$angle
+[1] 0
+$lineheight
+[1] 0.9
+$margin
+[1] 0points 0points 0points 0points
+$debug
+[1] FALSE
+$inherit.blank
+[1] TRUE
+attr(,"class")
+[1] "element_text" "element"     
+$title
+NULL
+$aspect.ratio
+NULL
+$axis.title
+NULL
+$axis.title.x
+$family
+NULL
+$face
+NULL
+$colour
+NULL
+$size
+NULL
+$hjust
+NULL
+$vjust
+[1] 1
+$angle
+NULL
+$lineheight
+NULL
+$margin
+[1] 2.75points 0points    0points    0points   
+$debug
+NULL
+$inherit.blank
+[1] TRUE
+attr(,"class")
+[1] "element_text" "element"     
+$axis.title.x.top
+$family
+NULL
+$face
+NULL
+$colour
+NULL
+$size
+NULL
+$hjust
+NULL
+$vjust
+[1] 0
+$angle
+NULL
+$lineheight
+NULL
+$margin
+[1] 0points    0points    2.75points 0points   
+$debug
+NULL
+$inherit.blank
+[1] TRUE
+attr(,"class")
+[1] "element_text" "element"     
+$axis.title.x.bottom
+NULL
+$axis.title.y
+$family
+NULL
+$face
+NULL
+$colour
+NULL
+$size
+NULL
+$hjust
+NULL
+$vjust
+[1] 1
+$angle
+[1] 90
+$lineheight
+NULL
+$margin
+[1] 0points    2.75points 0points    0points   
+$debug
+NULL
+$inherit.blank
+[1] TRUE
+attr(,"class")
+[1] "element_text" "element"     
+$axis.title.y.left
+NULL
+$axis.title.y.right
+$family
+NULL
+$face
+NULL
+$colour
+NULL
+$size
+NULL
+$hjust
+NULL
+$vjust
+[1] 1
+$angle
+[1] -90
+$lineheight
+NULL
+$margin
+[1] 0points    0points    0points    2.75points
+$debug
+NULL
+$inherit.blank
+[1] TRUE
+attr(,"class")
+[1] "element_text" "element"     
+$axis.text
+$family
+NULL
+$face
+NULL
+$colour
+[1] "grey30"
+$size
+[1] 0.8 *
+$hjust
+NULL
+$vjust
+NULL
+$angle
+NULL
+$lineheight
+NULL
+$margin
+NULL
+$debug
+NULL
+$inherit.blank
+[1] TRUE
+attr(,"class")
+[1] "element_text" "element"     
+$axis.text.x
+$family
+NULL
+$face
+NULL
+$colour
+NULL
+$size
+NULL
+$hjust
+NULL
+$vjust
+[1] 1
+$angle
+NULL
+$lineheight
+NULL
+$margin
+[1] 2.2points 0points   0points   0points  
+$debug
+NULL
+$inherit.blank
+[1] TRUE
+attr(,"class")
+[1] "element_text" "element"     
+$axis.text.x.top
+$family
+NULL
+$face
+NULL
+$colour
+NULL
+$size
+NULL
+$hjust
+NULL
+$vjust
+[1] 0
+$angle
+NULL
+$lineheight
+NULL
+$margin
+[1] 0points   0points   2.2points 0points  
+$debug
+NULL
+$inherit.blank
+[1] TRUE
+attr(,"class")
+[1] "element_text" "element"     
+$axis.text.x.bottom
+NULL
+$axis.text.y
+$family
+NULL
+$face
+NULL
+$colour
+NULL
+$size
+NULL
+$hjust
+[1] 1
+$vjust
+NULL
+$angle
+NULL
+$lineheight
+NULL
+$margin
+[1] 0points   2.2points 0points   0points  
+$debug
+NULL
+$inherit.blank
+[1] TRUE
+attr(,"class")
+[1] "element_text" "element"     
+$axis.text.y.left
+NULL
+$axis.text.y.right
+$family
+NULL
+$face
+NULL
+$colour
+NULL
+$size
+NULL
+$hjust
+[1] 0
+$vjust
+NULL
+$angle
+NULL
+$lineheight
+NULL
+$margin
+[1] 0points   0points   0points   2.2points
+$debug
+NULL
+$inherit.blank
+[1] TRUE
+attr(,"class")
+[1] "element_text" "element"     
+$axis.text.theta
+NULL
+$axis.text.r
+$family
+NULL
+$face
+NULL
+$colour
+NULL
+$size
+NULL
+$hjust
+[1] 0.5
+$vjust
+NULL
+$angle
+NULL
+$lineheight
+NULL
+$margin
+[1] 0points   2.2points 0points   2.2points
+$debug
+NULL
+$inherit.blank
+[1] TRUE
+attr(,"class")
+[1] "element_text" "element"     
+$axis.ticks
+list()
+attr(,"class")
+[1] "element_blank" "element"      
+$axis.ticks.x
+NULL
+$axis.ticks.x.top
+NULL
+$axis.ticks.x.bottom
+NULL
+$axis.ticks.y
+NULL
+$axis.ticks.y.left
+NULL
+$axis.ticks.y.right
+NULL
+$axis.ticks.theta
+NULL
+$axis.ticks.r
+NULL
+$axis.minor.ticks.x.top
+NULL
+$axis.minor.ticks.x.bottom
+NULL
+$axis.minor.ticks.y.left
+NULL
+$axis.minor.ticks.y.right
+NULL
+$axis.minor.ticks.theta
+NULL
+$axis.minor.ticks.r
+NULL
+$axis.ticks.length
+[1] 2.75points
+$axis.ticks.length.x
+NULL
+$axis.ticks.length.x.top
+NULL
+$axis.ticks.length.x.bottom
+NULL
+$axis.ticks.length.y
+NULL
+$axis.ticks.length.y.left
+NULL
+$axis.ticks.length.y.right
+NULL
+$axis.ticks.length.theta
+NULL
+$axis.ticks.length.r
+NULL
+$axis.minor.ticks.length
+[1] 0.75 *
+$axis.minor.ticks.length.x
+NULL
+$axis.minor.ticks.length.x.top
+NULL
+$axis.minor.ticks.length.x.bottom
+NULL
+$axis.minor.ticks.length.y
+NULL
+$axis.minor.ticks.length.y.left
+NULL
+$axis.minor.ticks.length.y.right
+NULL
+$axis.minor.ticks.length.theta
+NULL
+$axis.minor.ticks.length.r
+NULL
+$axis.line
+list()
+attr(,"class")
+[1] "element_blank" "element"      
+$axis.line.x
+NULL
+$axis.line.x.top
+NULL
+$axis.line.x.bottom
+NULL
+$axis.line.y
+NULL
+$axis.line.y.left
+NULL
+$axis.line.y.right
+NULL
+$axis.line.theta
+NULL
+$axis.line.r
+NULL
+$legend.background
+list()
+attr(,"class")
+[1] "element_blank" "element"      
+$legend.margin
+[1] 5.5points 5.5points 5.5points 5.5points
+$legend.spacing
+[1] 11points
+$legend.spacing.x
+NULL
+$legend.spacing.y
+NULL
+$legend.key
+list()
+attr(,"class")
+[1] "element_blank" "element"      
+$legend.key.size
+[1] 1.2lines
+$legend.key.height
+NULL
+$legend.key.width
+NULL
+$legend.key.spacing
+[1] 5.5points
+$legend.key.spacing.x
+NULL
+$legend.key.spacing.y
+NULL
+$legend.frame
+NULL
+$legend.ticks
+NULL
+$legend.ticks.length
+[1] 0.2 *
+$legend.axis.line
+NULL
+$legend.text
+$family
+NULL
+$face
+NULL
+$colour
+NULL
+$size
+[1] 0.8 *
+$hjust
+NULL
+$vjust
+NULL
+$angle
+NULL
+$lineheight
+NULL
+$margin
+NULL
+$debug
+NULL
+$inherit.blank
+[1] TRUE
+attr(,"class")
+[1] "element_text" "element"     
+$legend.text.position
+NULL
+$legend.title
+$family
+NULL
+$face
+NULL
+$colour
+NULL
+$size
+NULL
+$hjust
+[1] 0
+$vjust
+NULL
+$angle
+NULL
+$lineheight
+NULL
+$margin
+NULL
+$debug
+NULL
+$inherit.blank
+[1] TRUE
+attr(,"class")
+[1] "element_text" "element"     
+$legend.title.position
+NULL
+$legend.position
+[1] "right"
+$legend.position.inside
+NULL
+$legend.direction
+NULL
+$legend.byrow
+NULL
+$legend.justification
+[1] "center"
+$legend.justification.top
+NULL
+$legend.justification.bottom
+NULL
+$legend.justification.left
+NULL
+$legend.justification.right
+NULL
+$legend.justification.inside
+NULL
+$legend.location
+NULL
+$legend.box
+NULL
+$legend.box.just
+NULL
+$legend.box.margin
+[1] 0cm 0cm 0cm 0cm
+$legend.box.background
+list()
+attr(,"class")
+[1] "element_blank" "element"      
+$legend.box.spacing
+[1] 11points
+$panel.background
+list()
+attr(,"class")
+[1] "element_blank" "element"      
+$panel.border
+list()
+attr(,"class")
+[1] "element_blank" "element"      
+$panel.spacing
+[1] 5.5points
+$panel.spacing.x
+NULL
+$panel.spacing.y
+NULL
+$panel.grid
+$colour
+[1] "grey92"
+$linewidth
+NULL
+$linetype
+NULL
+$lineend
+NULL
+$arrow
+[1] FALSE
+$inherit.blank
+[1] TRUE
+attr(,"class")
+[1] "element_line" "element"     
+$panel.grid.major
+NULL
+$panel.grid.minor
+$colour
+NULL
+$linewidth
+[1] 0.5 *
+$linetype
+NULL
+$lineend
+NULL
+$arrow
+[1] FALSE
+$inherit.blank
+[1] TRUE
+attr(,"class")
+[1] "element_line" "element"     
+$panel.grid.major.x
+NULL
+$panel.grid.major.y
+NULL
+$panel.grid.minor.x
+NULL
+$panel.grid.minor.y
+NULL
+$panel.ontop
+[1] FALSE
+$plot.background
+list()
+attr(,"class")
+[1] "element_blank" "element"      
+$plot.title
+$family
+NULL
+$face
+NULL
+$colour
+NULL
+$size
+[1] 1.2 *
+$hjust
+[1] 0
+$vjust
+[1] 1
+$angle
+NULL
+$lineheight
+NULL
+$margin
+[1] 0points   0points   5.5points 0points  
+$debug
+NULL
+$inherit.blank
+[1] TRUE
+attr(,"class")
+[1] "element_text" "element"     
+$plot.title.position
+[1] "panel"
+$plot.subtitle
+$family
+NULL
+$face
+NULL
+$colour
+NULL
+$size
+NULL
+$hjust
+[1] 0
+$vjust
+[1] 1
+$angle
+NULL
+$lineheight
+NULL
+$margin
+[1] 0points   0points   5.5points 0points  
+$debug
+NULL
+$inherit.blank
+[1] TRUE
+attr(,"class")
+[1] "element_text" "element"     
+$plot.caption
+$family
+NULL
+$face
+NULL
+$colour
+NULL
+$size
+[1] 0.8 *
+$hjust
+[1] 1
+$vjust
+[1] 1
+$angle
+NULL
+$lineheight
+NULL
+$margin
+[1] 5.5points 0points   0points   0points  
+$debug
+NULL
+$inherit.blank
+[1] TRUE
+attr(,"class")
+[1] "element_text" "element"     
+$plot.caption.position
+[1] "panel"
+$plot.tag
+$family
+NULL
+$face
+NULL
+$colour
+NULL
+$size
+[1] 1.2 *
+$hjust
+[1] 0.5
+$vjust
+[1] 0.5
+$angle
+NULL
+$lineheight
+NULL
+$margin
+NULL
+$debug
+NULL
+$inherit.blank
+[1] TRUE
+attr(,"class")
+[1] "element_text" "element"     
+$plot.tag.position
+[1] "topleft"
+$plot.tag.location
+NULL
+$plot.margin
+[1] 5.5points 5.5points 5.5points 5.5points
+$strip.background
+list()
+attr(,"class")
+[1] "element_blank" "element"      
+$strip.background.x
+NULL
+$strip.background.y
+NULL
+$strip.clip
+[1] "inherit"
+$strip.placement
+[1] "inside"
+$strip.text
+$family
+NULL
+$face
+NULL
+$colour
+[1] "grey10"
+$size
+[1] 0.8 *
+$hjust
+NULL
+$vjust
+NULL
+$angle
+NULL
+$lineheight
+NULL
+$margin
+[1] 4.4points 4.4points 4.4points 4.4points
+$debug
+NULL
+$inherit.blank
+[1] TRUE
+attr(,"class")
+[1] "element_text" "element"     
+$strip.text.x
+NULL
+$strip.text.x.bottom
+NULL
+$strip.text.x.top
+NULL
+$strip.text.y
+$family
+NULL
+$face
+NULL
+$colour
+NULL
+$size
+NULL
+$hjust
+NULL
+$vjust
+NULL
+$angle
+[1] -90
+$lineheight
+NULL
+$margin
+NULL
+$debug
+NULL
+$inherit.blank
+[1] TRUE
+attr(,"class")
+[1] "element_text" "element"     
+$strip.text.y.left
+$family
+NULL
+$face
+NULL
+$colour
+NULL
+$size
+NULL
+$hjust
+NULL
+$vjust
+NULL
+$angle
+[1] 90
+$lineheight
+NULL
+$margin
+NULL
+$debug
+NULL
+$inherit.blank
+[1] TRUE
+attr(,"class")
+[1] "element_text" "element"     
+$strip.text.y.right
+NULL
+$strip.switch.pad.grid
+[1] 2.75points
+$strip.switch.pad.wrap
+[1] 2.75points
+attr(,"class")
+[1] "theme" "gg"   
+attr(,"complete")
+[1] TRUE
+attr(,"validate")
+[1] TRUE
+$coordinates
+&lt;ggproto object: Class CoordCartesian, Coord, gg&gt;
+    aspect: function
+    backtransform_range: function
+    clip: on
+    default: FALSE
+    distance: function
+    draw_panel: function
+    expand: TRUE
+    is_free: function
+    is_linear: function
+    labels: function
+    limits: list
+    modify_scales: function
+    range: function
+    render_axis_h: function
+    render_axis_v: function
+    render_bg: function
+    render_fg: function
+    reverse: none
+    setup_data: function
+    setup_layout: function
+    setup_panel_guides: function
+    setup_panel_params: function
+    setup_params: function
+    train_panel_guides: function
+    transform: function
+    super:  &lt;ggproto object: Class CoordCartesian, Coord, gg&gt;
+$facet
+&lt;ggproto object: Class FacetNull, Facet, gg&gt;
+    attach_axes: function
+    attach_strips: function
+    compute_layout: function
+    draw_back: function
+    draw_front: function
+    draw_labels: function
+    draw_panel_content: function
+    draw_panels: function
+    finish_data: function
+    format_strip_labels: function
+    init_gtable: function
+    init_scales: function
+    map_data: function
+    params: list
+    set_panel_size: function
+    setup_data: function
+    setup_panel_params: function
+    setup_params: function
+    shrink: TRUE
+    train_scales: function
+    vars: function
+    super:  &lt;ggproto object: Class FacetNull, Facet, gg&gt;
+$plot_env
+&lt;environment: R_GlobalEnv&gt;
+$layout
+&lt;ggproto object: Class Layout, gg&gt;
+    coord: NULL
+    coord_params: list
+    facet: NULL
+    facet_params: list
+    finish_data: function
+    get_scales: function
+    layout: NULL
+    map_position: function
+    panel_params: NULL
+    panel_scales_x: NULL
+    panel_scales_y: NULL
+    render: function
+    render_labels: function
+    reset_scales: function
+    resolve_label: function
+    setup: function
+    setup_panel_guides: function
+    setup_panel_params: function
+    train_position: function
+    super:  &lt;ggproto object: Class Layout, gg&gt;
+$labels
+$labels$x
+[1] "Proportion of black on nose"
+$labels$y
+[1] "Age (years)"
+$labels$title
+[1] "Lion Age vs. Nose Blackness"
+$labels$xend
+[1] "proportion_black[10]"
+$labels$yend
+[1] "predict(lion_model)[10]"
+attr(,"class")
+[1] "gg"     "ggplot"</a:t>
+            </a:r>
+          </a:p>
+        </p:txBody>
+      </p:sp>
     </p:spTree>
   </p:cSld>
 </p:sld>
@@ -7157,12 +6341,17 @@
                 </a14:m>
               </a:p>
               <a:p>
-                <a:pPr lvl="0" indent="0" marL="0">
-                  <a:buNone/>
-                </a:pPr>
-                <a:r>
-                  <a:rPr/>
-                  <a:t>Given: - </a:t>
+                <a:pPr lvl="0"/>
+                <a:r>
+                  <a:rPr/>
+                  <a:t>Given:</a:t>
+                </a:r>
+              </a:p>
+              <a:p>
+                <a:pPr lvl="1"/>
+                <a:r>
+                  <a:rPr/>
+                  <a:t>- </a:t>
                 </a:r>
                 <a14:m>
                   <m:oMath xmlns:m="http://schemas.openxmlformats.org/officeDocument/2006/math">
@@ -7187,9 +6376,12 @@
                     </m:r>
                   </m:oMath>
                 </a14:m>
-                <a:r>
-                  <a:rPr/>
-                  <a:t> - </a:t>
+              </a:p>
+              <a:p>
+                <a:pPr lvl="1"/>
+                <a:r>
+                  <a:rPr/>
+                  <a:t>- </a:t>
                 </a:r>
                 <a14:m>
                   <m:oMath xmlns:m="http://schemas.openxmlformats.org/officeDocument/2006/math">
@@ -7214,9 +6406,12 @@
                     </m:r>
                   </m:oMath>
                 </a14:m>
-                <a:r>
-                  <a:rPr/>
-                  <a:t> - </a:t>
+              </a:p>
+              <a:p>
+                <a:pPr lvl="1"/>
+                <a:r>
+                  <a:rPr/>
+                  <a:t>- </a:t>
                 </a:r>
                 <a14:m>
                   <m:oMath xmlns:m="http://schemas.openxmlformats.org/officeDocument/2006/math">
@@ -7298,9 +6493,12 @@
                     </m:r>
                   </m:oMath>
                 </a14:m>
-                <a:r>
-                  <a:rPr/>
-                  <a:t> - </a:t>
+              </a:p>
+              <a:p>
+                <a:pPr lvl="1"/>
+                <a:r>
+                  <a:rPr/>
+                  <a:t>- </a:t>
                 </a:r>
                 <a14:m>
                   <m:oMath xmlns:m="http://schemas.openxmlformats.org/officeDocument/2006/math">
@@ -7511,6 +6709,127 @@
                     </m:r>
                   </m:oMath>
                 </a14:m>
+              </a:p>
+            </p:txBody>
+          </p:sp>
+        </mc:Choice>
+      </mc:AlternateContent>
+      <p:pic>
+        <p:nvPicPr>
+          <p:cNvPr descr="09_01_lecture_powerpoint_files/figure-pptx/overview-plot-1b-1.png" id="0" name="Picture 1"/>
+          <p:cNvPicPr>
+            <a:picLocks noGrp="1" noChangeAspect="1"/>
+          </p:cNvPicPr>
+          <p:nvPr/>
+        </p:nvPicPr>
+        <p:blipFill>
+          <a:blip r:embed="rId2"/>
+          <a:stretch>
+            <a:fillRect/>
+          </a:stretch>
+        </p:blipFill>
+        <p:spPr bwMode="auto">
+          <a:xfrm>
+            <a:off x="6121400" y="1778000"/>
+            <a:ext cx="2781300" cy="2222500"/>
+          </a:xfrm>
+          <a:prstGeom prst="rect">
+            <a:avLst/>
+          </a:prstGeom>
+          <a:noFill/>
+          <a:ln w="9525">
+            <a:noFill/>
+            <a:headEnd/>
+            <a:tailEnd/>
+          </a:ln>
+        </p:spPr>
+      </p:pic>
+    </p:spTree>
+  </p:cSld>
+</p:sld>
+</file>
+
+<file path=ppt/slides/slide19.xml><?xml version="1.0" encoding="utf-8"?>
+<p:sld xmlns:a="http://schemas.openxmlformats.org/drawingml/2006/main" xmlns:r="http://schemas.openxmlformats.org/officeDocument/2006/relationships" xmlns:p="http://schemas.openxmlformats.org/presentationml/2006/main">
+  <p:cSld>
+    <p:spTree>
+      <p:nvGrpSpPr>
+        <p:cNvPr id="1" name=""/>
+        <p:cNvGrpSpPr/>
+        <p:nvPr/>
+      </p:nvGrpSpPr>
+      <p:grpSpPr>
+        <a:xfrm>
+          <a:off x="0" y="0"/>
+          <a:ext cx="0" cy="0"/>
+          <a:chOff x="0" y="0"/>
+          <a:chExt cx="0" cy="0"/>
+        </a:xfrm>
+      </p:grpSpPr>
+      <p:sp>
+        <p:nvSpPr>
+          <p:cNvPr id="2" name="Title 1"/>
+          <p:cNvSpPr>
+            <a:spLocks noGrp="1"/>
+          </p:cNvSpPr>
+          <p:nvPr>
+            <p:ph type="title"/>
+          </p:nvPr>
+        </p:nvSpPr>
+        <p:spPr>
+          <a:xfrm>
+            <a:off x="0" y="0"/>
+            <a:ext cx="9144000" cy="602780"/>
+          </a:xfrm>
+          <a:solidFill>
+            <a:srgbClr val="70121D"/>
+          </a:solidFill>
+        </p:spPr>
+        <p:txBody>
+          <a:bodyPr/>
+          <a:lstStyle/>
+          <a:p>
+            <a:pPr lvl="0" indent="0" marL="0">
+              <a:buNone/>
+            </a:pPr>
+            <a:r>
+              <a:rPr b="1"/>
+              <a:t>Lecture 9:</a:t>
+            </a:r>
+            <a:r>
+              <a:rPr/>
+              <a:t> Linear Regression</a:t>
+            </a:r>
+          </a:p>
+        </p:txBody>
+      </p:sp>
+      <mc:AlternateContent xmlns:mc="http://schemas.openxmlformats.org/markup-compatibility/2006">
+        <mc:Choice xmlns:a14="http://schemas.microsoft.com/office/drawing/2010/main" Requires="a14">
+          <p:sp>
+            <p:nvSpPr>
+              <p:cNvPr id="3" name="Content Placeholder 2"/>
+              <p:cNvSpPr>
+                <a:spLocks noGrp="1"/>
+              </p:cNvSpPr>
+              <p:nvPr>
+                <p:ph idx="1" sz="half"/>
+              </p:nvPr>
+            </p:nvSpPr>
+            <p:spPr/>
+            <p:txBody>
+              <a:bodyPr/>
+              <a:lstStyle/>
+              <a:p>
+                <a:pPr lvl="0" indent="0" marL="0">
+                  <a:spcBef>
+                    <a:spcPts val="3000"/>
+                  </a:spcBef>
+                  <a:buNone/>
+                </a:pPr>
+                <a:r>
+                  <a:rPr b="1"/>
+                  <a:t>Simple Linear Regression Model</a:t>
+                </a:r>
               </a:p>
               <a:p>
                 <a:pPr lvl="0" indent="0" marL="0">
@@ -7665,7 +6984,7 @@
       </mc:AlternateContent>
       <p:pic>
         <p:nvPicPr>
-          <p:cNvPr descr="09_01_lecture_powerpoint_files/figure-pptx/overview-plot-1b-1.png" id="0" name="Picture 1"/>
+          <p:cNvPr descr="09_01_lecture_powerpoint_files/figure-pptx/overview-plot-1bb-1.png" id="0" name="Picture 1"/>
           <p:cNvPicPr>
             <a:picLocks noGrp="1" noChangeAspect="1"/>
           </p:cNvPicPr>
@@ -7693,176 +7012,6 @@
           </a:ln>
         </p:spPr>
       </p:pic>
-    </p:spTree>
-  </p:cSld>
-</p:sld>
-</file>
-
-<file path=ppt/slides/slide19.xml><?xml version="1.0" encoding="utf-8"?>
-<p:sld xmlns:a="http://schemas.openxmlformats.org/drawingml/2006/main" xmlns:r="http://schemas.openxmlformats.org/officeDocument/2006/relationships" xmlns:p="http://schemas.openxmlformats.org/presentationml/2006/main">
-  <p:cSld>
-    <p:spTree>
-      <p:nvGrpSpPr>
-        <p:cNvPr id="1" name=""/>
-        <p:cNvGrpSpPr/>
-        <p:nvPr/>
-      </p:nvGrpSpPr>
-      <p:grpSpPr>
-        <a:xfrm>
-          <a:off x="0" y="0"/>
-          <a:ext cx="0" cy="0"/>
-          <a:chOff x="0" y="0"/>
-          <a:chExt cx="0" cy="0"/>
-        </a:xfrm>
-      </p:grpSpPr>
-      <p:sp>
-        <p:nvSpPr>
-          <p:cNvPr id="2" name="Title 1"/>
-          <p:cNvSpPr>
-            <a:spLocks noGrp="1"/>
-          </p:cNvSpPr>
-          <p:nvPr>
-            <p:ph type="title"/>
-          </p:nvPr>
-        </p:nvSpPr>
-        <p:spPr>
-          <a:xfrm>
-            <a:off x="0" y="0"/>
-            <a:ext cx="9144000" cy="582780"/>
-          </a:xfrm>
-        </p:spPr>
-        <p:txBody>
-          <a:bodyPr/>
-          <a:lstStyle/>
-          <a:p>
-            <a:pPr lvl="0" indent="0" marL="0">
-              <a:buNone/>
-            </a:pPr>
-            <a:r>
-              <a:rPr b="1"/>
-              <a:t>Lecture 9:</a:t>
-            </a:r>
-            <a:r>
-              <a:rPr/>
-              <a:t> Linear Regression</a:t>
-            </a:r>
-          </a:p>
-        </p:txBody>
-      </p:sp>
-      <p:sp>
-        <p:nvSpPr>
-          <p:cNvPr id="3" name="Content Placeholder 2"/>
-          <p:cNvSpPr>
-            <a:spLocks noGrp="1"/>
-          </p:cNvSpPr>
-          <p:nvPr>
-            <p:ph idx="1"/>
-          </p:nvPr>
-        </p:nvSpPr>
-        <p:spPr/>
-        <p:txBody>
-          <a:bodyPr/>
-          <a:lstStyle/>
-          <a:p>
-            <a:pPr lvl="0" indent="0" marL="0">
-              <a:spcBef>
-                <a:spcPts val="3000"/>
-              </a:spcBef>
-              <a:buNone/>
-            </a:pPr>
-            <a:r>
-              <a:rPr b="1"/>
-              <a:t>Example Prairie Home Companion</a:t>
-            </a:r>
-          </a:p>
-          <a:p>
-            <a:pPr lvl="0"/>
-            <a:r>
-              <a:rPr/>
-              <a:t>Does biodiversity affect ecosystem stability?</a:t>
-            </a:r>
-          </a:p>
-          <a:p>
-            <a:pPr lvl="0"/>
-            <a:r>
-              <a:rPr/>
-              <a:t>Tilman et al. (2006) investigated using experimental plots varying plant species</a:t>
-            </a:r>
-          </a:p>
-          <a:p>
-            <a:pPr lvl="0" indent="0">
-              <a:buNone/>
-            </a:pPr>
-            <a:r>
-              <a:rPr>
-                <a:latin typeface="Courier"/>
-              </a:rPr>
-              <a:t># A tibble: 6 × 2
-  species_number log_stability
-           &lt;dbl&gt;         &lt;dbl&gt;
-1              1         0.763
-2              1         1.45 
-3              1         1.51 
-4              1         0.747
-5              1         0.983
-6              1         1.12 </a:t>
-            </a:r>
-          </a:p>
-          <a:p>
-            <a:pPr lvl="0" indent="0">
-              <a:buNone/>
-            </a:pPr>
-            <a:r>
-              <a:rPr>
-                <a:latin typeface="Courier"/>
-              </a:rPr>
-              <a:t>
-Call:
-lm(formula = log_stability ~ species_number, data = prairie_data)
-Residuals:
-     Min       1Q   Median       3Q      Max 
--0.82774 -0.25344 -0.00426  0.27498  0.75240 
-Coefficients:
-               Estimate Std. Error t value Pr(&gt;|t|)    
-(Intercept)    1.252629   0.041023  30.535  &lt; 2e-16 ***
-species_number 0.025984   0.004926   5.275 4.28e-07 ***
----
-Signif. codes:  0 '***' 0.001 '**' 0.01 '*' 0.05 '.' 0.1 ' ' 1
-Residual standard error: 0.3433 on 159 degrees of freedom
-Multiple R-squared:  0.149, Adjusted R-squared:  0.1436 
-F-statistic: 27.83 on 1 and 159 DF,  p-value: 4.276e-07</a:t>
-            </a:r>
-          </a:p>
-          <a:p>
-            <a:pPr lvl="0" indent="0">
-              <a:buNone/>
-            </a:pPr>
-            <a:r>
-              <a:rPr>
-                <a:latin typeface="Courier"/>
-              </a:rPr>
-              <a:t>[1] "rsquared is:  0.148953385305455"</a:t>
-            </a:r>
-          </a:p>
-          <a:p>
-            <a:pPr lvl="0" indent="0">
-              <a:buNone/>
-            </a:pPr>
-            <a:r>
-              <a:rPr>
-                <a:latin typeface="Courier"/>
-              </a:rPr>
-              <a:t>Analysis of Variance Table
-Response: log_stability
-                Df  Sum Sq Mean Sq F value    Pr(&gt;F)    
-species_number   1  3.2792  3.2792  27.829 4.276e-07 ***
-Residuals      159 18.7358  0.1178                      
----
-Signif. codes:  0 '***' 0.001 '**' 0.01 '*' 0.05 '.' 0.1 ' ' 1</a:t>
-            </a:r>
-          </a:p>
-        </p:txBody>
-      </p:sp>
     </p:spTree>
   </p:cSld>
 </p:sld>
@@ -8069,11 +7218,8 @@
         <p:spPr>
           <a:xfrm>
             <a:off x="0" y="0"/>
-            <a:ext cx="9144000" cy="602780"/>
+            <a:ext cx="9144000" cy="582780"/>
           </a:xfrm>
-          <a:solidFill>
-            <a:srgbClr val="70121D"/>
-          </a:solidFill>
         </p:spPr>
         <p:txBody>
           <a:bodyPr/>
@@ -8093,203 +7239,90 @@
           </a:p>
         </p:txBody>
       </p:sp>
-      <mc:AlternateContent xmlns:mc="http://schemas.openxmlformats.org/markup-compatibility/2006">
-        <mc:Choice xmlns:a14="http://schemas.microsoft.com/office/drawing/2010/main" Requires="a14">
-          <p:sp>
-            <p:nvSpPr>
-              <p:cNvPr id="3" name="Content Placeholder 2"/>
-              <p:cNvSpPr>
-                <a:spLocks noGrp="1"/>
-              </p:cNvSpPr>
-              <p:nvPr>
-                <p:ph idx="1" sz="half"/>
-              </p:nvPr>
-            </p:nvSpPr>
-            <p:spPr/>
-            <p:txBody>
-              <a:bodyPr/>
-              <a:lstStyle/>
-              <a:p>
-                <a:pPr lvl="0" indent="0" marL="0">
-                  <a:buNone/>
-                </a:pPr>
-                <a:r>
-                  <a:rPr/>
-                  <a:t>The hypothesis test asks whether the slope equals zero:</a:t>
-                </a:r>
-              </a:p>
-              <a:p>
-                <a:pPr lvl="0"/>
-                <a:r>
-                  <a:rPr/>
-                  <a:t>H₀: β = 0 (species number does not affect stability)</a:t>
-                </a:r>
-              </a:p>
-              <a:p>
-                <a:pPr lvl="0"/>
-                <a:r>
-                  <a:rPr/>
-                  <a:t>H₁: β ≠ 0 (species number does affect stability)</a:t>
-                </a:r>
-              </a:p>
-              <a:p>
-                <a:pPr lvl="0" indent="0" marL="0">
-                  <a:spcBef>
-                    <a:spcPts val="3000"/>
-                  </a:spcBef>
-                  <a:buNone/>
-                </a:pPr>
-                <a:r>
-                  <a:rPr b="1"/>
-                  <a:t>The test statistic is: </a:t>
-                </a:r>
-                <a14:m>
-                  <m:oMath xmlns:m="http://schemas.openxmlformats.org/officeDocument/2006/math">
-                    <m:r>
-                      <m:t>t</m:t>
-                    </m:r>
-                    <m:r>
-                      <m:rPr>
-                        <m:sty m:val="p"/>
-                      </m:rPr>
-                      <m:t>=</m:t>
-                    </m:r>
-                    <m:f>
-                      <m:fPr>
-                        <m:type m:val="bar"/>
-                      </m:fPr>
-                      <m:num>
-                        <m:r>
-                          <m:t>b</m:t>
-                        </m:r>
-                        <m:r>
-                          <m:rPr>
-                            <m:sty m:val="p"/>
-                          </m:rPr>
-                          <m:t>−</m:t>
-                        </m:r>
-                        <m:sSub>
-                          <m:e>
-                            <m:r>
-                              <m:t>β</m:t>
-                            </m:r>
-                          </m:e>
-                          <m:sub>
-                            <m:r>
-                              <m:t>0</m:t>
-                            </m:r>
-                          </m:sub>
-                        </m:sSub>
-                      </m:num>
-                      <m:den>
-                        <m:r>
-                          <m:t>S</m:t>
-                        </m:r>
-                        <m:sSub>
-                          <m:e>
-                            <m:r>
-                              <m:t>E</m:t>
-                            </m:r>
-                          </m:e>
-                          <m:sub>
-                            <m:r>
-                              <m:t>b</m:t>
-                            </m:r>
-                          </m:sub>
-                        </m:sSub>
-                      </m:den>
-                    </m:f>
-                  </m:oMath>
-                </a14:m>
-              </a:p>
-              <a:p>
-                <a:pPr lvl="0" indent="0" marL="0">
-                  <a:buNone/>
-                </a:pPr>
-                <a:r>
-                  <a:rPr/>
-                  <a:t>With df = n - 2 = 161 - 2 = 159</a:t>
-                </a:r>
-              </a:p>
-              <a:p>
-                <a:pPr lvl="0" indent="0" marL="0">
-                  <a:buNone/>
-                </a:pPr>
-                <a:r>
-                  <a:rPr b="1"/>
-                  <a:t>Interpretation:</a:t>
-                </a:r>
-              </a:p>
-              <a:p>
-                <a:pPr lvl="0" indent="0" marL="0">
-                  <a:buNone/>
-                </a:pPr>
-                <a:r>
-                  <a:rPr/>
-                  <a:t>The slope estimate is 0.033, indicating that log stability increases by 0.033 units for each additional plant species in the plot.</a:t>
-                </a:r>
-              </a:p>
-              <a:p>
-                <a:pPr lvl="0" indent="0" marL="0">
-                  <a:buNone/>
-                </a:pPr>
-                <a:r>
-                  <a:rPr/>
-                  <a:t>The p-value is very small (2.73e-10), providing strong evidence to reject the null hypothesis that species number has no effect on ecosystem stability.</a:t>
-                </a:r>
-              </a:p>
-              <a:p>
-                <a:pPr lvl="0" indent="0" marL="0">
-                  <a:buNone/>
-                </a:pPr>
-                <a:r>
-                  <a:rPr/>
-                  <a:t>R² = 0.222, meaning that approximately 22.2% of the variation in log stability is explained by the number of plant species.</a:t>
-                </a:r>
-              </a:p>
-              <a:p>
-                <a:pPr lvl="0" indent="0" marL="0">
-                  <a:buNone/>
-                </a:pPr>
-                <a:r>
-                  <a:rPr/>
-                  <a:t>This supports the biodiversity-stability hypothesis: more diverse plant communities have more stable biomass production over time.</a:t>
-                </a:r>
-              </a:p>
-            </p:txBody>
-          </p:sp>
-        </mc:Choice>
-      </mc:AlternateContent>
-      <p:pic>
-        <p:nvPicPr>
-          <p:cNvPr descr="09_01_lecture_powerpoint_files/figure-pptx/overview-plot-1d-1.png" id="0" name="Picture 1"/>
-          <p:cNvPicPr>
-            <a:picLocks noGrp="1" noChangeAspect="1"/>
-          </p:cNvPicPr>
-          <p:nvPr/>
-        </p:nvPicPr>
-        <p:blipFill>
-          <a:blip r:embed="rId2"/>
-          <a:stretch>
-            <a:fillRect/>
-          </a:stretch>
-        </p:blipFill>
-        <p:spPr bwMode="auto">
-          <a:xfrm>
-            <a:off x="6121400" y="2044700"/>
-            <a:ext cx="2781300" cy="1714500"/>
-          </a:xfrm>
-          <a:prstGeom prst="rect">
-            <a:avLst/>
-          </a:prstGeom>
-          <a:noFill/>
-          <a:ln w="9525">
-            <a:noFill/>
-            <a:headEnd/>
-            <a:tailEnd/>
-          </a:ln>
-        </p:spPr>
-      </p:pic>
+      <p:sp>
+        <p:nvSpPr>
+          <p:cNvPr id="3" name="Content Placeholder 2"/>
+          <p:cNvSpPr>
+            <a:spLocks noGrp="1"/>
+          </p:cNvSpPr>
+          <p:nvPr>
+            <p:ph idx="1"/>
+          </p:nvPr>
+        </p:nvSpPr>
+        <p:spPr/>
+        <p:txBody>
+          <a:bodyPr/>
+          <a:lstStyle/>
+          <a:p>
+            <a:pPr lvl="0" indent="0" marL="0">
+              <a:spcBef>
+                <a:spcPts val="3000"/>
+              </a:spcBef>
+              <a:buNone/>
+            </a:pPr>
+            <a:r>
+              <a:rPr b="1"/>
+              <a:t>Example Prairie Home Companion</a:t>
+            </a:r>
+          </a:p>
+          <a:p>
+            <a:pPr lvl="0"/>
+            <a:r>
+              <a:rPr/>
+              <a:t>Does biodiversity affect ecosystem stability?</a:t>
+            </a:r>
+          </a:p>
+          <a:p>
+            <a:pPr lvl="0"/>
+            <a:r>
+              <a:rPr/>
+              <a:t>Tilman et al. (2006) investigated using experimental plots varying plant species</a:t>
+            </a:r>
+          </a:p>
+          <a:p>
+            <a:pPr lvl="0" indent="0">
+              <a:buNone/>
+            </a:pPr>
+            <a:r>
+              <a:rPr>
+                <a:latin typeface="Courier"/>
+              </a:rPr>
+              <a:t>
+Call:
+lm(formula = log_stability ~ species_number, data = prairie_data)
+Residuals:
+     Min       1Q   Median       3Q      Max 
+-0.82774 -0.25344 -0.00426  0.27498  0.75240 
+Coefficients:
+               Estimate Std. Error t value Pr(&gt;|t|)    
+(Intercept)    1.252629   0.041023  30.535  &lt; 2e-16 ***
+species_number 0.025984   0.004926   5.275 4.28e-07 ***
+---
+Signif. codes:  0 '***' 0.001 '**' 0.01 '*' 0.05 '.' 0.1 ' ' 1
+Residual standard error: 0.3433 on 159 degrees of freedom
+Multiple R-squared:  0.149, Adjusted R-squared:  0.1436 
+F-statistic: 27.83 on 1 and 159 DF,  p-value: 4.276e-07</a:t>
+            </a:r>
+          </a:p>
+          <a:p>
+            <a:pPr lvl="0" indent="0">
+              <a:buNone/>
+            </a:pPr>
+            <a:r>
+              <a:rPr>
+                <a:latin typeface="Courier"/>
+              </a:rPr>
+              <a:t>Analysis of Variance Table
+Response: log_stability
+                Df  Sum Sq Mean Sq F value    Pr(&gt;F)    
+species_number   1  3.2792  3.2792  27.829 4.276e-07 ***
+Residuals      159 18.7358  0.1178                      
+---
+Signif. codes:  0 '***' 0.001 '**' 0.01 '*' 0.05 '.' 0.1 ' ' 1</a:t>
+            </a:r>
+          </a:p>
+        </p:txBody>
+      </p:sp>
     </p:spTree>
   </p:cSld>
 </p:sld>
@@ -8349,209 +7382,102 @@
           </a:p>
         </p:txBody>
       </p:sp>
-      <mc:AlternateContent xmlns:mc="http://schemas.openxmlformats.org/markup-compatibility/2006">
-        <mc:Choice xmlns:a14="http://schemas.microsoft.com/office/drawing/2010/main" Requires="a14">
-          <p:sp>
-            <p:nvSpPr>
-              <p:cNvPr id="3" name="Content Placeholder 2"/>
-              <p:cNvSpPr>
-                <a:spLocks noGrp="1"/>
-              </p:cNvSpPr>
-              <p:nvPr>
-                <p:ph idx="1" sz="half"/>
-              </p:nvPr>
-            </p:nvSpPr>
-            <p:spPr/>
-            <p:txBody>
-              <a:bodyPr/>
-              <a:lstStyle/>
-              <a:p>
-                <a:pPr lvl="0" indent="0" marL="0">
-                  <a:spcBef>
-                    <a:spcPts val="3000"/>
-                  </a:spcBef>
-                  <a:buNone/>
-                </a:pPr>
-                <a:r>
-                  <a:rPr b="1"/>
-                  <a:t>Testing Regression Assumptions</a:t>
-                </a:r>
-              </a:p>
-              <a:p>
-                <a:pPr lvl="0" indent="0" marL="0">
-                  <a:buNone/>
-                </a:pPr>
-                <a:r>
-                  <a:rPr/>
-                  <a:t>linear regression has four key assumptions:</a:t>
-                </a:r>
-              </a:p>
-              <a:p>
-                <a:pPr lvl="0" indent="-342900" marL="342900">
-                  <a:buAutoNum type="arabicPeriod"/>
-                </a:pPr>
-                <a:r>
-                  <a:rPr b="1"/>
-                  <a:t>Linearity</a:t>
-                </a:r>
-                <a:r>
-                  <a:rPr/>
-                  <a:t>: The relationship between X and Y is linear</a:t>
-                </a:r>
-              </a:p>
-              <a:p>
-                <a:pPr lvl="0" indent="-342900" marL="342900">
-                  <a:buAutoNum type="arabicPeriod"/>
-                </a:pPr>
-                <a:r>
-                  <a:rPr b="1"/>
-                  <a:t>Independence</a:t>
-                </a:r>
-                <a:r>
-                  <a:rPr/>
-                  <a:t>: Observations are independent</a:t>
-                </a:r>
-              </a:p>
-              <a:p>
-                <a:pPr lvl="0" indent="-342900" marL="342900">
-                  <a:buAutoNum type="arabicPeriod"/>
-                </a:pPr>
-                <a:r>
-                  <a:rPr b="1"/>
-                  <a:t>Homoscedasticity</a:t>
-                </a:r>
-                <a:r>
-                  <a:rPr/>
-                  <a:t>: Equal variance across all values of X</a:t>
-                </a:r>
-              </a:p>
-              <a:p>
-                <a:pPr lvl="0" indent="-342900" marL="342900">
-                  <a:buAutoNum type="arabicPeriod"/>
-                </a:pPr>
-                <a:r>
-                  <a:rPr b="1"/>
-                  <a:t>Normality</a:t>
-                </a:r>
-                <a:r>
-                  <a:rPr/>
-                  <a:t>: Residuals are normally distributed</a:t>
-                </a:r>
-              </a:p>
-              <a:p>
-                <a:pPr lvl="0" indent="0" marL="0">
-                  <a:buNone/>
-                </a:pPr>
-                <a:r>
-                  <a:rPr/>
-                  <a:t>Let’s check these assumptions for the lion regression model:</a:t>
-                </a:r>
-                <a:br/>
-                <a:br/>
-                <a:r>
-                  <a:rPr/>
-                  <a:t>Assume that </a:t>
-                </a:r>
-                <a:r>
-                  <a:rPr b="1"/>
-                  <a:t>error 𝞮 i</a:t>
-                </a:r>
-                <a:r>
-                  <a:rPr/>
-                  <a:t>s </a:t>
-                </a:r>
-                <a14:m>
-                  <m:oMath xmlns:m="http://schemas.openxmlformats.org/officeDocument/2006/math">
-                    <m:sSub>
-                      <m:e>
-                        <m:r>
-                          <m:t>e</m:t>
-                        </m:r>
-                      </m:e>
-                      <m:sub>
-                        <m:r>
-                          <m:t>i</m:t>
-                        </m:r>
-                      </m:sub>
-                    </m:sSub>
-                    <m:r>
-                      <m:rPr>
-                        <m:sty m:val="p"/>
-                      </m:rPr>
-                      <m:t>=</m:t>
-                    </m:r>
-                    <m:sSub>
-                      <m:e>
-                        <m:r>
-                          <m:t>y</m:t>
-                        </m:r>
-                      </m:e>
-                      <m:sub>
-                        <m:r>
-                          <m:t>i</m:t>
-                        </m:r>
-                      </m:sub>
-                    </m:sSub>
-                    <m:r>
-                      <m:rPr>
-                        <m:sty m:val="p"/>
-                      </m:rPr>
-                      <m:t>−</m:t>
-                    </m:r>
-                    <m:sSub>
-                      <m:e>
-                        <m:acc>
-                          <m:accPr>
-                            <m:chr m:val="̂"/>
-                          </m:accPr>
-                          <m:e>
-                            <m:r>
-                              <m:t>y</m:t>
-                            </m:r>
-                          </m:e>
-                        </m:acc>
-                      </m:e>
-                      <m:sub>
-                        <m:r>
-                          <m:t>i</m:t>
-                        </m:r>
-                      </m:sub>
-                    </m:sSub>
-                  </m:oMath>
-                </a14:m>
-              </a:p>
-              <a:p>
-                <a:pPr lvl="0"/>
-                <a:r>
-                  <a:rPr/>
-                  <a:t>normally distributed for each x</a:t>
-                </a:r>
-                <a:r>
-                  <a:rPr baseline="-25000"/>
-                  <a:t>i</a:t>
-                </a:r>
-              </a:p>
-              <a:p>
-                <a:pPr lvl="0"/>
-                <a:r>
-                  <a:rPr/>
-                  <a:t>has the same variance</a:t>
-                </a:r>
-              </a:p>
-              <a:p>
-                <a:pPr lvl="0"/>
-                <a:r>
-                  <a:rPr/>
-                  <a:t>has a mean of 0 at each xi</a:t>
-                </a:r>
-              </a:p>
-            </p:txBody>
-          </p:sp>
-        </mc:Choice>
-      </mc:AlternateContent>
+      <p:sp>
+        <p:nvSpPr>
+          <p:cNvPr id="3" name="Content Placeholder 2"/>
+          <p:cNvSpPr>
+            <a:spLocks noGrp="1"/>
+          </p:cNvSpPr>
+          <p:nvPr>
+            <p:ph idx="1" sz="half"/>
+          </p:nvPr>
+        </p:nvSpPr>
+        <p:spPr/>
+        <p:txBody>
+          <a:bodyPr/>
+          <a:lstStyle/>
+          <a:p>
+            <a:pPr lvl="0" indent="0" marL="0">
+              <a:buNone/>
+            </a:pPr>
+            <a:r>
+              <a:rPr/>
+              <a:t>The hypothesis test asks whether the slope equals zero:</a:t>
+            </a:r>
+          </a:p>
+          <a:p>
+            <a:pPr lvl="0"/>
+            <a:r>
+              <a:rPr/>
+              <a:t>H₀: β = 0 (species number does not affect stability)</a:t>
+            </a:r>
+          </a:p>
+          <a:p>
+            <a:pPr lvl="0"/>
+            <a:r>
+              <a:rPr/>
+              <a:t>H₁: β ≠ 0 (species number does affect stability)</a:t>
+            </a:r>
+          </a:p>
+          <a:p>
+            <a:pPr lvl="0" indent="0" marL="0">
+              <a:buNone/>
+            </a:pPr>
+            <a:r>
+              <a:rPr/>
+              <a:t>t = estimate/SE</a:t>
+            </a:r>
+          </a:p>
+          <a:p>
+            <a:pPr lvl="0" indent="0" marL="0">
+              <a:buNone/>
+            </a:pPr>
+            <a:r>
+              <a:rPr b="1"/>
+              <a:t>Interpretation:</a:t>
+            </a:r>
+          </a:p>
+          <a:p>
+            <a:pPr lvl="0" indent="0" marL="0">
+              <a:buNone/>
+            </a:pPr>
+            <a:r>
+              <a:rPr/>
+              <a:t>The slope estimate is 0.033, indicating that log stability increases by 0.033 units for each additional plant species in the plot.</a:t>
+            </a:r>
+          </a:p>
+          <a:p>
+            <a:pPr lvl="0" indent="0" marL="0">
+              <a:buNone/>
+            </a:pPr>
+            <a:r>
+              <a:rPr/>
+              <a:t>The p-value is very small (2.73e-10), providing strong evidence to reject the null hypothesis that species number has no effect on ecosystem stability.</a:t>
+            </a:r>
+          </a:p>
+          <a:p>
+            <a:pPr lvl="0" indent="0" marL="0">
+              <a:buNone/>
+            </a:pPr>
+            <a:r>
+              <a:rPr/>
+              <a:t>R² = 0.222, meaning that approximately 22.2% of the variation in log stability is explained by the number of plant species.</a:t>
+            </a:r>
+          </a:p>
+          <a:p>
+            <a:pPr lvl="0" indent="0" marL="0">
+              <a:buNone/>
+            </a:pPr>
+            <a:r>
+              <a:rPr/>
+              <a:t>This supports the biodiversity-stability hypothesis: more diverse plant communities have more stable biomass production over time.</a:t>
+            </a:r>
+          </a:p>
+        </p:txBody>
+      </p:sp>
       <p:pic>
         <p:nvPicPr>
-          <p:cNvPr descr="images/clipboard-2092034232.png" id="0" name="Picture 1"/>
+          <p:cNvPr descr="09_01_lecture_powerpoint_files/figure-pptx/overview-plot-1d-1.png" id="0" name="Picture 1"/>
           <p:cNvPicPr>
             <a:picLocks noGrp="1" noChangeAspect="1"/>
           </p:cNvPicPr>
@@ -8565,8 +7491,8 @@
         </p:blipFill>
         <p:spPr bwMode="auto">
           <a:xfrm>
-            <a:off x="6121400" y="2108200"/>
-            <a:ext cx="2781300" cy="1587500"/>
+            <a:off x="6121400" y="2044700"/>
+            <a:ext cx="2781300" cy="1714500"/>
           </a:xfrm>
           <a:prstGeom prst="rect">
             <a:avLst/>
@@ -8747,7 +7673,7 @@
                 </a:r>
                 <a:r>
                   <a:rPr/>
-                  <a:t>s - estimated as the residuals: </a:t>
+                  <a:t>s </a:t>
                 </a:r>
                 <a14:m>
                   <m:oMath xmlns:m="http://schemas.openxmlformats.org/officeDocument/2006/math">
@@ -8813,7 +7739,296 @@
                 <a:pPr lvl="0"/>
                 <a:r>
                   <a:rPr/>
-                  <a:t>ordinary lease square estimates a and b or slope and intercept to minimize the sum of the residuals squared or Mean Squared Error (MSE) as</a:t>
+                  <a:t>normally distributed for each x</a:t>
+                </a:r>
+                <a:r>
+                  <a:rPr baseline="-25000"/>
+                  <a:t>i</a:t>
+                </a:r>
+              </a:p>
+              <a:p>
+                <a:pPr lvl="0"/>
+                <a:r>
+                  <a:rPr/>
+                  <a:t>has the same variance</a:t>
+                </a:r>
+              </a:p>
+              <a:p>
+                <a:pPr lvl="0"/>
+                <a:r>
+                  <a:rPr/>
+                  <a:t>has a mean of 0 at each xi</a:t>
+                </a:r>
+              </a:p>
+            </p:txBody>
+          </p:sp>
+        </mc:Choice>
+      </mc:AlternateContent>
+      <p:pic>
+        <p:nvPicPr>
+          <p:cNvPr descr="images/clipboard-2092034232.png" id="0" name="Picture 1"/>
+          <p:cNvPicPr>
+            <a:picLocks noGrp="1" noChangeAspect="1"/>
+          </p:cNvPicPr>
+          <p:nvPr/>
+        </p:nvPicPr>
+        <p:blipFill>
+          <a:blip r:embed="rId2"/>
+          <a:stretch>
+            <a:fillRect/>
+          </a:stretch>
+        </p:blipFill>
+        <p:spPr bwMode="auto">
+          <a:xfrm>
+            <a:off x="6121400" y="2108200"/>
+            <a:ext cx="2781300" cy="1587500"/>
+          </a:xfrm>
+          <a:prstGeom prst="rect">
+            <a:avLst/>
+          </a:prstGeom>
+          <a:noFill/>
+          <a:ln w="9525">
+            <a:noFill/>
+            <a:headEnd/>
+            <a:tailEnd/>
+          </a:ln>
+        </p:spPr>
+      </p:pic>
+    </p:spTree>
+  </p:cSld>
+</p:sld>
+</file>
+
+<file path=ppt/slides/slide23.xml><?xml version="1.0" encoding="utf-8"?>
+<p:sld xmlns:a="http://schemas.openxmlformats.org/drawingml/2006/main" xmlns:r="http://schemas.openxmlformats.org/officeDocument/2006/relationships" xmlns:p="http://schemas.openxmlformats.org/presentationml/2006/main">
+  <p:cSld>
+    <p:spTree>
+      <p:nvGrpSpPr>
+        <p:cNvPr id="1" name=""/>
+        <p:cNvGrpSpPr/>
+        <p:nvPr/>
+      </p:nvGrpSpPr>
+      <p:grpSpPr>
+        <a:xfrm>
+          <a:off x="0" y="0"/>
+          <a:ext cx="0" cy="0"/>
+          <a:chOff x="0" y="0"/>
+          <a:chExt cx="0" cy="0"/>
+        </a:xfrm>
+      </p:grpSpPr>
+      <p:sp>
+        <p:nvSpPr>
+          <p:cNvPr id="2" name="Title 1"/>
+          <p:cNvSpPr>
+            <a:spLocks noGrp="1"/>
+          </p:cNvSpPr>
+          <p:nvPr>
+            <p:ph type="title"/>
+          </p:nvPr>
+        </p:nvSpPr>
+        <p:spPr>
+          <a:xfrm>
+            <a:off x="0" y="0"/>
+            <a:ext cx="9144000" cy="602780"/>
+          </a:xfrm>
+          <a:solidFill>
+            <a:srgbClr val="70121D"/>
+          </a:solidFill>
+        </p:spPr>
+        <p:txBody>
+          <a:bodyPr/>
+          <a:lstStyle/>
+          <a:p>
+            <a:pPr lvl="0" indent="0" marL="0">
+              <a:buNone/>
+            </a:pPr>
+            <a:r>
+              <a:rPr b="1"/>
+              <a:t>Lecture 9:</a:t>
+            </a:r>
+            <a:r>
+              <a:rPr/>
+              <a:t> Linear Regression</a:t>
+            </a:r>
+          </a:p>
+        </p:txBody>
+      </p:sp>
+      <mc:AlternateContent xmlns:mc="http://schemas.openxmlformats.org/markup-compatibility/2006">
+        <mc:Choice xmlns:a14="http://schemas.microsoft.com/office/drawing/2010/main" Requires="a14">
+          <p:sp>
+            <p:nvSpPr>
+              <p:cNvPr id="3" name="Content Placeholder 2"/>
+              <p:cNvSpPr>
+                <a:spLocks noGrp="1"/>
+              </p:cNvSpPr>
+              <p:nvPr>
+                <p:ph idx="1" sz="half"/>
+              </p:nvPr>
+            </p:nvSpPr>
+            <p:spPr/>
+            <p:txBody>
+              <a:bodyPr/>
+              <a:lstStyle/>
+              <a:p>
+                <a:pPr lvl="0" indent="0" marL="0">
+                  <a:spcBef>
+                    <a:spcPts val="3000"/>
+                  </a:spcBef>
+                  <a:buNone/>
+                </a:pPr>
+                <a:r>
+                  <a:rPr b="1"/>
+                  <a:t>Testing Regression Assumptions</a:t>
+                </a:r>
+              </a:p>
+              <a:p>
+                <a:pPr lvl="0" indent="0" marL="0">
+                  <a:buNone/>
+                </a:pPr>
+                <a:r>
+                  <a:rPr/>
+                  <a:t>linear regression has four key assumptions:</a:t>
+                </a:r>
+              </a:p>
+              <a:p>
+                <a:pPr lvl="0" indent="-342900" marL="342900">
+                  <a:buAutoNum type="arabicPeriod"/>
+                </a:pPr>
+                <a:r>
+                  <a:rPr b="1"/>
+                  <a:t>Linearity</a:t>
+                </a:r>
+                <a:r>
+                  <a:rPr/>
+                  <a:t>: The relationship between X and Y is linear</a:t>
+                </a:r>
+              </a:p>
+              <a:p>
+                <a:pPr lvl="0" indent="-342900" marL="342900">
+                  <a:buAutoNum type="arabicPeriod"/>
+                </a:pPr>
+                <a:r>
+                  <a:rPr b="1"/>
+                  <a:t>Independence</a:t>
+                </a:r>
+                <a:r>
+                  <a:rPr/>
+                  <a:t>: Observations are independent</a:t>
+                </a:r>
+              </a:p>
+              <a:p>
+                <a:pPr lvl="0" indent="-342900" marL="342900">
+                  <a:buAutoNum type="arabicPeriod"/>
+                </a:pPr>
+                <a:r>
+                  <a:rPr b="1"/>
+                  <a:t>Homoscedasticity</a:t>
+                </a:r>
+                <a:r>
+                  <a:rPr/>
+                  <a:t>: Equal variance across all values of X</a:t>
+                </a:r>
+              </a:p>
+              <a:p>
+                <a:pPr lvl="0" indent="-342900" marL="342900">
+                  <a:buAutoNum type="arabicPeriod"/>
+                </a:pPr>
+                <a:r>
+                  <a:rPr b="1"/>
+                  <a:t>Normality</a:t>
+                </a:r>
+                <a:r>
+                  <a:rPr/>
+                  <a:t>: Residuals are normally distributed</a:t>
+                </a:r>
+              </a:p>
+              <a:p>
+                <a:pPr lvl="0" indent="0" marL="0">
+                  <a:buNone/>
+                </a:pPr>
+                <a:r>
+                  <a:rPr/>
+                  <a:t>Let’s check these assumptions for the lion regression model:</a:t>
+                </a:r>
+                <a:br/>
+                <a:br/>
+                <a:r>
+                  <a:rPr/>
+                  <a:t>Assume that </a:t>
+                </a:r>
+                <a:r>
+                  <a:rPr b="1"/>
+                  <a:t>error 𝞮 i</a:t>
+                </a:r>
+                <a:r>
+                  <a:rPr/>
+                  <a:t>s - estimated as the residuals: </a:t>
+                </a:r>
+                <a14:m>
+                  <m:oMath xmlns:m="http://schemas.openxmlformats.org/officeDocument/2006/math">
+                    <m:sSub>
+                      <m:e>
+                        <m:r>
+                          <m:t>e</m:t>
+                        </m:r>
+                      </m:e>
+                      <m:sub>
+                        <m:r>
+                          <m:t>i</m:t>
+                        </m:r>
+                      </m:sub>
+                    </m:sSub>
+                    <m:r>
+                      <m:rPr>
+                        <m:sty m:val="p"/>
+                      </m:rPr>
+                      <m:t>=</m:t>
+                    </m:r>
+                    <m:sSub>
+                      <m:e>
+                        <m:r>
+                          <m:t>y</m:t>
+                        </m:r>
+                      </m:e>
+                      <m:sub>
+                        <m:r>
+                          <m:t>i</m:t>
+                        </m:r>
+                      </m:sub>
+                    </m:sSub>
+                    <m:r>
+                      <m:rPr>
+                        <m:sty m:val="p"/>
+                      </m:rPr>
+                      <m:t>−</m:t>
+                    </m:r>
+                    <m:sSub>
+                      <m:e>
+                        <m:acc>
+                          <m:accPr>
+                            <m:chr m:val="̂"/>
+                          </m:accPr>
+                          <m:e>
+                            <m:r>
+                              <m:t>y</m:t>
+                            </m:r>
+                          </m:e>
+                        </m:acc>
+                      </m:e>
+                      <m:sub>
+                        <m:r>
+                          <m:t>i</m:t>
+                        </m:r>
+                      </m:sub>
+                    </m:sSub>
+                  </m:oMath>
+                </a14:m>
+              </a:p>
+              <a:p>
+                <a:pPr lvl="0"/>
+                <a:r>
+                  <a:rPr/>
+                  <a:t>ordinary lease square estimates a and b or slope and intercept to minimize the sum of the residuals squared as</a:t>
                 </a:r>
               </a:p>
               <a:p>
@@ -8958,28 +8173,6 @@
 </p:sld>
 </file>
 
-<file path=ppt/slides/slide23.xml><?xml version="1.0" encoding="utf-8"?>
-<p:sld xmlns:a="http://schemas.openxmlformats.org/drawingml/2006/main" xmlns:r="http://schemas.openxmlformats.org/officeDocument/2006/relationships" xmlns:p="http://schemas.openxmlformats.org/presentationml/2006/main">
-  <p:cSld>
-    <p:spTree>
-      <p:nvGrpSpPr>
-        <p:cNvPr id="1" name=""/>
-        <p:cNvGrpSpPr/>
-        <p:nvPr/>
-      </p:nvGrpSpPr>
-      <p:grpSpPr>
-        <a:xfrm>
-          <a:off x="0" y="0"/>
-          <a:ext cx="0" cy="0"/>
-          <a:chOff x="0" y="0"/>
-          <a:chExt cx="0" cy="0"/>
-        </a:xfrm>
-      </p:grpSpPr>
-    </p:spTree>
-  </p:cSld>
-</p:sld>
-</file>
-
 <file path=ppt/slides/slide24.xml><?xml version="1.0" encoding="utf-8"?>
 <p:sld xmlns:a="http://schemas.openxmlformats.org/drawingml/2006/main" xmlns:r="http://schemas.openxmlformats.org/officeDocument/2006/relationships" xmlns:p="http://schemas.openxmlformats.org/presentationml/2006/main">
   <p:cSld>
@@ -9128,6 +8321,15 @@
             <a:r>
               <a:rPr/>
               <a:t>Let’s check these assumptions for the lion regression model:</a:t>
+            </a:r>
+          </a:p>
+          <a:p>
+            <a:pPr lvl="0" indent="0" marL="0">
+              <a:buNone/>
+            </a:pPr>
+            <a:r>
+              <a:rPr/>
+              <a:t>Linearity - how does this plot work</a:t>
             </a:r>
           </a:p>
         </p:txBody>
@@ -11901,6 +11103,9 @@
           <a:lstStyle/>
           <a:p>
             <a:pPr lvl="0" indent="0" marL="0">
+              <a:spcBef>
+                <a:spcPts val="3000"/>
+              </a:spcBef>
               <a:buNone/>
             </a:pPr>
             <a:r>
@@ -11952,6 +11157,9 @@
           </a:p>
           <a:p>
             <a:pPr lvl="0" indent="0" marL="0">
+              <a:spcBef>
+                <a:spcPts val="3000"/>
+              </a:spcBef>
               <a:buNone/>
             </a:pPr>
             <a:r>
@@ -11991,14 +11199,7 @@
             <a:pPr lvl="0"/>
             <a:r>
               <a:rPr/>
-              <a:t>Produces an equation for prediction</a:t>
-            </a:r>
-          </a:p>
-          <a:p>
-            <a:pPr lvl="0"/>
-            <a:r>
-              <a:rPr/>
-              <a:t>Estimates slope and intercept parameters</a:t>
+              <a:t>Produces an equation for prediction with slope and intercept parameters</a:t>
             </a:r>
           </a:p>
         </p:txBody>
@@ -12019,8 +11220,8 @@
         </p:blipFill>
         <p:spPr bwMode="auto">
           <a:xfrm>
-            <a:off x="6121400" y="2044700"/>
-            <a:ext cx="2781300" cy="1714500"/>
+            <a:off x="6121400" y="1155700"/>
+            <a:ext cx="2781300" cy="3479800"/>
           </a:xfrm>
           <a:prstGeom prst="rect">
             <a:avLst/>
@@ -12617,8 +11818,8 @@
         </p:blipFill>
         <p:spPr bwMode="auto">
           <a:xfrm>
-            <a:off x="6121400" y="1155700"/>
-            <a:ext cx="2781300" cy="3479800"/>
+            <a:off x="6121400" y="812800"/>
+            <a:ext cx="2781300" cy="4165600"/>
           </a:xfrm>
           <a:prstGeom prst="rect">
             <a:avLst/>
@@ -12785,7 +11986,7 @@
                 </a:pPr>
                 <a:r>
                   <a:rPr b="1"/>
-                  <a:t>Note that it is tested by: </a:t>
+                  <a:t>Note that it is tested by a t test: </a:t>
                 </a:r>
                 <a14:m>
                   <m:oMath xmlns:m="http://schemas.openxmlformats.org/officeDocument/2006/math">
@@ -12831,17 +12032,6 @@
                     </m:f>
                   </m:oMath>
                 </a14:m>
-              </a:p>
-              <a:p>
-                <a:pPr lvl="0" indent="0">
-                  <a:buNone/>
-                </a:pPr>
-                <a:r>
-                  <a:rPr>
-                    <a:latin typeface="Courier"/>
-                  </a:rPr>
-                  <a:t>[1] 0.5337225</a:t>
-                </a:r>
               </a:p>
               <a:p>
                 <a:pPr lvl="0" indent="0">
@@ -13101,8 +12291,8 @@
         </p:blipFill>
         <p:spPr bwMode="auto">
           <a:xfrm>
-            <a:off x="6121400" y="1041400"/>
-            <a:ext cx="2781300" cy="3708400"/>
+            <a:off x="6121400" y="1155700"/>
+            <a:ext cx="2781300" cy="3479800"/>
           </a:xfrm>
           <a:prstGeom prst="rect">
             <a:avLst/>

--- a/docs/ecostats_lectures/lecture_09/09_01_lecture_powerpoint.pptx
+++ b/docs/ecostats_lectures/lecture_09/09_01_lecture_powerpoint.pptx
@@ -6141,7 +6141,7 @@
                 </a:pPr>
                 <a:r>
                   <a:rPr/>
-                  <a:t>The calculation for slope (b) is:</a:t>
+                  <a:t>The calculation for slope (m) is:</a:t>
                 </a:r>
                 <a:br/>
               </a:p>
@@ -6156,7 +6156,7 @@
                     </m:oMathParaPr>
                     <m:oMath>
                       <m:r>
-                        <m:t>b</m:t>
+                        <m:t>m</m:t>
                       </m:r>
                       <m:r>
                         <m:rPr>
@@ -6625,12 +6625,12 @@
                 </a:pPr>
                 <a:r>
                   <a:rPr/>
-                  <a:t>Intercept (a): </a:t>
+                  <a:t>Intercept (b): </a:t>
                 </a:r>
                 <a14:m>
                   <m:oMath xmlns:m="http://schemas.openxmlformats.org/officeDocument/2006/math">
                     <m:r>
-                      <m:t>a</m:t>
+                      <m:t>b</m:t>
                     </m:r>
                     <m:r>
                       <m:rPr>
@@ -6655,7 +6655,7 @@
                       <m:t>−</m:t>
                     </m:r>
                     <m:r>
-                      <m:t>b</m:t>
+                      <m:t>m</m:t>
                     </m:r>
                     <m:acc>
                       <m:accPr>
